--- a/library/b05-notion/b05-notion.pptx
+++ b/library/b05-notion/b05-notion.pptx
@@ -8,8 +8,8 @@
     <p:notesMasterId r:id="rId21"/>
   </p:notesMasterIdLst>
   <p:sldIdLst>
-    <p:sldId id="275" r:id="rId26"/>
-    <p:sldId id="276" r:id="rId27"/>
+    <p:sldId id="275" r:id="rId11"/>
+    <p:sldId id="276" r:id="rId26"/>
     <p:sldId id="256" r:id="rId2"/>
     <p:sldId id="257" r:id="rId3"/>
     <p:sldId id="258" r:id="rId4"/>
@@ -19,7 +19,6 @@
     <p:sldId id="262" r:id="rId8"/>
     <p:sldId id="263" r:id="rId9"/>
     <p:sldId id="264" r:id="rId10"/>
-    <p:sldId id="274" r:id="rId11"/>
     <p:sldId id="265" r:id="rId12"/>
     <p:sldId id="266" r:id="rId13"/>
     <p:sldId id="267" r:id="rId14"/>
@@ -27,9 +26,9 @@
     <p:sldId id="269" r:id="rId16"/>
     <p:sldId id="270" r:id="rId17"/>
     <p:sldId id="271" r:id="rId18"/>
-    <p:sldId id="272" r:id="rId19"/>
+    <p:sldId id="274" r:id="rId19"/>
     <p:sldId id="273" r:id="rId20"/>
-    <p:sldId id="277" r:id="rId28"/>
+    <p:sldId id="277" r:id="rId27"/>
   </p:sldIdLst>
   <p:sldSz cx="12192000" cy="6858000"/>
   <p:notesSz cx="6858000" cy="12192000"/>
@@ -342,114 +341,6 @@
 </p:notes>
 </file>
 
-<file path=ppt/notesSlides/notesSlide10.xml><?xml version="1.0" encoding="utf-8"?>
-<p:notes xmlns:a="http://schemas.openxmlformats.org/drawingml/2006/main" xmlns:r="http://schemas.openxmlformats.org/officeDocument/2006/relationships" xmlns:p="http://schemas.openxmlformats.org/presentationml/2006/main">
-  <p:cSld>
-    <p:spTree>
-      <p:nvGrpSpPr>
-        <p:cNvPr id="1" name="">
-          <a:extLst>
-            <a:ext uri="{FF2B5EF4-FFF2-40B4-BE49-F238E27FC236}">
-              <a16:creationId xmlns:a16="http://schemas.microsoft.com/office/drawing/2014/main" id="{A3941723-DDF7-FA0E-C9E7-AD084EEE8A0D}"/>
-            </a:ext>
-          </a:extLst>
-        </p:cNvPr>
-        <p:cNvGrpSpPr/>
-        <p:nvPr/>
-      </p:nvGrpSpPr>
-      <p:grpSpPr>
-        <a:xfrm>
-          <a:off x="0" y="0"/>
-          <a:ext cx="0" cy="0"/>
-          <a:chOff x="0" y="0"/>
-          <a:chExt cx="0" cy="0"/>
-        </a:xfrm>
-      </p:grpSpPr>
-      <p:sp>
-        <p:nvSpPr>
-          <p:cNvPr id="2" name="Slide Image Placeholder 1">
-            <a:extLst>
-              <a:ext uri="{FF2B5EF4-FFF2-40B4-BE49-F238E27FC236}">
-                <a16:creationId xmlns:a16="http://schemas.microsoft.com/office/drawing/2014/main" id="{6464CD83-1368-6F9E-79AA-3F79B13BFA28}"/>
-              </a:ext>
-            </a:extLst>
-          </p:cNvPr>
-          <p:cNvSpPr>
-            <a:spLocks noGrp="1" noRot="1" noChangeAspect="1"/>
-          </p:cNvSpPr>
-          <p:nvPr>
-            <p:ph type="sldImg"/>
-          </p:nvPr>
-        </p:nvSpPr>
-        <p:spPr/>
-      </p:sp>
-      <p:sp>
-        <p:nvSpPr>
-          <p:cNvPr id="3" name="Notes Placeholder 2">
-            <a:extLst>
-              <a:ext uri="{FF2B5EF4-FFF2-40B4-BE49-F238E27FC236}">
-                <a16:creationId xmlns:a16="http://schemas.microsoft.com/office/drawing/2014/main" id="{7B2EF201-F2FB-A0DA-7EE4-EA3FF527AB14}"/>
-              </a:ext>
-            </a:extLst>
-          </p:cNvPr>
-          <p:cNvSpPr>
-            <a:spLocks noGrp="1"/>
-          </p:cNvSpPr>
-          <p:nvPr>
-            <p:ph type="body" idx="1"/>
-          </p:nvPr>
-        </p:nvSpPr>
-        <p:spPr/>
-        <p:txBody>
-          <a:bodyPr/>
-          <a:lstStyle/>
-          <a:p>
-            <a:endParaRPr lang="en-US" dirty="0"/>
-          </a:p>
-        </p:txBody>
-      </p:sp>
-      <p:sp>
-        <p:nvSpPr>
-          <p:cNvPr id="4" name="Slide Number Placeholder 3">
-            <a:extLst>
-              <a:ext uri="{FF2B5EF4-FFF2-40B4-BE49-F238E27FC236}">
-                <a16:creationId xmlns:a16="http://schemas.microsoft.com/office/drawing/2014/main" id="{E6C09EF5-915F-D480-2233-DD05551FEBDB}"/>
-              </a:ext>
-            </a:extLst>
-          </p:cNvPr>
-          <p:cNvSpPr>
-            <a:spLocks noGrp="1"/>
-          </p:cNvSpPr>
-          <p:nvPr>
-            <p:ph type="sldNum" sz="quarter" idx="10"/>
-          </p:nvPr>
-        </p:nvSpPr>
-        <p:spPr/>
-        <p:txBody>
-          <a:bodyPr/>
-          <a:lstStyle/>
-          <a:p>
-            <a:fld id="{F7021451-1387-4CA6-816F-3879F97B5CBC}" type="slidenum">
-              <a:rPr lang="en-US"/>
-              <a:t>10</a:t>
-            </a:fld>
-            <a:endParaRPr lang="en-US"/>
-          </a:p>
-        </p:txBody>
-      </p:sp>
-    </p:spTree>
-    <p:extLst>
-      <p:ext uri="{BB962C8B-B14F-4D97-AF65-F5344CB8AC3E}">
-        <p14:creationId xmlns:p14="http://schemas.microsoft.com/office/powerpoint/2010/main" val="1356737229"/>
-      </p:ext>
-    </p:extLst>
-  </p:cSld>
-  <p:clrMapOvr>
-    <a:masterClrMapping/>
-  </p:clrMapOvr>
-</p:notes>
-</file>
-
 <file path=ppt/notesSlides/notesSlide11.xml><?xml version="1.0" encoding="utf-8"?>
 <p:notes xmlns:a="http://schemas.openxmlformats.org/drawingml/2006/main" xmlns:r="http://schemas.openxmlformats.org/officeDocument/2006/relationships" xmlns:p="http://schemas.openxmlformats.org/presentationml/2006/main">
   <p:cSld>
@@ -1020,90 +911,6 @@
             <a:fld id="{F7021451-1387-4CA6-816F-3879F97B5CBC}" type="slidenum">
               <a:rPr lang="en-US"/>
               <a:t>17</a:t>
-            </a:fld>
-            <a:endParaRPr lang="en-US"/>
-          </a:p>
-        </p:txBody>
-      </p:sp>
-    </p:spTree>
-    <p:extLst>
-      <p:ext uri="{BB962C8B-B14F-4D97-AF65-F5344CB8AC3E}">
-        <p14:creationId xmlns:p14="http://schemas.microsoft.com/office/powerpoint/2010/main" val="1024086991"/>
-      </p:ext>
-    </p:extLst>
-  </p:cSld>
-  <p:clrMapOvr>
-    <a:masterClrMapping/>
-  </p:clrMapOvr>
-</p:notes>
-</file>
-
-<file path=ppt/notesSlides/notesSlide18.xml><?xml version="1.0" encoding="utf-8"?>
-<p:notes xmlns:a="http://schemas.openxmlformats.org/drawingml/2006/main" xmlns:r="http://schemas.openxmlformats.org/officeDocument/2006/relationships" xmlns:p="http://schemas.openxmlformats.org/presentationml/2006/main">
-  <p:cSld>
-    <p:spTree>
-      <p:nvGrpSpPr>
-        <p:cNvPr id="1" name=""/>
-        <p:cNvGrpSpPr/>
-        <p:nvPr/>
-      </p:nvGrpSpPr>
-      <p:grpSpPr>
-        <a:xfrm>
-          <a:off x="0" y="0"/>
-          <a:ext cx="0" cy="0"/>
-          <a:chOff x="0" y="0"/>
-          <a:chExt cx="0" cy="0"/>
-        </a:xfrm>
-      </p:grpSpPr>
-      <p:sp>
-        <p:nvSpPr>
-          <p:cNvPr id="2" name="Slide Image Placeholder 1"/>
-          <p:cNvSpPr>
-            <a:spLocks noGrp="1" noRot="1" noChangeAspect="1"/>
-          </p:cNvSpPr>
-          <p:nvPr>
-            <p:ph type="sldImg"/>
-          </p:nvPr>
-        </p:nvSpPr>
-        <p:spPr/>
-      </p:sp>
-      <p:sp>
-        <p:nvSpPr>
-          <p:cNvPr id="3" name="Notes Placeholder 2"/>
-          <p:cNvSpPr>
-            <a:spLocks noGrp="1"/>
-          </p:cNvSpPr>
-          <p:nvPr>
-            <p:ph type="body" idx="1"/>
-          </p:nvPr>
-        </p:nvSpPr>
-        <p:spPr/>
-        <p:txBody>
-          <a:bodyPr/>
-          <a:lstStyle/>
-          <a:p>
-            <a:endParaRPr lang="en-US" dirty="0"/>
-          </a:p>
-        </p:txBody>
-      </p:sp>
-      <p:sp>
-        <p:nvSpPr>
-          <p:cNvPr id="4" name="Slide Number Placeholder 3"/>
-          <p:cNvSpPr>
-            <a:spLocks noGrp="1"/>
-          </p:cNvSpPr>
-          <p:nvPr>
-            <p:ph type="sldNum" sz="quarter" idx="10"/>
-          </p:nvPr>
-        </p:nvSpPr>
-        <p:spPr/>
-        <p:txBody>
-          <a:bodyPr/>
-          <a:lstStyle/>
-          <a:p>
-            <a:fld id="{F7021451-1387-4CA6-816F-3879F97B5CBC}" type="slidenum">
-              <a:rPr lang="en-US"/>
-              <a:t>18</a:t>
             </a:fld>
             <a:endParaRPr lang="en-US"/>
           </a:p>
@@ -3000,45 +2807,6 @@
       </p:sp>
       <p:sp>
         <p:nvSpPr>
-          <p:cNvPr id="26" name="Text 18"/>
-          <p:cNvSpPr txBox="1"/>
-          <p:nvPr/>
-        </p:nvSpPr>
-        <p:spPr>
-          <a:xfrm>
-            <a:off x="10340035" y="724559"/>
-            <a:ext cx="1043330" cy="191110"/>
-          </a:xfrm>
-          <a:prstGeom prst="rect">
-            <a:avLst/>
-          </a:prstGeom>
-          <a:noFill/>
-          <a:ln/>
-        </p:spPr>
-        <p:txBody>
-          <a:bodyPr wrap="square" lIns="0" tIns="0" rIns="0" bIns="0" rtlCol="0" anchor="ctr"/>
-          <a:lstStyle/>
-          <a:p>
-            <a:pPr marL="0" indent="0" algn="r">
-              <a:buNone/>
-            </a:pPr>
-            <a:r>
-              <a:rPr lang="en-US" sz="1000" dirty="0">
-                <a:solidFill>
-                  <a:srgbClr val="6B7280"/>
-                </a:solidFill>
-                <a:latin typeface="Noto Sans KR" pitchFamily="34" charset="0"/>
-                <a:ea typeface="Noto Sans KR" pitchFamily="34" charset="-122"/>
-                <a:cs typeface="Noto Sans KR" pitchFamily="34" charset="-120"/>
-              </a:rPr>
-              <a:t>Ver. 2026.01</a:t>
-            </a:r>
-            <a:endParaRPr lang="en-US" sz="1000" dirty="0"/>
-          </a:p>
-        </p:txBody>
-      </p:sp>
-      <p:sp>
-        <p:nvSpPr>
           <p:cNvPr id="30" name="Shape 5">
             <a:extLst>
               <a:ext uri="{FF2B5EF4-FFF2-40B4-BE49-F238E27FC236}">
@@ -3141,7 +2909,7 @@
                 <a:latin typeface="Noto Sans KR" pitchFamily="34" charset="0"/>
                 <a:ea typeface="Noto Sans KR" pitchFamily="34" charset="-122"/>
               </a:rPr>
-              <a:t>이 애 본</a:t>
+              <a:t>이애본</a:t>
             </a:r>
             <a:br>
               <a:rPr lang="en-US" altLang="ko-KR" sz="1500" b="1" dirty="0">
@@ -3160,7 +2928,7 @@
                 <a:latin typeface="Noto Sans KR" pitchFamily="34" charset="0"/>
                 <a:ea typeface="Noto Sans KR" pitchFamily="34" charset="-122"/>
               </a:rPr>
-              <a:t>한신대학교 </a:t>
+              <a:t>드림아이티비즈(DreamIT Biz)</a:t>
             </a:r>
             <a:r>
               <a:rPr lang="en-US" altLang="ko-KR" sz="1500" b="1" dirty="0">
@@ -3170,9 +2938,9 @@
                 <a:latin typeface="Noto Sans KR" pitchFamily="34" charset="0"/>
                 <a:ea typeface="Noto Sans KR" pitchFamily="34" charset="-122"/>
               </a:rPr>
-              <a:t>AI.SW</a:t>
-            </a:r>
-            <a:r>
+              <a:t/>
+            </a:r>
+            <a:br>
               <a:rPr lang="ko-KR" altLang="en-US" sz="1500" b="1" dirty="0">
                 <a:solidFill>
                   <a:srgbClr val="FFFFFF"/>
@@ -3180,8 +2948,7 @@
                 <a:latin typeface="Noto Sans KR" pitchFamily="34" charset="0"/>
                 <a:ea typeface="Noto Sans KR" pitchFamily="34" charset="-122"/>
               </a:rPr>
-              <a:t>대학 </a:t>
-            </a:r>
+            </a:br>
             <a:r>
               <a:rPr lang="en-US" altLang="ko-KR" sz="1500" b="1" dirty="0">
                 <a:solidFill>
@@ -3191,7 +2958,7 @@
                 <a:ea typeface="Noto Sans KR" pitchFamily="34" charset="-122"/>
                 <a:hlinkClick r:id="rId9"/>
               </a:rPr>
-              <a:t>aebon@hs.ac.kr</a:t>
+              <a:t>aebon@dreamitbiz.com</a:t>
             </a:r>
             <a:r>
               <a:rPr lang="ko-KR" altLang="en-US" sz="1500" b="1" dirty="0">
@@ -3247,7 +3014,7 @@
                 </a:solidFill>
                 <a:latin typeface="Pretendard"/>
               </a:rPr>
-              <a:t>© 2026 이애본(드림아이티비즈) · useful-ai.dreamitbiz.com · 교육 목적 비영리 이용 · 출처 표기</a:t>
+              <a:t>© 2026 이애본 · 홍문원(洪文院) 발행 · CC BY-NC-ND 4.0 · useful-ai.dreamitbiz.com</a:t>
             </a:r>
           </a:p>
         </p:txBody>
@@ -3261,1225 +3028,6 @@
 </file>
 
 <file path=ppt/slides/slide10.xml><?xml version="1.0" encoding="utf-8"?>
-<p:sld xmlns:a="http://schemas.openxmlformats.org/drawingml/2006/main" xmlns:r="http://schemas.openxmlformats.org/officeDocument/2006/relationships" xmlns:p="http://schemas.openxmlformats.org/presentationml/2006/main">
-  <p:cSld>
-    <p:spTree>
-      <p:nvGrpSpPr>
-        <p:cNvPr id="1" name="">
-          <a:extLst>
-            <a:ext uri="{FF2B5EF4-FFF2-40B4-BE49-F238E27FC236}">
-              <a16:creationId xmlns:a16="http://schemas.microsoft.com/office/drawing/2014/main" id="{ECC93F56-2259-BF33-E77F-305EBFDA45ED}"/>
-            </a:ext>
-          </a:extLst>
-        </p:cNvPr>
-        <p:cNvGrpSpPr/>
-        <p:nvPr/>
-      </p:nvGrpSpPr>
-      <p:grpSpPr>
-        <a:xfrm>
-          <a:off x="0" y="0"/>
-          <a:ext cx="0" cy="0"/>
-          <a:chOff x="0" y="0"/>
-          <a:chExt cx="0" cy="0"/>
-        </a:xfrm>
-      </p:grpSpPr>
-      <p:sp>
-        <p:nvSpPr>
-          <p:cNvPr id="2" name="Shape 0">
-            <a:extLst>
-              <a:ext uri="{FF2B5EF4-FFF2-40B4-BE49-F238E27FC236}">
-                <a16:creationId xmlns:a16="http://schemas.microsoft.com/office/drawing/2014/main" id="{70C2F394-2BEE-3A8B-B49F-5176E45A3D69}"/>
-              </a:ext>
-            </a:extLst>
-          </p:cNvPr>
-          <p:cNvSpPr/>
-          <p:nvPr/>
-        </p:nvSpPr>
-        <p:spPr>
-          <a:xfrm>
-            <a:off x="11684" y="0"/>
-            <a:ext cx="12191695" cy="6858000"/>
-          </a:xfrm>
-          <a:prstGeom prst="rect">
-            <a:avLst/>
-          </a:prstGeom>
-          <a:solidFill>
-            <a:srgbClr val="0F172A"/>
-          </a:solidFill>
-          <a:ln/>
-        </p:spPr>
-        <p:txBody>
-          <a:bodyPr/>
-          <a:lstStyle/>
-          <a:p>
-            <a:endParaRPr lang="ko-KR" altLang="en-US"/>
-          </a:p>
-        </p:txBody>
-      </p:sp>
-      <p:sp>
-        <p:nvSpPr>
-          <p:cNvPr id="3" name="Shape 1">
-            <a:extLst>
-              <a:ext uri="{FF2B5EF4-FFF2-40B4-BE49-F238E27FC236}">
-                <a16:creationId xmlns:a16="http://schemas.microsoft.com/office/drawing/2014/main" id="{540D1D76-71EC-912B-4E36-8378E112B352}"/>
-              </a:ext>
-            </a:extLst>
-          </p:cNvPr>
-          <p:cNvSpPr/>
-          <p:nvPr/>
-        </p:nvSpPr>
-        <p:spPr>
-          <a:xfrm>
-            <a:off x="8382305" y="3047695"/>
-            <a:ext cx="4762195" cy="4762195"/>
-          </a:xfrm>
-          <a:prstGeom prst="ellipse">
-            <a:avLst/>
-          </a:prstGeom>
-          <a:noFill/>
-          <a:ln w="25400">
-            <a:solidFill>
-              <a:srgbClr val="FFFFFF">
-                <a:alpha val="5000"/>
-              </a:srgbClr>
-            </a:solidFill>
-            <a:prstDash val="solid"/>
-          </a:ln>
-        </p:spPr>
-        <p:txBody>
-          <a:bodyPr/>
-          <a:lstStyle/>
-          <a:p>
-            <a:endParaRPr lang="ko-KR" altLang="en-US"/>
-          </a:p>
-        </p:txBody>
-      </p:sp>
-      <p:sp>
-        <p:nvSpPr>
-          <p:cNvPr id="4" name="Shape 2">
-            <a:extLst>
-              <a:ext uri="{FF2B5EF4-FFF2-40B4-BE49-F238E27FC236}">
-                <a16:creationId xmlns:a16="http://schemas.microsoft.com/office/drawing/2014/main" id="{9CCBDA6E-242E-19CC-0B73-5E32D2749CEE}"/>
-              </a:ext>
-            </a:extLst>
-          </p:cNvPr>
-          <p:cNvSpPr/>
-          <p:nvPr/>
-        </p:nvSpPr>
-        <p:spPr>
-          <a:xfrm>
-            <a:off x="9525305" y="1429207"/>
-            <a:ext cx="1904695" cy="1904695"/>
-          </a:xfrm>
-          <a:prstGeom prst="roundRect">
-            <a:avLst>
-              <a:gd name="adj" fmla="val 4801"/>
-            </a:avLst>
-          </a:prstGeom>
-          <a:solidFill>
-            <a:srgbClr val="3B82F6">
-              <a:alpha val="10000"/>
-            </a:srgbClr>
-          </a:solidFill>
-          <a:ln/>
-        </p:spPr>
-        <p:txBody>
-          <a:bodyPr/>
-          <a:lstStyle/>
-          <a:p>
-            <a:endParaRPr lang="ko-KR" altLang="en-US"/>
-          </a:p>
-        </p:txBody>
-      </p:sp>
-      <p:pic>
-        <p:nvPicPr>
-          <p:cNvPr id="5" name="Image 0" descr="preencoded.png">
-            <a:extLst>
-              <a:ext uri="{FF2B5EF4-FFF2-40B4-BE49-F238E27FC236}">
-                <a16:creationId xmlns:a16="http://schemas.microsoft.com/office/drawing/2014/main" id="{AEBC3EA7-6D5C-B143-1800-236A1B869AE6}"/>
-              </a:ext>
-            </a:extLst>
-          </p:cNvPr>
-          <p:cNvPicPr>
-            <a:picLocks noChangeAspect="1"/>
-          </p:cNvPicPr>
-          <p:nvPr/>
-        </p:nvPicPr>
-        <p:blipFill>
-          <a:blip r:embed="rId3">
-            <a:alphaModFix amt="50000"/>
-          </a:blip>
-          <a:srcRect t="-3936" b="-3936"/>
-          <a:stretch/>
-        </p:blipFill>
-        <p:spPr>
-          <a:xfrm>
-            <a:off x="10012680" y="1936699"/>
-            <a:ext cx="933602" cy="895198"/>
-          </a:xfrm>
-          <a:prstGeom prst="rect">
-            <a:avLst/>
-          </a:prstGeom>
-        </p:spPr>
-      </p:pic>
-      <p:sp>
-        <p:nvSpPr>
-          <p:cNvPr id="6" name="Shape 3">
-            <a:extLst>
-              <a:ext uri="{FF2B5EF4-FFF2-40B4-BE49-F238E27FC236}">
-                <a16:creationId xmlns:a16="http://schemas.microsoft.com/office/drawing/2014/main" id="{4FE9268F-6C9E-CDB5-651F-D635956D9E0E}"/>
-              </a:ext>
-            </a:extLst>
-          </p:cNvPr>
-          <p:cNvSpPr/>
-          <p:nvPr/>
-        </p:nvSpPr>
-        <p:spPr>
-          <a:xfrm>
-            <a:off x="761695" y="761695"/>
-            <a:ext cx="761695" cy="75895"/>
-          </a:xfrm>
-          <a:prstGeom prst="rect">
-            <a:avLst/>
-          </a:prstGeom>
-          <a:solidFill>
-            <a:srgbClr val="3B82F6"/>
-          </a:solidFill>
-          <a:ln/>
-        </p:spPr>
-        <p:txBody>
-          <a:bodyPr/>
-          <a:lstStyle/>
-          <a:p>
-            <a:endParaRPr lang="ko-KR" altLang="en-US"/>
-          </a:p>
-        </p:txBody>
-      </p:sp>
-      <p:sp>
-        <p:nvSpPr>
-          <p:cNvPr id="7" name="Shape 4">
-            <a:extLst>
-              <a:ext uri="{FF2B5EF4-FFF2-40B4-BE49-F238E27FC236}">
-                <a16:creationId xmlns:a16="http://schemas.microsoft.com/office/drawing/2014/main" id="{918C3FA2-37F2-32EF-9E59-2919CF8A5324}"/>
-              </a:ext>
-            </a:extLst>
-          </p:cNvPr>
-          <p:cNvSpPr/>
-          <p:nvPr/>
-        </p:nvSpPr>
-        <p:spPr>
-          <a:xfrm>
-            <a:off x="787298" y="4425594"/>
-            <a:ext cx="1828800" cy="590702"/>
-          </a:xfrm>
-          <a:prstGeom prst="roundRect">
-            <a:avLst>
-              <a:gd name="adj" fmla="val 19974"/>
-            </a:avLst>
-          </a:prstGeom>
-          <a:solidFill>
-            <a:srgbClr val="FFFFFF">
-              <a:alpha val="10000"/>
-            </a:srgbClr>
-          </a:solidFill>
-          <a:ln w="12700">
-            <a:solidFill>
-              <a:srgbClr val="FFFFFF">
-                <a:alpha val="10000"/>
-              </a:srgbClr>
-            </a:solidFill>
-            <a:prstDash val="solid"/>
-          </a:ln>
-        </p:spPr>
-        <p:txBody>
-          <a:bodyPr/>
-          <a:lstStyle/>
-          <a:p>
-            <a:endParaRPr lang="ko-KR" altLang="en-US"/>
-          </a:p>
-        </p:txBody>
-      </p:sp>
-      <p:pic>
-        <p:nvPicPr>
-          <p:cNvPr id="8" name="Image 1" descr="preencoded.png">
-            <a:extLst>
-              <a:ext uri="{FF2B5EF4-FFF2-40B4-BE49-F238E27FC236}">
-                <a16:creationId xmlns:a16="http://schemas.microsoft.com/office/drawing/2014/main" id="{F796B742-8A4D-9DCC-0BC5-34F3C14B2CBB}"/>
-              </a:ext>
-            </a:extLst>
-          </p:cNvPr>
-          <p:cNvPicPr>
-            <a:picLocks noChangeAspect="1"/>
-          </p:cNvPicPr>
-          <p:nvPr/>
-        </p:nvPicPr>
-        <p:blipFill>
-          <a:blip r:embed="rId4"/>
-          <a:srcRect/>
-          <a:stretch/>
-        </p:blipFill>
-        <p:spPr>
-          <a:xfrm>
-            <a:off x="1025957" y="4625847"/>
-            <a:ext cx="190195" cy="190195"/>
-          </a:xfrm>
-          <a:prstGeom prst="rect">
-            <a:avLst/>
-          </a:prstGeom>
-        </p:spPr>
-      </p:pic>
-      <p:sp>
-        <p:nvSpPr>
-          <p:cNvPr id="9" name="Shape 5">
-            <a:extLst>
-              <a:ext uri="{FF2B5EF4-FFF2-40B4-BE49-F238E27FC236}">
-                <a16:creationId xmlns:a16="http://schemas.microsoft.com/office/drawing/2014/main" id="{9591EF46-5EB6-6995-EE77-3FC55D672D98}"/>
-              </a:ext>
-            </a:extLst>
-          </p:cNvPr>
-          <p:cNvSpPr/>
-          <p:nvPr/>
-        </p:nvSpPr>
-        <p:spPr>
-          <a:xfrm>
-            <a:off x="2916021" y="4425594"/>
-            <a:ext cx="1781251" cy="590702"/>
-          </a:xfrm>
-          <a:prstGeom prst="roundRect">
-            <a:avLst>
-              <a:gd name="adj" fmla="val 19974"/>
-            </a:avLst>
-          </a:prstGeom>
-          <a:solidFill>
-            <a:srgbClr val="FFFFFF">
-              <a:alpha val="10000"/>
-            </a:srgbClr>
-          </a:solidFill>
-          <a:ln w="12700">
-            <a:solidFill>
-              <a:srgbClr val="FFFFFF">
-                <a:alpha val="10000"/>
-              </a:srgbClr>
-            </a:solidFill>
-            <a:prstDash val="solid"/>
-          </a:ln>
-        </p:spPr>
-        <p:txBody>
-          <a:bodyPr/>
-          <a:lstStyle/>
-          <a:p>
-            <a:endParaRPr lang="ko-KR" altLang="en-US"/>
-          </a:p>
-        </p:txBody>
-      </p:sp>
-      <p:pic>
-        <p:nvPicPr>
-          <p:cNvPr id="10" name="Image 2" descr="preencoded.png">
-            <a:extLst>
-              <a:ext uri="{FF2B5EF4-FFF2-40B4-BE49-F238E27FC236}">
-                <a16:creationId xmlns:a16="http://schemas.microsoft.com/office/drawing/2014/main" id="{B601C4A4-E01B-C5AB-D73E-577426E6A83A}"/>
-              </a:ext>
-            </a:extLst>
-          </p:cNvPr>
-          <p:cNvPicPr>
-            <a:picLocks noChangeAspect="1"/>
-          </p:cNvPicPr>
-          <p:nvPr/>
-        </p:nvPicPr>
-        <p:blipFill>
-          <a:blip r:embed="rId5"/>
-          <a:srcRect/>
-          <a:stretch/>
-        </p:blipFill>
-        <p:spPr>
-          <a:xfrm>
-            <a:off x="3153765" y="4625847"/>
-            <a:ext cx="190195" cy="190195"/>
-          </a:xfrm>
-          <a:prstGeom prst="rect">
-            <a:avLst/>
-          </a:prstGeom>
-        </p:spPr>
-      </p:pic>
-      <p:sp>
-        <p:nvSpPr>
-          <p:cNvPr id="11" name="Shape 6">
-            <a:extLst>
-              <a:ext uri="{FF2B5EF4-FFF2-40B4-BE49-F238E27FC236}">
-                <a16:creationId xmlns:a16="http://schemas.microsoft.com/office/drawing/2014/main" id="{C4254758-471B-BAF3-E4A2-99257C2FB90F}"/>
-              </a:ext>
-            </a:extLst>
-          </p:cNvPr>
-          <p:cNvSpPr/>
-          <p:nvPr/>
-        </p:nvSpPr>
-        <p:spPr>
-          <a:xfrm>
-            <a:off x="4926788" y="4425594"/>
-            <a:ext cx="2038198" cy="590702"/>
-          </a:xfrm>
-          <a:prstGeom prst="roundRect">
-            <a:avLst>
-              <a:gd name="adj" fmla="val 19974"/>
-            </a:avLst>
-          </a:prstGeom>
-          <a:solidFill>
-            <a:srgbClr val="FFFFFF">
-              <a:alpha val="10000"/>
-            </a:srgbClr>
-          </a:solidFill>
-          <a:ln w="12700">
-            <a:solidFill>
-              <a:srgbClr val="FFFFFF">
-                <a:alpha val="10000"/>
-              </a:srgbClr>
-            </a:solidFill>
-            <a:prstDash val="solid"/>
-          </a:ln>
-        </p:spPr>
-        <p:txBody>
-          <a:bodyPr/>
-          <a:lstStyle/>
-          <a:p>
-            <a:endParaRPr lang="ko-KR" altLang="en-US"/>
-          </a:p>
-        </p:txBody>
-      </p:sp>
-      <p:pic>
-        <p:nvPicPr>
-          <p:cNvPr id="12" name="Image 3" descr="preencoded.png">
-            <a:extLst>
-              <a:ext uri="{FF2B5EF4-FFF2-40B4-BE49-F238E27FC236}">
-                <a16:creationId xmlns:a16="http://schemas.microsoft.com/office/drawing/2014/main" id="{C4B3CD3F-084D-E2C9-5B6C-87E368047D88}"/>
-              </a:ext>
-            </a:extLst>
-          </p:cNvPr>
-          <p:cNvPicPr>
-            <a:picLocks noChangeAspect="1"/>
-          </p:cNvPicPr>
-          <p:nvPr/>
-        </p:nvPicPr>
-        <p:blipFill>
-          <a:blip r:embed="rId6"/>
-          <a:srcRect/>
-          <a:stretch/>
-        </p:blipFill>
-        <p:spPr>
-          <a:xfrm>
-            <a:off x="5164532" y="4625847"/>
-            <a:ext cx="237744" cy="190195"/>
-          </a:xfrm>
-          <a:prstGeom prst="rect">
-            <a:avLst/>
-          </a:prstGeom>
-        </p:spPr>
-      </p:pic>
-      <p:sp>
-        <p:nvSpPr>
-          <p:cNvPr id="13" name="Text 7">
-            <a:extLst>
-              <a:ext uri="{FF2B5EF4-FFF2-40B4-BE49-F238E27FC236}">
-                <a16:creationId xmlns:a16="http://schemas.microsoft.com/office/drawing/2014/main" id="{E85A6B4B-274E-2271-DAB0-7D09C717BA21}"/>
-              </a:ext>
-            </a:extLst>
-          </p:cNvPr>
-          <p:cNvSpPr txBox="1"/>
-          <p:nvPr/>
-        </p:nvSpPr>
-        <p:spPr>
-          <a:xfrm>
-            <a:off x="761695" y="915314"/>
-            <a:ext cx="2448763" cy="277063"/>
-          </a:xfrm>
-          <a:prstGeom prst="rect">
-            <a:avLst/>
-          </a:prstGeom>
-          <a:noFill/>
-          <a:ln/>
-        </p:spPr>
-        <p:txBody>
-          <a:bodyPr wrap="square" lIns="0" tIns="0" rIns="0" bIns="0" rtlCol="0" anchor="ctr"/>
-          <a:lstStyle/>
-          <a:p>
-            <a:pPr marL="0" indent="0" algn="l">
-              <a:buNone/>
-            </a:pPr>
-            <a:r>
-              <a:rPr lang="en-US" sz="1500" b="1" dirty="0">
-                <a:solidFill>
-                  <a:srgbClr val="60A5FA"/>
-                </a:solidFill>
-                <a:latin typeface="Noto Sans KR" pitchFamily="34" charset="0"/>
-                <a:ea typeface="Noto Sans KR" pitchFamily="34" charset="-122"/>
-                <a:cs typeface="Noto Sans KR" pitchFamily="34" charset="-120"/>
-              </a:rPr>
-              <a:t>UNIVERSITY  EDITION</a:t>
-            </a:r>
-            <a:endParaRPr lang="en-US" sz="1500" dirty="0"/>
-          </a:p>
-        </p:txBody>
-      </p:sp>
-      <p:sp>
-        <p:nvSpPr>
-          <p:cNvPr id="14" name="Text 8">
-            <a:extLst>
-              <a:ext uri="{FF2B5EF4-FFF2-40B4-BE49-F238E27FC236}">
-                <a16:creationId xmlns:a16="http://schemas.microsoft.com/office/drawing/2014/main" id="{BE806170-5B0F-A740-50A3-7E64D1B0E29E}"/>
-              </a:ext>
-            </a:extLst>
-          </p:cNvPr>
-          <p:cNvSpPr txBox="1"/>
-          <p:nvPr/>
-        </p:nvSpPr>
-        <p:spPr>
-          <a:xfrm>
-            <a:off x="751637" y="1518842"/>
-            <a:ext cx="3743554" cy="829361"/>
-          </a:xfrm>
-          <a:prstGeom prst="rect">
-            <a:avLst/>
-          </a:prstGeom>
-          <a:noFill/>
-          <a:ln/>
-        </p:spPr>
-        <p:txBody>
-          <a:bodyPr wrap="square" lIns="0" tIns="0" rIns="0" bIns="0" rtlCol="0" anchor="ctr"/>
-          <a:lstStyle/>
-          <a:p>
-            <a:pPr marL="0" indent="0" algn="l">
-              <a:buNone/>
-            </a:pPr>
-            <a:r>
-              <a:rPr lang="en-US" sz="4500" b="1" dirty="0">
-                <a:solidFill>
-                  <a:srgbClr val="FFFFFF"/>
-                </a:solidFill>
-                <a:latin typeface="Noto Sans KR" pitchFamily="34" charset="0"/>
-                <a:ea typeface="Noto Sans KR" pitchFamily="34" charset="-122"/>
-                <a:cs typeface="Noto Sans KR" pitchFamily="34" charset="-120"/>
-              </a:rPr>
-              <a:t>대학생을 위한</a:t>
-            </a:r>
-            <a:endParaRPr lang="en-US" sz="4500" dirty="0"/>
-          </a:p>
-        </p:txBody>
-      </p:sp>
-      <p:sp>
-        <p:nvSpPr>
-          <p:cNvPr id="15" name="Text 9">
-            <a:extLst>
-              <a:ext uri="{FF2B5EF4-FFF2-40B4-BE49-F238E27FC236}">
-                <a16:creationId xmlns:a16="http://schemas.microsoft.com/office/drawing/2014/main" id="{8EF0DB82-9D4B-FA24-38D1-9B6211C03064}"/>
-              </a:ext>
-            </a:extLst>
-          </p:cNvPr>
-          <p:cNvSpPr txBox="1"/>
-          <p:nvPr/>
-        </p:nvSpPr>
-        <p:spPr>
-          <a:xfrm>
-            <a:off x="751637" y="2232988"/>
-            <a:ext cx="4963363" cy="829361"/>
-          </a:xfrm>
-          <a:prstGeom prst="rect">
-            <a:avLst/>
-          </a:prstGeom>
-          <a:noFill/>
-          <a:ln/>
-        </p:spPr>
-        <p:txBody>
-          <a:bodyPr wrap="square" lIns="0" tIns="0" rIns="0" bIns="0" rtlCol="0" anchor="ctr"/>
-          <a:lstStyle/>
-          <a:p>
-            <a:pPr marL="0" indent="0" algn="l">
-              <a:buNone/>
-            </a:pPr>
-            <a:r>
-              <a:rPr lang="en-US" sz="4500" b="1" dirty="0">
-                <a:solidFill>
-                  <a:srgbClr val="FFFFFF"/>
-                </a:solidFill>
-                <a:latin typeface="Noto Sans KR" pitchFamily="34" charset="0"/>
-                <a:ea typeface="Noto Sans KR" pitchFamily="34" charset="-122"/>
-                <a:cs typeface="Noto Sans KR" pitchFamily="34" charset="-120"/>
-              </a:rPr>
-              <a:t>노션 마스터 클래스</a:t>
-            </a:r>
-            <a:endParaRPr lang="en-US" sz="4500" dirty="0"/>
-          </a:p>
-        </p:txBody>
-      </p:sp>
-      <p:sp>
-        <p:nvSpPr>
-          <p:cNvPr id="16" name="Text 10">
-            <a:extLst>
-              <a:ext uri="{FF2B5EF4-FFF2-40B4-BE49-F238E27FC236}">
-                <a16:creationId xmlns:a16="http://schemas.microsoft.com/office/drawing/2014/main" id="{91744A5D-2AA2-40BD-3D6B-1E719B6432A3}"/>
-              </a:ext>
-            </a:extLst>
-          </p:cNvPr>
-          <p:cNvSpPr txBox="1"/>
-          <p:nvPr/>
-        </p:nvSpPr>
-        <p:spPr>
-          <a:xfrm>
-            <a:off x="751637" y="3222368"/>
-            <a:ext cx="8825789" cy="419710"/>
-          </a:xfrm>
-          <a:prstGeom prst="rect">
-            <a:avLst/>
-          </a:prstGeom>
-          <a:noFill/>
-          <a:ln/>
-        </p:spPr>
-        <p:txBody>
-          <a:bodyPr wrap="square" lIns="0" tIns="0" rIns="0" bIns="0" rtlCol="0" anchor="ctr"/>
-          <a:lstStyle/>
-          <a:p>
-            <a:pPr marL="0" indent="0" algn="l">
-              <a:buNone/>
-            </a:pPr>
-            <a:r>
-              <a:rPr lang="en-US" sz="2000" dirty="0">
-                <a:solidFill>
-                  <a:srgbClr val="D1D5DB"/>
-                </a:solidFill>
-                <a:latin typeface="Noto Sans KR" pitchFamily="34" charset="0"/>
-                <a:ea typeface="Noto Sans KR" pitchFamily="34" charset="-122"/>
-                <a:cs typeface="Noto Sans KR" pitchFamily="34" charset="-120"/>
-              </a:rPr>
-              <a:t>블록·페이지·데이터베이스로 </a:t>
-            </a:r>
-            <a:r>
-              <a:rPr lang="en-US" sz="2000" dirty="0" err="1">
-                <a:solidFill>
-                  <a:srgbClr val="D1D5DB"/>
-                </a:solidFill>
-                <a:latin typeface="Noto Sans KR" pitchFamily="34" charset="0"/>
-                <a:ea typeface="Noto Sans KR" pitchFamily="34" charset="-122"/>
-                <a:cs typeface="Noto Sans KR" pitchFamily="34" charset="-120"/>
-              </a:rPr>
-              <a:t>완성하는</a:t>
-            </a:r>
-            <a:r>
-              <a:rPr lang="en-US" sz="2000" dirty="0">
-                <a:solidFill>
-                  <a:srgbClr val="D1D5DB"/>
-                </a:solidFill>
-                <a:latin typeface="Noto Sans KR" pitchFamily="34" charset="0"/>
-                <a:ea typeface="Noto Sans KR" pitchFamily="34" charset="-122"/>
-                <a:cs typeface="Noto Sans KR" pitchFamily="34" charset="-120"/>
-              </a:rPr>
-              <a:t> </a:t>
-            </a:r>
-            <a:r>
-              <a:rPr lang="en-US" sz="2000" dirty="0" err="1">
-                <a:solidFill>
-                  <a:srgbClr val="D1D5DB"/>
-                </a:solidFill>
-                <a:latin typeface="Noto Sans KR" pitchFamily="34" charset="0"/>
-                <a:ea typeface="Noto Sans KR" pitchFamily="34" charset="-122"/>
-                <a:cs typeface="Noto Sans KR" pitchFamily="34" charset="-120"/>
-              </a:rPr>
-              <a:t>학습·과제·프로젝트</a:t>
-            </a:r>
-            <a:r>
-              <a:rPr lang="en-US" sz="2000" dirty="0">
-                <a:solidFill>
-                  <a:srgbClr val="D1D5DB"/>
-                </a:solidFill>
-                <a:latin typeface="Noto Sans KR" pitchFamily="34" charset="0"/>
-                <a:ea typeface="Noto Sans KR" pitchFamily="34" charset="-122"/>
-                <a:cs typeface="Noto Sans KR" pitchFamily="34" charset="-120"/>
-              </a:rPr>
-              <a:t> 운영의 모든 것</a:t>
-            </a:r>
-            <a:endParaRPr lang="en-US" sz="2000" dirty="0"/>
-          </a:p>
-        </p:txBody>
-      </p:sp>
-      <p:sp>
-        <p:nvSpPr>
-          <p:cNvPr id="17" name="Text 11">
-            <a:extLst>
-              <a:ext uri="{FF2B5EF4-FFF2-40B4-BE49-F238E27FC236}">
-                <a16:creationId xmlns:a16="http://schemas.microsoft.com/office/drawing/2014/main" id="{33456036-C54A-DFFF-710A-420D6A69FCBB}"/>
-              </a:ext>
-            </a:extLst>
-          </p:cNvPr>
-          <p:cNvSpPr txBox="1"/>
-          <p:nvPr/>
-        </p:nvSpPr>
-        <p:spPr>
-          <a:xfrm>
-            <a:off x="1330452" y="4597501"/>
-            <a:ext cx="1176833" cy="247802"/>
-          </a:xfrm>
-          <a:prstGeom prst="rect">
-            <a:avLst/>
-          </a:prstGeom>
-          <a:noFill/>
-          <a:ln/>
-        </p:spPr>
-        <p:txBody>
-          <a:bodyPr wrap="square" lIns="0" tIns="0" rIns="0" bIns="0" rtlCol="0" anchor="ctr"/>
-          <a:lstStyle/>
-          <a:p>
-            <a:pPr marL="0" indent="0" algn="l">
-              <a:buNone/>
-            </a:pPr>
-            <a:r>
-              <a:rPr lang="en-US" sz="1300" dirty="0">
-                <a:solidFill>
-                  <a:srgbClr val="FFFFFF"/>
-                </a:solidFill>
-                <a:latin typeface="Noto Sans KR" pitchFamily="34" charset="0"/>
-                <a:ea typeface="Noto Sans KR" pitchFamily="34" charset="-122"/>
-                <a:cs typeface="Noto Sans KR" pitchFamily="34" charset="-120"/>
-              </a:rPr>
-              <a:t>핵심 구조 이해</a:t>
-            </a:r>
-            <a:endParaRPr lang="en-US" sz="1300" dirty="0"/>
-          </a:p>
-        </p:txBody>
-      </p:sp>
-      <p:sp>
-        <p:nvSpPr>
-          <p:cNvPr id="18" name="Text 12">
-            <a:extLst>
-              <a:ext uri="{FF2B5EF4-FFF2-40B4-BE49-F238E27FC236}">
-                <a16:creationId xmlns:a16="http://schemas.microsoft.com/office/drawing/2014/main" id="{34695AB7-D741-72A3-3EC2-0F1CEEE1C79E}"/>
-              </a:ext>
-            </a:extLst>
-          </p:cNvPr>
-          <p:cNvSpPr txBox="1"/>
-          <p:nvPr/>
-        </p:nvSpPr>
-        <p:spPr>
-          <a:xfrm>
-            <a:off x="3459175" y="4597501"/>
-            <a:ext cx="1129284" cy="247802"/>
-          </a:xfrm>
-          <a:prstGeom prst="rect">
-            <a:avLst/>
-          </a:prstGeom>
-          <a:noFill/>
-          <a:ln/>
-        </p:spPr>
-        <p:txBody>
-          <a:bodyPr wrap="square" lIns="0" tIns="0" rIns="0" bIns="0" rtlCol="0" anchor="ctr"/>
-          <a:lstStyle/>
-          <a:p>
-            <a:pPr marL="0" indent="0" algn="l">
-              <a:buNone/>
-            </a:pPr>
-            <a:r>
-              <a:rPr lang="en-US" sz="1300" dirty="0">
-                <a:solidFill>
-                  <a:srgbClr val="FFFFFF"/>
-                </a:solidFill>
-                <a:latin typeface="Noto Sans KR" pitchFamily="34" charset="0"/>
-                <a:ea typeface="Noto Sans KR" pitchFamily="34" charset="-122"/>
-                <a:cs typeface="Noto Sans KR" pitchFamily="34" charset="-120"/>
-              </a:rPr>
-              <a:t>대시보드 제작</a:t>
-            </a:r>
-            <a:endParaRPr lang="en-US" sz="1300" dirty="0"/>
-          </a:p>
-        </p:txBody>
-      </p:sp>
-      <p:sp>
-        <p:nvSpPr>
-          <p:cNvPr id="19" name="Text 13">
-            <a:extLst>
-              <a:ext uri="{FF2B5EF4-FFF2-40B4-BE49-F238E27FC236}">
-                <a16:creationId xmlns:a16="http://schemas.microsoft.com/office/drawing/2014/main" id="{81FDAB02-B334-C86E-EDAF-767B16E44EE7}"/>
-              </a:ext>
-            </a:extLst>
-          </p:cNvPr>
-          <p:cNvSpPr txBox="1"/>
-          <p:nvPr/>
-        </p:nvSpPr>
-        <p:spPr>
-          <a:xfrm>
-            <a:off x="5517491" y="4597501"/>
-            <a:ext cx="1338682" cy="247802"/>
-          </a:xfrm>
-          <a:prstGeom prst="rect">
-            <a:avLst/>
-          </a:prstGeom>
-          <a:noFill/>
-          <a:ln/>
-        </p:spPr>
-        <p:txBody>
-          <a:bodyPr wrap="square" lIns="0" tIns="0" rIns="0" bIns="0" rtlCol="0" anchor="ctr"/>
-          <a:lstStyle/>
-          <a:p>
-            <a:pPr marL="0" indent="0" algn="l">
-              <a:buNone/>
-            </a:pPr>
-            <a:r>
-              <a:rPr lang="en-US" sz="1300" dirty="0">
-                <a:solidFill>
-                  <a:srgbClr val="FFFFFF"/>
-                </a:solidFill>
-                <a:latin typeface="Noto Sans KR" pitchFamily="34" charset="0"/>
-                <a:ea typeface="Noto Sans KR" pitchFamily="34" charset="-122"/>
-                <a:cs typeface="Noto Sans KR" pitchFamily="34" charset="-120"/>
-              </a:rPr>
-              <a:t>협업 &amp; 운영 루틴</a:t>
-            </a:r>
-            <a:endParaRPr lang="en-US" sz="1300" dirty="0"/>
-          </a:p>
-        </p:txBody>
-      </p:sp>
-      <p:sp>
-        <p:nvSpPr>
-          <p:cNvPr id="20" name="Shape 14">
-            <a:extLst>
-              <a:ext uri="{FF2B5EF4-FFF2-40B4-BE49-F238E27FC236}">
-                <a16:creationId xmlns:a16="http://schemas.microsoft.com/office/drawing/2014/main" id="{82655C93-C1EF-CFA5-57E5-69FFCB961F8A}"/>
-              </a:ext>
-            </a:extLst>
-          </p:cNvPr>
-          <p:cNvSpPr/>
-          <p:nvPr/>
-        </p:nvSpPr>
-        <p:spPr>
-          <a:xfrm>
-            <a:off x="761695" y="5362956"/>
-            <a:ext cx="10668305" cy="9144"/>
-          </a:xfrm>
-          <a:prstGeom prst="rect">
-            <a:avLst/>
-          </a:prstGeom>
-          <a:solidFill>
-            <a:srgbClr val="374151"/>
-          </a:solidFill>
-          <a:ln/>
-        </p:spPr>
-        <p:txBody>
-          <a:bodyPr/>
-          <a:lstStyle/>
-          <a:p>
-            <a:endParaRPr lang="ko-KR" altLang="en-US"/>
-          </a:p>
-        </p:txBody>
-      </p:sp>
-      <p:grpSp>
-        <p:nvGrpSpPr>
-          <p:cNvPr id="27" name="그룹 26">
-            <a:extLst>
-              <a:ext uri="{FF2B5EF4-FFF2-40B4-BE49-F238E27FC236}">
-                <a16:creationId xmlns:a16="http://schemas.microsoft.com/office/drawing/2014/main" id="{EF479EA8-28BF-3F69-FCC2-D9CF1A7C3837}"/>
-              </a:ext>
-            </a:extLst>
-          </p:cNvPr>
-          <p:cNvGrpSpPr/>
-          <p:nvPr/>
-        </p:nvGrpSpPr>
-        <p:grpSpPr>
-          <a:xfrm>
-            <a:off x="787298" y="5603444"/>
-            <a:ext cx="1472184" cy="247802"/>
-            <a:chOff x="2311603" y="5838444"/>
-            <a:chExt cx="1472184" cy="247802"/>
-          </a:xfrm>
-        </p:grpSpPr>
-        <p:pic>
-          <p:nvPicPr>
-            <p:cNvPr id="22" name="Image 5" descr="preencoded.png">
-              <a:extLst>
-                <a:ext uri="{FF2B5EF4-FFF2-40B4-BE49-F238E27FC236}">
-                  <a16:creationId xmlns:a16="http://schemas.microsoft.com/office/drawing/2014/main" id="{DBBF7CF9-4D8F-FBA8-DD48-545AB2064AD8}"/>
-                </a:ext>
-              </a:extLst>
-            </p:cNvPr>
-            <p:cNvPicPr>
-              <a:picLocks noChangeAspect="1"/>
-            </p:cNvPicPr>
-            <p:nvPr/>
-          </p:nvPicPr>
-          <p:blipFill>
-            <a:blip r:embed="rId7"/>
-            <a:srcRect l="-1064" r="-1064"/>
-            <a:stretch/>
-          </p:blipFill>
-          <p:spPr>
-            <a:xfrm>
-              <a:off x="2311603" y="5876849"/>
-              <a:ext cx="219456" cy="171907"/>
-            </a:xfrm>
-            <a:prstGeom prst="rect">
-              <a:avLst/>
-            </a:prstGeom>
-          </p:spPr>
-        </p:pic>
-        <p:sp>
-          <p:nvSpPr>
-            <p:cNvPr id="24" name="Text 16">
-              <a:extLst>
-                <a:ext uri="{FF2B5EF4-FFF2-40B4-BE49-F238E27FC236}">
-                  <a16:creationId xmlns:a16="http://schemas.microsoft.com/office/drawing/2014/main" id="{C4291773-D3A1-A60E-6A27-09456EB75B93}"/>
-                </a:ext>
-              </a:extLst>
-            </p:cNvPr>
-            <p:cNvSpPr txBox="1"/>
-            <p:nvPr/>
-          </p:nvSpPr>
-          <p:spPr>
-            <a:xfrm>
-              <a:off x="2606954" y="5838444"/>
-              <a:ext cx="1176833" cy="247802"/>
-            </a:xfrm>
-            <a:prstGeom prst="rect">
-              <a:avLst/>
-            </a:prstGeom>
-            <a:noFill/>
-            <a:ln/>
-          </p:spPr>
-          <p:txBody>
-            <a:bodyPr wrap="square" lIns="0" tIns="0" rIns="0" bIns="0" rtlCol="0" anchor="ctr"/>
-            <a:lstStyle/>
-            <a:p>
-              <a:pPr marL="0" indent="0" algn="l">
-                <a:buNone/>
-              </a:pPr>
-              <a:r>
-                <a:rPr lang="en-US" sz="1300" dirty="0">
-                  <a:solidFill>
-                    <a:srgbClr val="9CA3AF"/>
-                  </a:solidFill>
-                  <a:latin typeface="Noto Sans KR" pitchFamily="34" charset="0"/>
-                  <a:ea typeface="Noto Sans KR" pitchFamily="34" charset="-122"/>
-                  <a:cs typeface="Noto Sans KR" pitchFamily="34" charset="-120"/>
-                </a:rPr>
-                <a:t>실습 중심 강의</a:t>
-              </a:r>
-              <a:endParaRPr lang="en-US" sz="1300" dirty="0"/>
-            </a:p>
-          </p:txBody>
-        </p:sp>
-      </p:grpSp>
-      <p:sp>
-        <p:nvSpPr>
-          <p:cNvPr id="25" name="Text 17">
-            <a:extLst>
-              <a:ext uri="{FF2B5EF4-FFF2-40B4-BE49-F238E27FC236}">
-                <a16:creationId xmlns:a16="http://schemas.microsoft.com/office/drawing/2014/main" id="{9846BFB0-A4FC-6763-D7E5-29C46BAC67EB}"/>
-              </a:ext>
-            </a:extLst>
-          </p:cNvPr>
-          <p:cNvSpPr txBox="1"/>
-          <p:nvPr/>
-        </p:nvSpPr>
-        <p:spPr>
-          <a:xfrm>
-            <a:off x="9552737" y="410920"/>
-            <a:ext cx="1877263" cy="277063"/>
-          </a:xfrm>
-          <a:prstGeom prst="rect">
-            <a:avLst/>
-          </a:prstGeom>
-          <a:noFill/>
-          <a:ln/>
-        </p:spPr>
-        <p:txBody>
-          <a:bodyPr wrap="square" lIns="0" tIns="0" rIns="0" bIns="0" rtlCol="0" anchor="ctr"/>
-          <a:lstStyle/>
-          <a:p>
-            <a:pPr marL="0" indent="0" algn="r">
-              <a:buNone/>
-            </a:pPr>
-            <a:r>
-              <a:rPr lang="en-US" sz="1500" b="1" dirty="0">
-                <a:solidFill>
-                  <a:srgbClr val="60A5FA"/>
-                </a:solidFill>
-                <a:latin typeface="Noto Sans KR" pitchFamily="34" charset="0"/>
-                <a:ea typeface="Noto Sans KR" pitchFamily="34" charset="-122"/>
-                <a:cs typeface="Noto Sans KR" pitchFamily="34" charset="-120"/>
-              </a:rPr>
-              <a:t>Part 1 &amp; 2 통합 과정</a:t>
-            </a:r>
-            <a:endParaRPr lang="en-US" sz="1500" dirty="0"/>
-          </a:p>
-        </p:txBody>
-      </p:sp>
-      <p:sp>
-        <p:nvSpPr>
-          <p:cNvPr id="26" name="Text 18">
-            <a:extLst>
-              <a:ext uri="{FF2B5EF4-FFF2-40B4-BE49-F238E27FC236}">
-                <a16:creationId xmlns:a16="http://schemas.microsoft.com/office/drawing/2014/main" id="{92D46621-43D0-A9D9-EDE5-CB6965610994}"/>
-              </a:ext>
-            </a:extLst>
-          </p:cNvPr>
-          <p:cNvSpPr txBox="1"/>
-          <p:nvPr/>
-        </p:nvSpPr>
-        <p:spPr>
-          <a:xfrm>
-            <a:off x="10340035" y="724559"/>
-            <a:ext cx="1043330" cy="191110"/>
-          </a:xfrm>
-          <a:prstGeom prst="rect">
-            <a:avLst/>
-          </a:prstGeom>
-          <a:noFill/>
-          <a:ln/>
-        </p:spPr>
-        <p:txBody>
-          <a:bodyPr wrap="square" lIns="0" tIns="0" rIns="0" bIns="0" rtlCol="0" anchor="ctr"/>
-          <a:lstStyle/>
-          <a:p>
-            <a:pPr marL="0" indent="0" algn="r">
-              <a:buNone/>
-            </a:pPr>
-            <a:r>
-              <a:rPr lang="en-US" sz="1000" dirty="0">
-                <a:solidFill>
-                  <a:srgbClr val="6B7280"/>
-                </a:solidFill>
-                <a:latin typeface="Noto Sans KR" pitchFamily="34" charset="0"/>
-                <a:ea typeface="Noto Sans KR" pitchFamily="34" charset="-122"/>
-                <a:cs typeface="Noto Sans KR" pitchFamily="34" charset="-120"/>
-              </a:rPr>
-              <a:t>Ver. 2026.01</a:t>
-            </a:r>
-            <a:endParaRPr lang="en-US" sz="1000" dirty="0"/>
-          </a:p>
-        </p:txBody>
-      </p:sp>
-      <p:sp>
-        <p:nvSpPr>
-          <p:cNvPr id="30" name="Shape 5">
-            <a:extLst>
-              <a:ext uri="{FF2B5EF4-FFF2-40B4-BE49-F238E27FC236}">
-                <a16:creationId xmlns:a16="http://schemas.microsoft.com/office/drawing/2014/main" id="{EA541722-13FC-C0AF-B759-A68DE2ECCFB1}"/>
-              </a:ext>
-            </a:extLst>
-          </p:cNvPr>
-          <p:cNvSpPr/>
-          <p:nvPr/>
-        </p:nvSpPr>
-        <p:spPr>
-          <a:xfrm>
-            <a:off x="7433463" y="5869938"/>
-            <a:ext cx="381305" cy="381305"/>
-          </a:xfrm>
-          <a:prstGeom prst="ellipse">
-            <a:avLst/>
-          </a:prstGeom>
-          <a:solidFill>
-            <a:srgbClr val="38BDF8">
-              <a:alpha val="10000"/>
-            </a:srgbClr>
-          </a:solidFill>
-          <a:ln/>
-        </p:spPr>
-        <p:txBody>
-          <a:bodyPr/>
-          <a:lstStyle/>
-          <a:p>
-            <a:endParaRPr lang="ko-KR" altLang="en-US"/>
-          </a:p>
-        </p:txBody>
-      </p:sp>
-      <p:pic>
-        <p:nvPicPr>
-          <p:cNvPr id="31" name="Image 2" descr="preencoded.png">
-            <a:extLst>
-              <a:ext uri="{FF2B5EF4-FFF2-40B4-BE49-F238E27FC236}">
-                <a16:creationId xmlns:a16="http://schemas.microsoft.com/office/drawing/2014/main" id="{520D8367-DFF3-FCCE-F69A-852277B4BBB5}"/>
-              </a:ext>
-            </a:extLst>
-          </p:cNvPr>
-          <p:cNvPicPr>
-            <a:picLocks noChangeAspect="1"/>
-          </p:cNvPicPr>
-          <p:nvPr/>
-        </p:nvPicPr>
-        <p:blipFill>
-          <a:blip r:embed="rId8"/>
-          <a:srcRect l="-1064" r="-1064"/>
-          <a:stretch/>
-        </p:blipFill>
-        <p:spPr>
-          <a:xfrm>
-            <a:off x="7513931" y="5975094"/>
-            <a:ext cx="219456" cy="171907"/>
-          </a:xfrm>
-          <a:prstGeom prst="rect">
-            <a:avLst/>
-          </a:prstGeom>
-        </p:spPr>
-      </p:pic>
-      <p:sp>
-        <p:nvSpPr>
-          <p:cNvPr id="35" name="Text 11">
-            <a:extLst>
-              <a:ext uri="{FF2B5EF4-FFF2-40B4-BE49-F238E27FC236}">
-                <a16:creationId xmlns:a16="http://schemas.microsoft.com/office/drawing/2014/main" id="{2F1833EB-374E-77C9-F268-163A3A33A345}"/>
-              </a:ext>
-            </a:extLst>
-          </p:cNvPr>
-          <p:cNvSpPr txBox="1"/>
-          <p:nvPr/>
-        </p:nvSpPr>
-        <p:spPr>
-          <a:xfrm>
-            <a:off x="7967016" y="5879082"/>
-            <a:ext cx="3638397" cy="366675"/>
-          </a:xfrm>
-          <a:prstGeom prst="rect">
-            <a:avLst/>
-          </a:prstGeom>
-          <a:noFill/>
-          <a:ln/>
-        </p:spPr>
-        <p:txBody>
-          <a:bodyPr wrap="square" lIns="0" tIns="0" rIns="0" bIns="0" rtlCol="0" anchor="ctr"/>
-          <a:lstStyle/>
-          <a:p>
-            <a:pPr>
-              <a:lnSpc>
-                <a:spcPct val="150000"/>
-              </a:lnSpc>
-            </a:pPr>
-            <a:r>
-              <a:rPr lang="ko-KR" altLang="en-US" sz="2000" b="1" dirty="0">
-                <a:solidFill>
-                  <a:srgbClr val="FFFFFF"/>
-                </a:solidFill>
-                <a:latin typeface="Noto Sans KR" pitchFamily="34" charset="0"/>
-                <a:ea typeface="Noto Sans KR" pitchFamily="34" charset="-122"/>
-              </a:rPr>
-              <a:t>이 애 본</a:t>
-            </a:r>
-            <a:br>
-              <a:rPr lang="en-US" altLang="ko-KR" sz="1500" b="1" dirty="0">
-                <a:solidFill>
-                  <a:srgbClr val="FFFFFF"/>
-                </a:solidFill>
-                <a:latin typeface="Noto Sans KR" pitchFamily="34" charset="0"/>
-                <a:ea typeface="Noto Sans KR" pitchFamily="34" charset="-122"/>
-              </a:rPr>
-            </a:br>
-            <a:r>
-              <a:rPr lang="ko-KR" altLang="en-US" sz="1500" b="1" dirty="0">
-                <a:solidFill>
-                  <a:srgbClr val="FFFFFF"/>
-                </a:solidFill>
-                <a:latin typeface="Noto Sans KR" pitchFamily="34" charset="0"/>
-                <a:ea typeface="Noto Sans KR" pitchFamily="34" charset="-122"/>
-              </a:rPr>
-              <a:t>한신대학교 </a:t>
-            </a:r>
-            <a:r>
-              <a:rPr lang="en-US" altLang="ko-KR" sz="1500" b="1" dirty="0">
-                <a:solidFill>
-                  <a:srgbClr val="FFFFFF"/>
-                </a:solidFill>
-                <a:latin typeface="Noto Sans KR" pitchFamily="34" charset="0"/>
-                <a:ea typeface="Noto Sans KR" pitchFamily="34" charset="-122"/>
-              </a:rPr>
-              <a:t>AI.SW</a:t>
-            </a:r>
-            <a:r>
-              <a:rPr lang="ko-KR" altLang="en-US" sz="1500" b="1" dirty="0">
-                <a:solidFill>
-                  <a:srgbClr val="FFFFFF"/>
-                </a:solidFill>
-                <a:latin typeface="Noto Sans KR" pitchFamily="34" charset="0"/>
-                <a:ea typeface="Noto Sans KR" pitchFamily="34" charset="-122"/>
-              </a:rPr>
-              <a:t>대학 </a:t>
-            </a:r>
-            <a:r>
-              <a:rPr lang="en-US" altLang="ko-KR" sz="1500" b="1" dirty="0">
-                <a:solidFill>
-                  <a:srgbClr val="FFFFFF"/>
-                </a:solidFill>
-                <a:latin typeface="Noto Sans KR" pitchFamily="34" charset="0"/>
-                <a:ea typeface="Noto Sans KR" pitchFamily="34" charset="-122"/>
-                <a:hlinkClick r:id="rId9"/>
-              </a:rPr>
-              <a:t>aebon@hs.ac.kr</a:t>
-            </a:r>
-            <a:r>
-              <a:rPr lang="ko-KR" altLang="en-US" sz="1500" b="1" dirty="0">
-                <a:solidFill>
-                  <a:srgbClr val="FFFFFF"/>
-                </a:solidFill>
-                <a:latin typeface="Noto Sans KR" pitchFamily="34" charset="0"/>
-                <a:ea typeface="Noto Sans KR" pitchFamily="34" charset="-122"/>
-              </a:rPr>
-              <a:t> </a:t>
-            </a:r>
-            <a:endParaRPr lang="en-US" altLang="ko-KR" sz="1500" b="1" dirty="0">
-              <a:solidFill>
-                <a:srgbClr val="FFFFFF"/>
-              </a:solidFill>
-              <a:latin typeface="Noto Sans KR" pitchFamily="34" charset="0"/>
-              <a:ea typeface="Noto Sans KR" pitchFamily="34" charset="-122"/>
-            </a:endParaRPr>
-          </a:p>
-        </p:txBody>
-      </p:sp>
-      <p:sp>
-        <p:nvSpPr>
-          <p:cNvPr id="36" name="deckgen:wrap:footer"/>
-          <p:cNvSpPr txBox="1"/>
-          <p:nvPr/>
-        </p:nvSpPr>
-        <p:spPr>
-          <a:xfrm>
-            <a:off x="365760" y="6549390"/>
-            <a:ext cx="11460480" cy="240030"/>
-          </a:xfrm>
-          <a:prstGeom prst="rect">
-            <a:avLst/>
-          </a:prstGeom>
-          <a:noFill/>
-        </p:spPr>
-        <p:txBody>
-          <a:bodyPr wrap="square" anchor="b" lIns="0" rIns="0" tIns="0" bIns="0">
-            <a:spAutoFit/>
-          </a:bodyPr>
-          <a:lstStyle/>
-          <a:p>
-            <a:pPr algn="r">
-              <a:lnSpc>
-                <a:spcPct val="125000"/>
-              </a:lnSpc>
-            </a:pPr>
-            <a:r>
-              <a:rPr sz="900" b="0">
-                <a:solidFill>
-                  <a:srgbClr val="8A8F99"/>
-                </a:solidFill>
-                <a:latin typeface="Pretendard"/>
-              </a:rPr>
-              <a:t>© 2026 이애본(드림아이티비즈) · useful-ai.dreamitbiz.com · 교육 목적 비영리 이용 · 출처 표기</a:t>
-            </a:r>
-          </a:p>
-        </p:txBody>
-      </p:sp>
-    </p:spTree>
-    <p:extLst>
-      <p:ext uri="{BB962C8B-B14F-4D97-AF65-F5344CB8AC3E}">
-        <p14:creationId xmlns:p14="http://schemas.microsoft.com/office/powerpoint/2010/main" val="1570506477"/>
-      </p:ext>
-    </p:extLst>
-  </p:cSld>
-  <p:clrMapOvr>
-    <a:masterClrMapping/>
-  </p:clrMapOvr>
-</p:sld>
-</file>
-
-<file path=ppt/slides/slide11.xml><?xml version="1.0" encoding="utf-8"?>
 <p:sld xmlns:a="http://schemas.openxmlformats.org/drawingml/2006/main" xmlns:r="http://schemas.openxmlformats.org/officeDocument/2006/relationships" xmlns:p="http://schemas.openxmlformats.org/presentationml/2006/main">
   <p:cSld name="Slide 10">
     <p:spTree>
@@ -5495,7 +4043,7 @@
                 </a:solidFill>
                 <a:latin typeface="Pretendard"/>
               </a:rPr>
-              <a:t>© 2026 이애본(드림아이티비즈) · useful-ai.dreamitbiz.com · 교육 목적 비영리 이용 · 출처 표기</a:t>
+              <a:t>© 2026 이애본 · 홍문원(洪文院) 발행 · CC BY-NC-ND 4.0 · useful-ai.dreamitbiz.com</a:t>
             </a:r>
           </a:p>
         </p:txBody>
@@ -5508,7 +4056,7 @@
 </p:sld>
 </file>
 
-<file path=ppt/slides/slide12.xml><?xml version="1.0" encoding="utf-8"?>
+<file path=ppt/slides/slide11.xml><?xml version="1.0" encoding="utf-8"?>
 <p:sld xmlns:a="http://schemas.openxmlformats.org/drawingml/2006/main" xmlns:r="http://schemas.openxmlformats.org/officeDocument/2006/relationships" xmlns:p="http://schemas.openxmlformats.org/presentationml/2006/main">
   <p:cSld name="Slide 11">
     <p:spTree>
@@ -7269,7 +5817,43 @@
       </p:sp>
       <p:sp>
         <p:nvSpPr>
-          <p:cNvPr id="52" name="deckgen:wrap:footer"/>
+          <p:cNvPr id="52" name="Stage3 Note"/>
+          <p:cNvSpPr txBox="1"/>
+          <p:nvPr/>
+        </p:nvSpPr>
+        <p:spPr>
+          <a:xfrm>
+            <a:off x="761695" y="6450000"/>
+            <a:ext cx="10600000" cy="230000"/>
+          </a:xfrm>
+          <a:prstGeom prst="rect">
+            <a:avLst/>
+          </a:prstGeom>
+          <a:noFill/>
+        </p:spPr>
+        <p:txBody>
+          <a:bodyPr wrap="square" lIns="0" rIns="0" tIns="0" bIns="0" anchor="t">
+            <a:spAutoFit/>
+          </a:bodyPr>
+          <a:lstStyle/>
+          <a:p>
+            <a:r>
+              <a:rPr sz="900">
+                <a:solidFill>
+                  <a:srgbClr val="8B95A7"/>
+                </a:solidFill>
+                <a:latin typeface="Noto Sans KR"/>
+                <a:ea typeface="Noto Sans KR"/>
+                <a:cs typeface="Noto Sans KR"/>
+              </a:rPr>
+              <a:t>속성 종류: 노션 도움말 「Database properties」(2026-10 기준) https://www.notion.com/help/database-properties</a:t>
+            </a:r>
+          </a:p>
+        </p:txBody>
+      </p:sp>
+      <p:sp>
+        <p:nvSpPr>
+          <p:cNvPr id="53" name="deckgen:wrap:footer"/>
           <p:cNvSpPr txBox="1"/>
           <p:nvPr/>
         </p:nvSpPr>
@@ -7301,7 +5885,7 @@
                 </a:solidFill>
                 <a:latin typeface="Pretendard"/>
               </a:rPr>
-              <a:t>© 2026 이애본(드림아이티비즈) · useful-ai.dreamitbiz.com · 교육 목적 비영리 이용 · 출처 표기</a:t>
+              <a:t>© 2026 이애본 · 홍문원(洪文院) 발행 · CC BY-NC-ND 4.0 · useful-ai.dreamitbiz.com</a:t>
             </a:r>
           </a:p>
         </p:txBody>
@@ -7314,7 +5898,7 @@
 </p:sld>
 </file>
 
-<file path=ppt/slides/slide13.xml><?xml version="1.0" encoding="utf-8"?>
+<file path=ppt/slides/slide12.xml><?xml version="1.0" encoding="utf-8"?>
 <p:sld xmlns:a="http://schemas.openxmlformats.org/drawingml/2006/main" xmlns:r="http://schemas.openxmlformats.org/officeDocument/2006/relationships" xmlns:p="http://schemas.openxmlformats.org/presentationml/2006/main">
   <p:cSld name="Slide 12">
     <p:spTree>
@@ -8748,7 +7332,7 @@
                 </a:solidFill>
                 <a:latin typeface="Pretendard"/>
               </a:rPr>
-              <a:t>© 2026 이애본(드림아이티비즈) · useful-ai.dreamitbiz.com · 교육 목적 비영리 이용 · 출처 표기</a:t>
+              <a:t>© 2026 이애본 · 홍문원(洪文院) 발행 · CC BY-NC-ND 4.0 · useful-ai.dreamitbiz.com</a:t>
             </a:r>
           </a:p>
         </p:txBody>
@@ -8761,7 +7345,7 @@
 </p:sld>
 </file>
 
-<file path=ppt/slides/slide14.xml><?xml version="1.0" encoding="utf-8"?>
+<file path=ppt/slides/slide13.xml><?xml version="1.0" encoding="utf-8"?>
 <p:sld xmlns:a="http://schemas.openxmlformats.org/drawingml/2006/main" xmlns:r="http://schemas.openxmlformats.org/officeDocument/2006/relationships" xmlns:p="http://schemas.openxmlformats.org/presentationml/2006/main">
   <p:cSld name="Slide 13">
     <p:spTree>
@@ -9417,7 +8001,7 @@
                 <a:ea typeface="Noto Sans KR" pitchFamily="34" charset="-122"/>
                 <a:cs typeface="Noto Sans KR" pitchFamily="34" charset="-120"/>
               </a:rPr>
-              <a:t>"뇌는 기억하는 곳이 아니라 생각하는 곳입니다." </a:t>
+              <a:t>"머리는 아이디어를 떠올리는 곳이지, 붙잡아 두는 곳이 아닙니다." (David Allen)</a:t>
             </a:r>
           </a:p>
           <a:p>
@@ -9433,18 +8017,7 @@
                 <a:ea typeface="Noto Sans KR" pitchFamily="34" charset="-122"/>
                 <a:cs typeface="Noto Sans KR" pitchFamily="34" charset="-120"/>
               </a:rPr>
-              <a:t>기억해야</a:t>
-            </a:r>
-            <a:r>
-              <a:rPr lang="en-US" sz="1200" dirty="0">
-                <a:solidFill>
-                  <a:srgbClr val="D1D5DB"/>
-                </a:solidFill>
-                <a:latin typeface="Noto Sans KR" pitchFamily="34" charset="0"/>
-                <a:ea typeface="Noto Sans KR" pitchFamily="34" charset="-122"/>
-                <a:cs typeface="Noto Sans KR" pitchFamily="34" charset="-120"/>
-              </a:rPr>
-              <a:t> 할 모든 것은 노션의 리마인더에 맡기세요.</a:t>
+              <a:t>기억해야 할 모든 것은 노션의 리마인더에 맡기세요.</a:t>
             </a:r>
             <a:endParaRPr lang="en-US" sz="1200" dirty="0"/>
           </a:p>
@@ -10080,7 +8653,43 @@
       </p:sp>
       <p:sp>
         <p:nvSpPr>
-          <p:cNvPr id="31" name="deckgen:wrap:footer"/>
+          <p:cNvPr id="31" name="Stage3 Note"/>
+          <p:cNvSpPr txBox="1"/>
+          <p:nvPr/>
+        </p:nvSpPr>
+        <p:spPr>
+          <a:xfrm>
+            <a:off x="761695" y="6450000"/>
+            <a:ext cx="10600000" cy="230000"/>
+          </a:xfrm>
+          <a:prstGeom prst="rect">
+            <a:avLst/>
+          </a:prstGeom>
+          <a:noFill/>
+        </p:spPr>
+        <p:txBody>
+          <a:bodyPr wrap="square" lIns="0" rIns="0" tIns="0" bIns="0" anchor="t">
+            <a:spAutoFit/>
+          </a:bodyPr>
+          <a:lstStyle/>
+          <a:p>
+            <a:r>
+              <a:rPr sz="900">
+                <a:solidFill>
+                  <a:srgbClr val="8B95A7"/>
+                </a:solidFill>
+                <a:latin typeface="Noto Sans KR"/>
+                <a:ea typeface="Noto Sans KR"/>
+                <a:cs typeface="Noto Sans KR"/>
+              </a:rPr>
+              <a:t>David Allen Company. (2015). Free your mind with GTD. https://gettingthingsdone.com/2015/05/free-your-mind-with-gtd/</a:t>
+            </a:r>
+          </a:p>
+        </p:txBody>
+      </p:sp>
+      <p:sp>
+        <p:nvSpPr>
+          <p:cNvPr id="32" name="deckgen:wrap:footer"/>
           <p:cNvSpPr txBox="1"/>
           <p:nvPr/>
         </p:nvSpPr>
@@ -10112,7 +8721,7 @@
                 </a:solidFill>
                 <a:latin typeface="Pretendard"/>
               </a:rPr>
-              <a:t>© 2026 이애본(드림아이티비즈) · useful-ai.dreamitbiz.com · 교육 목적 비영리 이용 · 출처 표기</a:t>
+              <a:t>© 2026 이애본 · 홍문원(洪文院) 발행 · CC BY-NC-ND 4.0 · useful-ai.dreamitbiz.com</a:t>
             </a:r>
           </a:p>
         </p:txBody>
@@ -10125,7 +8734,7 @@
 </p:sld>
 </file>
 
-<file path=ppt/slides/slide15.xml><?xml version="1.0" encoding="utf-8"?>
+<file path=ppt/slides/slide14.xml><?xml version="1.0" encoding="utf-8"?>
 <p:sld xmlns:a="http://schemas.openxmlformats.org/drawingml/2006/main" xmlns:r="http://schemas.openxmlformats.org/officeDocument/2006/relationships" xmlns:p="http://schemas.openxmlformats.org/presentationml/2006/main">
   <p:cSld name="Slide 14">
     <p:spTree>
@@ -11920,7 +10529,7 @@
                 </a:solidFill>
                 <a:latin typeface="Pretendard"/>
               </a:rPr>
-              <a:t>© 2026 이애본(드림아이티비즈) · useful-ai.dreamitbiz.com · 교육 목적 비영리 이용 · 출처 표기</a:t>
+              <a:t>© 2026 이애본 · 홍문원(洪文院) 발행 · CC BY-NC-ND 4.0 · useful-ai.dreamitbiz.com</a:t>
             </a:r>
           </a:p>
         </p:txBody>
@@ -11933,7 +10542,7 @@
 </p:sld>
 </file>
 
-<file path=ppt/slides/slide16.xml><?xml version="1.0" encoding="utf-8"?>
+<file path=ppt/slides/slide15.xml><?xml version="1.0" encoding="utf-8"?>
 <p:sld xmlns:a="http://schemas.openxmlformats.org/drawingml/2006/main" xmlns:r="http://schemas.openxmlformats.org/officeDocument/2006/relationships" xmlns:p="http://schemas.openxmlformats.org/presentationml/2006/main">
   <p:cSld name="Slide 15">
     <p:spTree>
@@ -13282,97 +11891,6 @@
       </p:sp>
       <p:sp>
         <p:nvSpPr>
-          <p:cNvPr id="42" name="Shape 30"/>
-          <p:cNvSpPr/>
-          <p:nvPr/>
-        </p:nvSpPr>
-        <p:spPr>
-          <a:xfrm>
-            <a:off x="10376611" y="2204618"/>
-            <a:ext cx="761695" cy="295351"/>
-          </a:xfrm>
-          <a:prstGeom prst="roundRect">
-            <a:avLst>
-              <a:gd name="adj" fmla="val 199740"/>
-            </a:avLst>
-          </a:prstGeom>
-          <a:solidFill>
-            <a:srgbClr val="EF4444"/>
-          </a:solidFill>
-          <a:ln/>
-        </p:spPr>
-        <p:txBody>
-          <a:bodyPr/>
-          <a:lstStyle/>
-          <a:p>
-            <a:endParaRPr lang="ko-KR" altLang="en-US"/>
-          </a:p>
-        </p:txBody>
-      </p:sp>
-      <p:pic>
-        <p:nvPicPr>
-          <p:cNvPr id="43" name="Image 10" descr="preencoded.png"/>
-          <p:cNvPicPr>
-            <a:picLocks noChangeAspect="1"/>
-          </p:cNvPicPr>
-          <p:nvPr/>
-        </p:nvPicPr>
-        <p:blipFill>
-          <a:blip r:embed="rId12"/>
-          <a:srcRect t="-1100" b="-1100"/>
-          <a:stretch/>
-        </p:blipFill>
-        <p:spPr>
-          <a:xfrm>
-            <a:off x="10490911" y="2286000"/>
-            <a:ext cx="114300" cy="133502"/>
-          </a:xfrm>
-          <a:prstGeom prst="rect">
-            <a:avLst/>
-          </a:prstGeom>
-        </p:spPr>
-      </p:pic>
-      <p:sp>
-        <p:nvSpPr>
-          <p:cNvPr id="44" name="Text 31"/>
-          <p:cNvSpPr txBox="1"/>
-          <p:nvPr/>
-        </p:nvSpPr>
-        <p:spPr>
-          <a:xfrm>
-            <a:off x="10661904" y="2253082"/>
-            <a:ext cx="462686" cy="200254"/>
-          </a:xfrm>
-          <a:prstGeom prst="rect">
-            <a:avLst/>
-          </a:prstGeom>
-          <a:noFill/>
-          <a:ln/>
-        </p:spPr>
-        <p:txBody>
-          <a:bodyPr wrap="square" lIns="0" tIns="0" rIns="0" bIns="0" rtlCol="0" anchor="ctr"/>
-          <a:lstStyle/>
-          <a:p>
-            <a:pPr marL="0" indent="0" algn="l">
-              <a:buNone/>
-            </a:pPr>
-            <a:r>
-              <a:rPr lang="en-US" sz="1000" b="1" dirty="0">
-                <a:solidFill>
-                  <a:srgbClr val="FFFFFF"/>
-                </a:solidFill>
-                <a:latin typeface="Noto Sans KR" pitchFamily="34" charset="0"/>
-                <a:ea typeface="Noto Sans KR" pitchFamily="34" charset="-122"/>
-                <a:cs typeface="Noto Sans KR" pitchFamily="34" charset="-120"/>
-              </a:rPr>
-              <a:t>12:00</a:t>
-            </a:r>
-            <a:endParaRPr lang="en-US" sz="1000" dirty="0"/>
-          </a:p>
-        </p:txBody>
-      </p:sp>
-      <p:sp>
-        <p:nvSpPr>
           <p:cNvPr id="45" name="Text 32"/>
           <p:cNvSpPr txBox="1"/>
           <p:nvPr/>
@@ -13404,7 +11922,7 @@
                 <a:ea typeface="Noto Sans KR" pitchFamily="34" charset="-122"/>
                 <a:cs typeface="Noto Sans KR" pitchFamily="34" charset="-120"/>
               </a:rPr>
-              <a:t>1 새 데이터베이스 생성 빈 페이지에 /db 입력 후 '표: 인라인' 선택. </a:t>
+              <a:t>1 새 데이터베이스 생성 빈 페이지에 /database 입력. </a:t>
             </a:r>
           </a:p>
           <a:p>
@@ -13431,7 +11949,7 @@
                 <a:ea typeface="Noto Sans KR" pitchFamily="34" charset="-122"/>
                 <a:cs typeface="Noto Sans KR" pitchFamily="34" charset="-120"/>
               </a:rPr>
-              <a:t> '🎯 과제·프로젝트 트래커'로 설정.</a:t>
+              <a:t> '과제·프로젝트 트래커'로 설정.</a:t>
             </a:r>
             <a:endParaRPr lang="en-US" sz="1200" dirty="0"/>
           </a:p>
@@ -13602,7 +12120,7 @@
                 <a:ea typeface="Noto Sans KR" pitchFamily="34" charset="-122"/>
                 <a:cs typeface="Noto Sans KR" pitchFamily="34" charset="-120"/>
               </a:rPr>
-              <a:t>4 대시보드에 연동하기 메인 홈으로 이동하여 /링크된 입력. 트래커를 불러온 뒤 </a:t>
+              <a:t>4 대시보드에 연동하기 메인 홈으로 이동하여 /linked 입력. 트래커를 불러온 뒤 </a:t>
             </a:r>
             <a:r>
               <a:rPr lang="en-US" sz="1200" dirty="0" err="1">
@@ -13699,7 +12217,7 @@
                 <a:ea typeface="Noto Sans KR" pitchFamily="34" charset="-122"/>
                 <a:cs typeface="Noto Sans KR" pitchFamily="34" charset="-120"/>
               </a:rPr>
-              <a:t>✅ 완료 기준 (Check Point)</a:t>
+              <a:t>완료 기준 (Check Point)</a:t>
             </a:r>
             <a:endParaRPr lang="en-US" sz="1000" dirty="0"/>
           </a:p>
@@ -13785,7 +12303,43 @@
       </p:sp>
       <p:sp>
         <p:nvSpPr>
-          <p:cNvPr id="53" name="deckgen:wrap:footer"/>
+          <p:cNvPr id="53" name="Stage3 Note"/>
+          <p:cNvSpPr txBox="1"/>
+          <p:nvPr/>
+        </p:nvSpPr>
+        <p:spPr>
+          <a:xfrm>
+            <a:off x="761695" y="6250000"/>
+            <a:ext cx="5000000" cy="230000"/>
+          </a:xfrm>
+          <a:prstGeom prst="rect">
+            <a:avLst/>
+          </a:prstGeom>
+          <a:noFill/>
+        </p:spPr>
+        <p:txBody>
+          <a:bodyPr wrap="square" lIns="0" rIns="0" tIns="0" bIns="0" anchor="t">
+            <a:spAutoFit/>
+          </a:bodyPr>
+          <a:lstStyle/>
+          <a:p>
+            <a:r>
+              <a:rPr sz="900">
+                <a:solidFill>
+                  <a:srgbClr val="8B95A7"/>
+                </a:solidFill>
+                <a:latin typeface="Noto Sans KR"/>
+                <a:ea typeface="Noto Sans KR"/>
+                <a:cs typeface="Noto Sans KR"/>
+              </a:rPr>
+              <a:t>명령어: 노션 도움말 「Create a database」·「Using linked databases」(2026-10 기준)</a:t>
+            </a:r>
+          </a:p>
+        </p:txBody>
+      </p:sp>
+      <p:sp>
+        <p:nvSpPr>
+          <p:cNvPr id="54" name="deckgen:wrap:footer"/>
           <p:cNvSpPr txBox="1"/>
           <p:nvPr/>
         </p:nvSpPr>
@@ -13817,7 +12371,7 @@
                 </a:solidFill>
                 <a:latin typeface="Pretendard"/>
               </a:rPr>
-              <a:t>© 2026 이애본(드림아이티비즈) · useful-ai.dreamitbiz.com · 교육 목적 비영리 이용 · 출처 표기</a:t>
+              <a:t>© 2026 이애본 · 홍문원(洪文院) 발행 · CC BY-NC-ND 4.0 · useful-ai.dreamitbiz.com</a:t>
             </a:r>
           </a:p>
         </p:txBody>
@@ -13830,7 +12384,7 @@
 </p:sld>
 </file>
 
-<file path=ppt/slides/slide17.xml><?xml version="1.0" encoding="utf-8"?>
+<file path=ppt/slides/slide16.xml><?xml version="1.0" encoding="utf-8"?>
 <p:sld xmlns:a="http://schemas.openxmlformats.org/drawingml/2006/main" xmlns:r="http://schemas.openxmlformats.org/officeDocument/2006/relationships" xmlns:p="http://schemas.openxmlformats.org/presentationml/2006/main">
   <p:cSld name="Slide 16">
     <p:spTree>
@@ -14758,7 +13312,7 @@
                 <a:ea typeface="Noto Sans KR" pitchFamily="34" charset="-122"/>
                 <a:cs typeface="Noto Sans KR" pitchFamily="34" charset="-120"/>
               </a:rPr>
-              <a:t>🏠</a:t>
+              <a:t/>
             </a:r>
             <a:endParaRPr lang="en-US" sz="2400" dirty="0"/>
           </a:p>
@@ -14906,7 +13460,7 @@
                 <a:ea typeface="Noto Sans KR" pitchFamily="34" charset="-122"/>
                 <a:cs typeface="Noto Sans KR" pitchFamily="34" charset="-120"/>
               </a:rPr>
-              <a:t>📚 강의노트</a:t>
+              <a:t>강의노트</a:t>
             </a:r>
             <a:endParaRPr lang="en-US" sz="900" dirty="0"/>
           </a:p>
@@ -14976,7 +13530,7 @@
                 <a:ea typeface="Noto Sans KR" pitchFamily="34" charset="-122"/>
                 <a:cs typeface="Noto Sans KR" pitchFamily="34" charset="-120"/>
               </a:rPr>
-              <a:t>📅 학사일정</a:t>
+              <a:t>학사일정</a:t>
             </a:r>
             <a:endParaRPr lang="en-US" sz="900" dirty="0"/>
           </a:p>
@@ -15046,7 +13600,7 @@
                 <a:ea typeface="Noto Sans KR" pitchFamily="34" charset="-122"/>
                 <a:cs typeface="Noto Sans KR" pitchFamily="34" charset="-120"/>
               </a:rPr>
-              <a:t>📝 과제함</a:t>
+              <a:t>과제함</a:t>
             </a:r>
             <a:endParaRPr lang="en-US" sz="900" dirty="0"/>
           </a:p>
@@ -15224,7 +13778,7 @@
                 <a:ea typeface="Noto Sans KR" pitchFamily="34" charset="-122"/>
                 <a:cs typeface="Noto Sans KR" pitchFamily="34" charset="-120"/>
               </a:rPr>
-              <a:t>🔥 이번 주 마감 (LINKED VIEW)</a:t>
+              <a:t>이번 주 마감 (LINKED VIEW)</a:t>
             </a:r>
             <a:endParaRPr lang="en-US" sz="900" dirty="0"/>
           </a:p>
@@ -15968,7 +14522,43 @@
       </p:pic>
       <p:sp>
         <p:nvSpPr>
-          <p:cNvPr id="64" name="deckgen:wrap:footer"/>
+          <p:cNvPr id="64" name="Stage3 Note"/>
+          <p:cNvSpPr txBox="1"/>
+          <p:nvPr/>
+        </p:nvSpPr>
+        <p:spPr>
+          <a:xfrm>
+            <a:off x="761695" y="6250000"/>
+            <a:ext cx="4800000" cy="230000"/>
+          </a:xfrm>
+          <a:prstGeom prst="rect">
+            <a:avLst/>
+          </a:prstGeom>
+          <a:noFill/>
+        </p:spPr>
+        <p:txBody>
+          <a:bodyPr wrap="square" lIns="0" rIns="0" tIns="0" bIns="0" anchor="t">
+            <a:spAutoFit/>
+          </a:bodyPr>
+          <a:lstStyle/>
+          <a:p>
+            <a:r>
+              <a:rPr sz="900">
+                <a:solidFill>
+                  <a:srgbClr val="8B95A7"/>
+                </a:solidFill>
+                <a:latin typeface="Noto Sans KR"/>
+                <a:ea typeface="Noto Sans KR"/>
+                <a:cs typeface="Noto Sans KR"/>
+              </a:rPr>
+              <a:t>노션 도움말 「Notion Calendar apps」·「Mobile widgets」(2026-10 기준)</a:t>
+            </a:r>
+          </a:p>
+        </p:txBody>
+      </p:sp>
+      <p:sp>
+        <p:nvSpPr>
+          <p:cNvPr id="65" name="deckgen:wrap:footer"/>
           <p:cNvSpPr txBox="1"/>
           <p:nvPr/>
         </p:nvSpPr>
@@ -16000,7 +14590,690 @@
                 </a:solidFill>
                 <a:latin typeface="Pretendard"/>
               </a:rPr>
-              <a:t>© 2026 이애본(드림아이티비즈) · useful-ai.dreamitbiz.com · 교육 목적 비영리 이용 · 출처 표기</a:t>
+              <a:t>© 2026 이애본 · 홍문원(洪文院) 발행 · CC BY-NC-ND 4.0 · useful-ai.dreamitbiz.com</a:t>
+            </a:r>
+          </a:p>
+        </p:txBody>
+      </p:sp>
+    </p:spTree>
+  </p:cSld>
+  <p:clrMapOvr>
+    <a:masterClrMapping/>
+  </p:clrMapOvr>
+</p:sld>
+</file>
+
+<file path=ppt/slides/slide17.xml><?xml version="1.0" encoding="utf-8"?>
+<p:sld xmlns:a="http://schemas.openxmlformats.org/drawingml/2006/main" xmlns:p="http://schemas.openxmlformats.org/presentationml/2006/main" xmlns:r="http://schemas.openxmlformats.org/officeDocument/2006/relationships">
+  <p:cSld>
+    <p:spTree>
+      <p:nvGrpSpPr>
+        <p:cNvPr id="1" name=""/>
+        <p:cNvGrpSpPr/>
+        <p:nvPr/>
+      </p:nvGrpSpPr>
+      <p:grpSpPr/>
+      <p:sp>
+        <p:nvSpPr>
+          <p:cNvPr id="2" name="Shape 0"/>
+          <p:cNvSpPr/>
+          <p:nvPr/>
+        </p:nvSpPr>
+        <p:spPr>
+          <a:xfrm>
+            <a:off x="0" y="0"/>
+            <a:ext cx="12191695" cy="6858000"/>
+          </a:xfrm>
+          <a:prstGeom prst="rect">
+            <a:avLst/>
+          </a:prstGeom>
+          <a:solidFill>
+            <a:srgbClr val="0F172A"/>
+          </a:solidFill>
+          <a:ln/>
+        </p:spPr>
+        <p:txBody>
+          <a:bodyPr/>
+          <a:lstStyle/>
+          <a:p>
+            <a:endParaRPr lang="ko-KR" altLang="en-US"/>
+          </a:p>
+        </p:txBody>
+      </p:sp>
+      <p:sp>
+        <p:nvSpPr>
+          <p:cNvPr id="4" name="Text 2"/>
+          <p:cNvSpPr txBox="1"/>
+          <p:nvPr/>
+        </p:nvSpPr>
+        <p:spPr>
+          <a:xfrm>
+            <a:off x="1238098" y="2613355"/>
+            <a:ext cx="2976372" cy="277063"/>
+          </a:xfrm>
+          <a:prstGeom prst="rect">
+            <a:avLst/>
+          </a:prstGeom>
+          <a:noFill/>
+          <a:ln/>
+        </p:spPr>
+        <p:txBody>
+          <a:bodyPr wrap="square" lIns="0" tIns="0" rIns="0" bIns="0" rtlCol="0" anchor="ctr"/>
+          <a:lstStyle/>
+          <a:p>
+            <a:pPr marL="0" indent="0" algn="l">
+              <a:buNone/>
+            </a:pPr>
+            <a:r>
+              <a:rPr lang="en-US" sz="1400" b="1" dirty="0">
+                <a:solidFill>
+                  <a:srgbClr val="F8FAFC"/>
+                </a:solidFill>
+                <a:latin typeface="Noto Sans KR" pitchFamily="34" charset="0"/>
+                <a:ea typeface="Noto Sans KR" pitchFamily="34" charset="-122"/>
+                <a:cs typeface="Noto Sans KR" pitchFamily="34" charset="-120"/>
+              </a:rPr>
+              <a:t>과도한 중첩 페이지 (Nested Pages)</a:t>
+            </a:r>
+            <a:endParaRPr lang="en-US" sz="1400" dirty="0"/>
+          </a:p>
+        </p:txBody>
+      </p:sp>
+      <p:sp>
+        <p:nvSpPr>
+          <p:cNvPr id="5" name="Text 3"/>
+          <p:cNvSpPr txBox="1"/>
+          <p:nvPr/>
+        </p:nvSpPr>
+        <p:spPr>
+          <a:xfrm>
+            <a:off x="1238098" y="3631082"/>
+            <a:ext cx="1947672" cy="277063"/>
+          </a:xfrm>
+          <a:prstGeom prst="rect">
+            <a:avLst/>
+          </a:prstGeom>
+          <a:noFill/>
+          <a:ln/>
+        </p:spPr>
+        <p:txBody>
+          <a:bodyPr wrap="square" lIns="0" tIns="0" rIns="0" bIns="0" rtlCol="0" anchor="ctr"/>
+          <a:lstStyle/>
+          <a:p>
+            <a:pPr marL="0" indent="0" algn="l">
+              <a:buNone/>
+            </a:pPr>
+            <a:r>
+              <a:rPr lang="en-US" sz="1400" b="1" dirty="0">
+                <a:solidFill>
+                  <a:srgbClr val="F8FAFC"/>
+                </a:solidFill>
+                <a:latin typeface="Noto Sans KR" pitchFamily="34" charset="0"/>
+                <a:ea typeface="Noto Sans KR" pitchFamily="34" charset="-122"/>
+                <a:cs typeface="Noto Sans KR" pitchFamily="34" charset="-120"/>
+              </a:rPr>
+              <a:t>DB 없는 단순 블록 나열</a:t>
+            </a:r>
+            <a:endParaRPr lang="en-US" sz="1400" dirty="0"/>
+          </a:p>
+        </p:txBody>
+      </p:sp>
+      <p:sp>
+        <p:nvSpPr>
+          <p:cNvPr id="6" name="Text 4"/>
+          <p:cNvSpPr txBox="1"/>
+          <p:nvPr/>
+        </p:nvSpPr>
+        <p:spPr>
+          <a:xfrm>
+            <a:off x="1238098" y="4496105"/>
+            <a:ext cx="1442923" cy="277063"/>
+          </a:xfrm>
+          <a:prstGeom prst="rect">
+            <a:avLst/>
+          </a:prstGeom>
+          <a:noFill/>
+          <a:ln/>
+        </p:spPr>
+        <p:txBody>
+          <a:bodyPr wrap="square" lIns="0" tIns="0" rIns="0" bIns="0" rtlCol="0" anchor="ctr"/>
+          <a:lstStyle/>
+          <a:p>
+            <a:pPr marL="0" indent="0" algn="l">
+              <a:buNone/>
+            </a:pPr>
+            <a:r>
+              <a:rPr lang="en-US" sz="1400" b="1" dirty="0">
+                <a:solidFill>
+                  <a:srgbClr val="F8FAFC"/>
+                </a:solidFill>
+                <a:latin typeface="Noto Sans KR" pitchFamily="34" charset="0"/>
+                <a:ea typeface="Noto Sans KR" pitchFamily="34" charset="-122"/>
+                <a:cs typeface="Noto Sans KR" pitchFamily="34" charset="-120"/>
+              </a:rPr>
+              <a:t>필터/정렬 미설정</a:t>
+            </a:r>
+            <a:endParaRPr lang="en-US" sz="1400" dirty="0"/>
+          </a:p>
+        </p:txBody>
+      </p:sp>
+      <p:sp>
+        <p:nvSpPr>
+          <p:cNvPr id="7" name="Text 5"/>
+          <p:cNvSpPr txBox="1"/>
+          <p:nvPr/>
+        </p:nvSpPr>
+        <p:spPr>
+          <a:xfrm>
+            <a:off x="1238098" y="5360213"/>
+            <a:ext cx="1861718" cy="277063"/>
+          </a:xfrm>
+          <a:prstGeom prst="rect">
+            <a:avLst/>
+          </a:prstGeom>
+          <a:noFill/>
+          <a:ln/>
+        </p:spPr>
+        <p:txBody>
+          <a:bodyPr wrap="square" lIns="0" tIns="0" rIns="0" bIns="0" rtlCol="0" anchor="ctr"/>
+          <a:lstStyle/>
+          <a:p>
+            <a:pPr marL="0" indent="0" algn="l">
+              <a:buNone/>
+            </a:pPr>
+            <a:r>
+              <a:rPr lang="en-US" sz="1400" b="1" dirty="0">
+                <a:solidFill>
+                  <a:srgbClr val="F8FAFC"/>
+                </a:solidFill>
+                <a:latin typeface="Noto Sans KR" pitchFamily="34" charset="0"/>
+                <a:ea typeface="Noto Sans KR" pitchFamily="34" charset="-122"/>
+                <a:cs typeface="Noto Sans KR" pitchFamily="34" charset="-120"/>
+              </a:rPr>
+              <a:t>권한 및 공유 범위 실수</a:t>
+            </a:r>
+            <a:endParaRPr lang="en-US" sz="1400" dirty="0"/>
+          </a:p>
+        </p:txBody>
+      </p:sp>
+      <p:sp>
+        <p:nvSpPr>
+          <p:cNvPr id="8" name="Text 6"/>
+          <p:cNvSpPr txBox="1"/>
+          <p:nvPr/>
+        </p:nvSpPr>
+        <p:spPr>
+          <a:xfrm>
+            <a:off x="761695" y="737006"/>
+            <a:ext cx="1329538" cy="191110"/>
+          </a:xfrm>
+          <a:prstGeom prst="rect">
+            <a:avLst/>
+          </a:prstGeom>
+          <a:noFill/>
+          <a:ln/>
+        </p:spPr>
+        <p:txBody>
+          <a:bodyPr wrap="square" lIns="0" tIns="0" rIns="0" bIns="0" rtlCol="0" anchor="ctr"/>
+          <a:lstStyle/>
+          <a:p>
+            <a:pPr marL="0" indent="0" algn="l">
+              <a:buNone/>
+            </a:pPr>
+            <a:r>
+              <a:rPr lang="en-US" sz="1000" b="1" dirty="0">
+                <a:solidFill>
+                  <a:srgbClr val="F87171"/>
+                </a:solidFill>
+                <a:latin typeface="Noto Sans KR" pitchFamily="34" charset="0"/>
+                <a:ea typeface="Noto Sans KR" pitchFamily="34" charset="-122"/>
+                <a:cs typeface="Noto Sans KR" pitchFamily="34" charset="-120"/>
+              </a:rPr>
+              <a:t>CAUTION POINTS</a:t>
+            </a:r>
+            <a:endParaRPr lang="en-US" sz="1000" dirty="0"/>
+          </a:p>
+        </p:txBody>
+      </p:sp>
+      <p:sp>
+        <p:nvSpPr>
+          <p:cNvPr id="9" name="Text 7"/>
+          <p:cNvSpPr txBox="1"/>
+          <p:nvPr/>
+        </p:nvSpPr>
+        <p:spPr>
+          <a:xfrm>
+            <a:off x="761695" y="1042416"/>
+            <a:ext cx="4315054" cy="1239012"/>
+          </a:xfrm>
+          <a:prstGeom prst="rect">
+            <a:avLst/>
+          </a:prstGeom>
+          <a:noFill/>
+          <a:ln/>
+        </p:spPr>
+        <p:txBody>
+          <a:bodyPr wrap="square" lIns="0" tIns="0" rIns="0" bIns="0" rtlCol="0" anchor="ctr"/>
+          <a:lstStyle/>
+          <a:p>
+            <a:pPr marL="0" indent="0" algn="l">
+              <a:buNone/>
+            </a:pPr>
+            <a:r>
+              <a:rPr lang="en-US" sz="3600" b="1" dirty="0">
+                <a:solidFill>
+                  <a:srgbClr val="FFFFFF"/>
+                </a:solidFill>
+                <a:latin typeface="Noto Sans KR" pitchFamily="34" charset="0"/>
+                <a:ea typeface="Noto Sans KR" pitchFamily="34" charset="-122"/>
+                <a:cs typeface="Noto Sans KR" pitchFamily="34" charset="-120"/>
+              </a:rPr>
+              <a:t>자주 하는 실수</a:t>
+            </a:r>
+            <a:endParaRPr lang="en-US" sz="3600" dirty="0"/>
+          </a:p>
+        </p:txBody>
+      </p:sp>
+      <p:pic>
+        <p:nvPicPr>
+          <p:cNvPr id="10" name="Image 0" descr="preencoded.png"/>
+          <p:cNvPicPr>
+            <a:picLocks noChangeAspect="1"/>
+          </p:cNvPicPr>
+          <p:nvPr/>
+        </p:nvPicPr>
+        <p:blipFill>
+          <a:blip r:embed="rId2"/>
+          <a:srcRect l="-461" r="-461"/>
+          <a:stretch/>
+        </p:blipFill>
+        <p:spPr>
+          <a:xfrm>
+            <a:off x="795528" y="2697480"/>
+            <a:ext cx="237744" cy="209398"/>
+          </a:xfrm>
+          <a:prstGeom prst="rect">
+            <a:avLst/>
+          </a:prstGeom>
+        </p:spPr>
+      </p:pic>
+      <p:sp>
+        <p:nvSpPr>
+          <p:cNvPr id="11" name="Text 8"/>
+          <p:cNvSpPr txBox="1"/>
+          <p:nvPr/>
+        </p:nvSpPr>
+        <p:spPr>
+          <a:xfrm>
+            <a:off x="1238098" y="2945282"/>
+            <a:ext cx="4019702" cy="457200"/>
+          </a:xfrm>
+          <a:prstGeom prst="rect">
+            <a:avLst/>
+          </a:prstGeom>
+          <a:noFill/>
+          <a:ln/>
+        </p:spPr>
+        <p:txBody>
+          <a:bodyPr wrap="square" lIns="0" tIns="0" rIns="0" bIns="0" rtlCol="0" anchor="ctr"/>
+          <a:lstStyle/>
+          <a:p>
+            <a:pPr marL="0" indent="0" algn="l">
+              <a:buNone/>
+            </a:pPr>
+            <a:r>
+              <a:rPr lang="en-US" sz="1200" dirty="0">
+                <a:solidFill>
+                  <a:srgbClr val="94A3B8"/>
+                </a:solidFill>
+                <a:latin typeface="Noto Sans KR" pitchFamily="34" charset="0"/>
+                <a:ea typeface="Noto Sans KR" pitchFamily="34" charset="-122"/>
+                <a:cs typeface="Noto Sans KR" pitchFamily="34" charset="-120"/>
+              </a:rPr>
+              <a:t>페이지를 3단계보다 깊이 겹치면 원하는 정보까지 찾아가기 어려워집니다. 3단계 이내를 권장합니다.</a:t>
+            </a:r>
+            <a:endParaRPr lang="en-US" sz="1200" dirty="0"/>
+          </a:p>
+        </p:txBody>
+      </p:sp>
+      <p:pic>
+        <p:nvPicPr>
+          <p:cNvPr id="12" name="Image 1" descr="preencoded.png"/>
+          <p:cNvPicPr>
+            <a:picLocks noChangeAspect="1"/>
+          </p:cNvPicPr>
+          <p:nvPr/>
+        </p:nvPicPr>
+        <p:blipFill>
+          <a:blip r:embed="rId3"/>
+          <a:srcRect l="-1903" r="-1903"/>
+          <a:stretch/>
+        </p:blipFill>
+        <p:spPr>
+          <a:xfrm>
+            <a:off x="819302" y="3715207"/>
+            <a:ext cx="190195" cy="209398"/>
+          </a:xfrm>
+          <a:prstGeom prst="rect">
+            <a:avLst/>
+          </a:prstGeom>
+        </p:spPr>
+      </p:pic>
+      <p:sp>
+        <p:nvSpPr>
+          <p:cNvPr id="13" name="Text 9"/>
+          <p:cNvSpPr txBox="1"/>
+          <p:nvPr/>
+        </p:nvSpPr>
+        <p:spPr>
+          <a:xfrm>
+            <a:off x="1238098" y="3962095"/>
+            <a:ext cx="3038551" cy="228600"/>
+          </a:xfrm>
+          <a:prstGeom prst="rect">
+            <a:avLst/>
+          </a:prstGeom>
+          <a:noFill/>
+          <a:ln/>
+        </p:spPr>
+        <p:txBody>
+          <a:bodyPr wrap="square" lIns="0" tIns="0" rIns="0" bIns="0" rtlCol="0" anchor="ctr"/>
+          <a:lstStyle/>
+          <a:p>
+            <a:pPr marL="0" indent="0" algn="l">
+              <a:buNone/>
+            </a:pPr>
+            <a:r>
+              <a:rPr lang="en-US" sz="1200" dirty="0">
+                <a:solidFill>
+                  <a:srgbClr val="94A3B8"/>
+                </a:solidFill>
+                <a:latin typeface="Noto Sans KR" pitchFamily="34" charset="0"/>
+                <a:ea typeface="Noto Sans KR" pitchFamily="34" charset="-122"/>
+                <a:cs typeface="Noto Sans KR" pitchFamily="34" charset="-120"/>
+              </a:rPr>
+              <a:t>단순 텍스트 나열은 데이터 관리가 어렵습니다.</a:t>
+            </a:r>
+            <a:endParaRPr lang="en-US" sz="1200" dirty="0"/>
+          </a:p>
+        </p:txBody>
+      </p:sp>
+      <p:sp>
+        <p:nvSpPr>
+          <p:cNvPr id="14" name="Text 10"/>
+          <p:cNvSpPr txBox="1"/>
+          <p:nvPr/>
+        </p:nvSpPr>
+        <p:spPr>
+          <a:xfrm>
+            <a:off x="1238098" y="4190695"/>
+            <a:ext cx="3001061" cy="228600"/>
+          </a:xfrm>
+          <a:prstGeom prst="rect">
+            <a:avLst/>
+          </a:prstGeom>
+          <a:noFill/>
+          <a:ln/>
+        </p:spPr>
+        <p:txBody>
+          <a:bodyPr wrap="square" lIns="0" tIns="0" rIns="0" bIns="0" rtlCol="0" anchor="ctr"/>
+          <a:lstStyle/>
+          <a:p>
+            <a:pPr marL="0" indent="0" algn="l">
+              <a:buNone/>
+            </a:pPr>
+            <a:r>
+              <a:rPr lang="en-US" sz="1200" dirty="0">
+                <a:solidFill>
+                  <a:srgbClr val="94A3B8"/>
+                </a:solidFill>
+                <a:latin typeface="Noto Sans KR" pitchFamily="34" charset="0"/>
+                <a:ea typeface="Noto Sans KR" pitchFamily="34" charset="-122"/>
+                <a:cs typeface="Noto Sans KR" pitchFamily="34" charset="-120"/>
+              </a:rPr>
+              <a:t>속성(Date, Status)을 위해 DB를 활용하세요.</a:t>
+            </a:r>
+            <a:endParaRPr lang="en-US" sz="1200" dirty="0"/>
+          </a:p>
+        </p:txBody>
+      </p:sp>
+      <p:pic>
+        <p:nvPicPr>
+          <p:cNvPr id="15" name="Image 2" descr="preencoded.png"/>
+          <p:cNvPicPr>
+            <a:picLocks noChangeAspect="1"/>
+          </p:cNvPicPr>
+          <p:nvPr/>
+        </p:nvPicPr>
+        <p:blipFill>
+          <a:blip r:embed="rId4"/>
+          <a:srcRect l="-461" r="-461"/>
+          <a:stretch/>
+        </p:blipFill>
+        <p:spPr>
+          <a:xfrm>
+            <a:off x="795528" y="4579315"/>
+            <a:ext cx="237744" cy="209398"/>
+          </a:xfrm>
+          <a:prstGeom prst="rect">
+            <a:avLst/>
+          </a:prstGeom>
+        </p:spPr>
+      </p:pic>
+      <p:sp>
+        <p:nvSpPr>
+          <p:cNvPr id="16" name="Text 11"/>
+          <p:cNvSpPr txBox="1"/>
+          <p:nvPr/>
+        </p:nvSpPr>
+        <p:spPr>
+          <a:xfrm>
+            <a:off x="1238098" y="4827118"/>
+            <a:ext cx="3543300" cy="228600"/>
+          </a:xfrm>
+          <a:prstGeom prst="rect">
+            <a:avLst/>
+          </a:prstGeom>
+          <a:noFill/>
+          <a:ln/>
+        </p:spPr>
+        <p:txBody>
+          <a:bodyPr wrap="square" lIns="0" tIns="0" rIns="0" bIns="0" rtlCol="0" anchor="ctr"/>
+          <a:lstStyle/>
+          <a:p>
+            <a:pPr marL="0" indent="0" algn="l">
+              <a:buNone/>
+            </a:pPr>
+            <a:r>
+              <a:rPr lang="en-US" sz="1200" dirty="0">
+                <a:solidFill>
+                  <a:srgbClr val="94A3B8"/>
+                </a:solidFill>
+                <a:latin typeface="Noto Sans KR" pitchFamily="34" charset="0"/>
+                <a:ea typeface="Noto Sans KR" pitchFamily="34" charset="-122"/>
+                <a:cs typeface="Noto Sans KR" pitchFamily="34" charset="-120"/>
+              </a:rPr>
+              <a:t>완료된 할 일까지 모두 보여주면 정보 과부하가 옵니다.</a:t>
+            </a:r>
+            <a:endParaRPr lang="en-US" sz="1200" dirty="0"/>
+          </a:p>
+        </p:txBody>
+      </p:sp>
+      <p:sp>
+        <p:nvSpPr>
+          <p:cNvPr id="17" name="Text 12"/>
+          <p:cNvSpPr txBox="1"/>
+          <p:nvPr/>
+        </p:nvSpPr>
+        <p:spPr>
+          <a:xfrm>
+            <a:off x="1238098" y="5055718"/>
+            <a:ext cx="2876702" cy="228600"/>
+          </a:xfrm>
+          <a:prstGeom prst="rect">
+            <a:avLst/>
+          </a:prstGeom>
+          <a:noFill/>
+          <a:ln/>
+        </p:spPr>
+        <p:txBody>
+          <a:bodyPr wrap="square" lIns="0" tIns="0" rIns="0" bIns="0" rtlCol="0" anchor="ctr"/>
+          <a:lstStyle/>
+          <a:p>
+            <a:pPr marL="0" indent="0" algn="l">
+              <a:buNone/>
+            </a:pPr>
+            <a:r>
+              <a:rPr lang="en-US" sz="1200" dirty="0">
+                <a:solidFill>
+                  <a:srgbClr val="94A3B8"/>
+                </a:solidFill>
+                <a:latin typeface="Noto Sans KR" pitchFamily="34" charset="0"/>
+                <a:ea typeface="Noto Sans KR" pitchFamily="34" charset="-122"/>
+                <a:cs typeface="Noto Sans KR" pitchFamily="34" charset="-120"/>
+              </a:rPr>
+              <a:t>'진행 중', '이번 주' 필터를 필수 적용하세요.</a:t>
+            </a:r>
+            <a:endParaRPr lang="en-US" sz="1200" dirty="0"/>
+          </a:p>
+        </p:txBody>
+      </p:sp>
+      <p:pic>
+        <p:nvPicPr>
+          <p:cNvPr id="18" name="Image 3" descr="preencoded.png"/>
+          <p:cNvPicPr>
+            <a:picLocks noChangeAspect="1"/>
+          </p:cNvPicPr>
+          <p:nvPr/>
+        </p:nvPicPr>
+        <p:blipFill>
+          <a:blip r:embed="rId5"/>
+          <a:srcRect l="-1004" r="-1004"/>
+          <a:stretch/>
+        </p:blipFill>
+        <p:spPr>
+          <a:xfrm>
+            <a:off x="780898" y="5444338"/>
+            <a:ext cx="267005" cy="209398"/>
+          </a:xfrm>
+          <a:prstGeom prst="rect">
+            <a:avLst/>
+          </a:prstGeom>
+        </p:spPr>
+      </p:pic>
+      <p:sp>
+        <p:nvSpPr>
+          <p:cNvPr id="19" name="Text 13"/>
+          <p:cNvSpPr txBox="1"/>
+          <p:nvPr/>
+        </p:nvSpPr>
+        <p:spPr>
+          <a:xfrm>
+            <a:off x="1238098" y="5692140"/>
+            <a:ext cx="3038551" cy="228600"/>
+          </a:xfrm>
+          <a:prstGeom prst="rect">
+            <a:avLst/>
+          </a:prstGeom>
+          <a:noFill/>
+          <a:ln/>
+        </p:spPr>
+        <p:txBody>
+          <a:bodyPr wrap="square" lIns="0" tIns="0" rIns="0" bIns="0" rtlCol="0" anchor="ctr"/>
+          <a:lstStyle/>
+          <a:p>
+            <a:pPr marL="0" indent="0" algn="l">
+              <a:buNone/>
+            </a:pPr>
+            <a:r>
+              <a:rPr lang="en-US" sz="1200" dirty="0">
+                <a:solidFill>
+                  <a:srgbClr val="94A3B8"/>
+                </a:solidFill>
+                <a:latin typeface="Noto Sans KR" pitchFamily="34" charset="0"/>
+                <a:ea typeface="Noto Sans KR" pitchFamily="34" charset="-122"/>
+                <a:cs typeface="Noto Sans KR" pitchFamily="34" charset="-120"/>
+              </a:rPr>
+              <a:t>팀스페이스에 민감한 개인 정보를 넣지 마세요.</a:t>
+            </a:r>
+            <a:endParaRPr lang="en-US" sz="1200" dirty="0"/>
+          </a:p>
+        </p:txBody>
+      </p:sp>
+      <p:sp>
+        <p:nvSpPr>
+          <p:cNvPr id="20" name="Text 14"/>
+          <p:cNvSpPr txBox="1"/>
+          <p:nvPr/>
+        </p:nvSpPr>
+        <p:spPr>
+          <a:xfrm>
+            <a:off x="1238098" y="5920740"/>
+            <a:ext cx="3076956" cy="228600"/>
+          </a:xfrm>
+          <a:prstGeom prst="rect">
+            <a:avLst/>
+          </a:prstGeom>
+          <a:noFill/>
+          <a:ln/>
+        </p:spPr>
+        <p:txBody>
+          <a:bodyPr wrap="square" lIns="0" tIns="0" rIns="0" bIns="0" rtlCol="0" anchor="ctr"/>
+          <a:lstStyle/>
+          <a:p>
+            <a:pPr marL="0" indent="0" algn="l">
+              <a:buNone/>
+            </a:pPr>
+            <a:r>
+              <a:rPr lang="en-US" sz="1200" dirty="0">
+                <a:solidFill>
+                  <a:srgbClr val="94A3B8"/>
+                </a:solidFill>
+                <a:latin typeface="Noto Sans KR" pitchFamily="34" charset="0"/>
+                <a:ea typeface="Noto Sans KR" pitchFamily="34" charset="-122"/>
+                <a:cs typeface="Noto Sans KR" pitchFamily="34" charset="-120"/>
+              </a:rPr>
+              <a:t>개인적인 작업은 '개인 페이지'에서 관리하세요.</a:t>
+            </a:r>
+            <a:endParaRPr lang="en-US" sz="1200" dirty="0"/>
+          </a:p>
+        </p:txBody>
+      </p:sp>
+      <p:sp>
+        <p:nvSpPr>
+          <p:cNvPr id="21" name="deckgen:wrap:footer"/>
+          <p:cNvSpPr txBox="1"/>
+          <p:nvPr/>
+        </p:nvSpPr>
+        <p:spPr>
+          <a:xfrm>
+            <a:off x="365760" y="6549390"/>
+            <a:ext cx="11460480" cy="240030"/>
+          </a:xfrm>
+          <a:prstGeom prst="rect">
+            <a:avLst/>
+          </a:prstGeom>
+          <a:noFill/>
+        </p:spPr>
+        <p:txBody>
+          <a:bodyPr wrap="square" anchor="b" lIns="0" rIns="0" tIns="0" bIns="0">
+            <a:spAutoFit/>
+          </a:bodyPr>
+          <a:lstStyle/>
+          <a:p>
+            <a:pPr algn="r">
+              <a:lnSpc>
+                <a:spcPct val="125000"/>
+              </a:lnSpc>
+            </a:pPr>
+            <a:r>
+              <a:rPr sz="900" b="0">
+                <a:solidFill>
+                  <a:srgbClr val="8A8F99"/>
+                </a:solidFill>
+                <a:latin typeface="Pretendard"/>
+              </a:rPr>
+              <a:t>© 2026 이애본 · 홍문원(洪文院) 발행 · CC BY-NC-ND 4.0 · useful-ai.dreamitbiz.com</a:t>
             </a:r>
           </a:p>
         </p:txBody>
@@ -16014,1572 +15287,6 @@
 </file>
 
 <file path=ppt/slides/slide18.xml><?xml version="1.0" encoding="utf-8"?>
-<p:sld xmlns:a="http://schemas.openxmlformats.org/drawingml/2006/main" xmlns:r="http://schemas.openxmlformats.org/officeDocument/2006/relationships" xmlns:p="http://schemas.openxmlformats.org/presentationml/2006/main">
-  <p:cSld name="Slide 17">
-    <p:spTree>
-      <p:nvGrpSpPr>
-        <p:cNvPr id="1" name=""/>
-        <p:cNvGrpSpPr/>
-        <p:nvPr/>
-      </p:nvGrpSpPr>
-      <p:grpSpPr>
-        <a:xfrm>
-          <a:off x="0" y="0"/>
-          <a:ext cx="0" cy="0"/>
-          <a:chOff x="0" y="0"/>
-          <a:chExt cx="0" cy="0"/>
-        </a:xfrm>
-      </p:grpSpPr>
-      <p:sp>
-        <p:nvSpPr>
-          <p:cNvPr id="2" name="Shape 0"/>
-          <p:cNvSpPr/>
-          <p:nvPr/>
-        </p:nvSpPr>
-        <p:spPr>
-          <a:xfrm>
-            <a:off x="0" y="0"/>
-            <a:ext cx="12191695" cy="6858000"/>
-          </a:xfrm>
-          <a:prstGeom prst="rect">
-            <a:avLst/>
-          </a:prstGeom>
-          <a:solidFill>
-            <a:srgbClr val="0F172A"/>
-          </a:solidFill>
-          <a:ln/>
-        </p:spPr>
-        <p:txBody>
-          <a:bodyPr/>
-          <a:lstStyle/>
-          <a:p>
-            <a:endParaRPr lang="ko-KR" altLang="en-US"/>
-          </a:p>
-        </p:txBody>
-      </p:sp>
-      <p:sp>
-        <p:nvSpPr>
-          <p:cNvPr id="3" name="Shape 1"/>
-          <p:cNvSpPr/>
-          <p:nvPr/>
-        </p:nvSpPr>
-        <p:spPr>
-          <a:xfrm>
-            <a:off x="7669987" y="-163270"/>
-            <a:ext cx="4722723" cy="4914594"/>
-          </a:xfrm>
-          <a:prstGeom prst="ellipse">
-            <a:avLst/>
-          </a:prstGeom>
-          <a:solidFill>
-            <a:srgbClr val="3B82F6">
-              <a:alpha val="5000"/>
-            </a:srgbClr>
-          </a:solidFill>
-          <a:ln/>
-        </p:spPr>
-        <p:txBody>
-          <a:bodyPr/>
-          <a:lstStyle/>
-          <a:p>
-            <a:endParaRPr lang="ko-KR" altLang="en-US"/>
-          </a:p>
-        </p:txBody>
-      </p:sp>
-      <p:sp>
-        <p:nvSpPr>
-          <p:cNvPr id="4" name="Text 2"/>
-          <p:cNvSpPr txBox="1"/>
-          <p:nvPr/>
-        </p:nvSpPr>
-        <p:spPr>
-          <a:xfrm>
-            <a:off x="1238098" y="2613355"/>
-            <a:ext cx="2976372" cy="277063"/>
-          </a:xfrm>
-          <a:prstGeom prst="rect">
-            <a:avLst/>
-          </a:prstGeom>
-          <a:noFill/>
-          <a:ln/>
-        </p:spPr>
-        <p:txBody>
-          <a:bodyPr wrap="square" lIns="0" tIns="0" rIns="0" bIns="0" rtlCol="0" anchor="ctr"/>
-          <a:lstStyle/>
-          <a:p>
-            <a:pPr marL="0" indent="0" algn="l">
-              <a:buNone/>
-            </a:pPr>
-            <a:r>
-              <a:rPr lang="en-US" sz="1400" b="1" dirty="0">
-                <a:solidFill>
-                  <a:srgbClr val="F8FAFC"/>
-                </a:solidFill>
-                <a:latin typeface="Noto Sans KR" pitchFamily="34" charset="0"/>
-                <a:ea typeface="Noto Sans KR" pitchFamily="34" charset="-122"/>
-                <a:cs typeface="Noto Sans KR" pitchFamily="34" charset="-120"/>
-              </a:rPr>
-              <a:t>과도한 중첩 페이지 (Nested Pages)</a:t>
-            </a:r>
-            <a:endParaRPr lang="en-US" sz="1400" dirty="0"/>
-          </a:p>
-        </p:txBody>
-      </p:sp>
-      <p:sp>
-        <p:nvSpPr>
-          <p:cNvPr id="5" name="Text 3"/>
-          <p:cNvSpPr txBox="1"/>
-          <p:nvPr/>
-        </p:nvSpPr>
-        <p:spPr>
-          <a:xfrm>
-            <a:off x="1238098" y="3631082"/>
-            <a:ext cx="1947672" cy="277063"/>
-          </a:xfrm>
-          <a:prstGeom prst="rect">
-            <a:avLst/>
-          </a:prstGeom>
-          <a:noFill/>
-          <a:ln/>
-        </p:spPr>
-        <p:txBody>
-          <a:bodyPr wrap="square" lIns="0" tIns="0" rIns="0" bIns="0" rtlCol="0" anchor="ctr"/>
-          <a:lstStyle/>
-          <a:p>
-            <a:pPr marL="0" indent="0" algn="l">
-              <a:buNone/>
-            </a:pPr>
-            <a:r>
-              <a:rPr lang="en-US" sz="1400" b="1" dirty="0">
-                <a:solidFill>
-                  <a:srgbClr val="F8FAFC"/>
-                </a:solidFill>
-                <a:latin typeface="Noto Sans KR" pitchFamily="34" charset="0"/>
-                <a:ea typeface="Noto Sans KR" pitchFamily="34" charset="-122"/>
-                <a:cs typeface="Noto Sans KR" pitchFamily="34" charset="-120"/>
-              </a:rPr>
-              <a:t>DB 없는 단순 블록 나열</a:t>
-            </a:r>
-            <a:endParaRPr lang="en-US" sz="1400" dirty="0"/>
-          </a:p>
-        </p:txBody>
-      </p:sp>
-      <p:sp>
-        <p:nvSpPr>
-          <p:cNvPr id="6" name="Text 4"/>
-          <p:cNvSpPr txBox="1"/>
-          <p:nvPr/>
-        </p:nvSpPr>
-        <p:spPr>
-          <a:xfrm>
-            <a:off x="1238098" y="4496105"/>
-            <a:ext cx="1442923" cy="277063"/>
-          </a:xfrm>
-          <a:prstGeom prst="rect">
-            <a:avLst/>
-          </a:prstGeom>
-          <a:noFill/>
-          <a:ln/>
-        </p:spPr>
-        <p:txBody>
-          <a:bodyPr wrap="square" lIns="0" tIns="0" rIns="0" bIns="0" rtlCol="0" anchor="ctr"/>
-          <a:lstStyle/>
-          <a:p>
-            <a:pPr marL="0" indent="0" algn="l">
-              <a:buNone/>
-            </a:pPr>
-            <a:r>
-              <a:rPr lang="en-US" sz="1400" b="1" dirty="0">
-                <a:solidFill>
-                  <a:srgbClr val="F8FAFC"/>
-                </a:solidFill>
-                <a:latin typeface="Noto Sans KR" pitchFamily="34" charset="0"/>
-                <a:ea typeface="Noto Sans KR" pitchFamily="34" charset="-122"/>
-                <a:cs typeface="Noto Sans KR" pitchFamily="34" charset="-120"/>
-              </a:rPr>
-              <a:t>필터/정렬 미설정</a:t>
-            </a:r>
-            <a:endParaRPr lang="en-US" sz="1400" dirty="0"/>
-          </a:p>
-        </p:txBody>
-      </p:sp>
-      <p:sp>
-        <p:nvSpPr>
-          <p:cNvPr id="7" name="Text 5"/>
-          <p:cNvSpPr txBox="1"/>
-          <p:nvPr/>
-        </p:nvSpPr>
-        <p:spPr>
-          <a:xfrm>
-            <a:off x="1238098" y="5360213"/>
-            <a:ext cx="1861718" cy="277063"/>
-          </a:xfrm>
-          <a:prstGeom prst="rect">
-            <a:avLst/>
-          </a:prstGeom>
-          <a:noFill/>
-          <a:ln/>
-        </p:spPr>
-        <p:txBody>
-          <a:bodyPr wrap="square" lIns="0" tIns="0" rIns="0" bIns="0" rtlCol="0" anchor="ctr"/>
-          <a:lstStyle/>
-          <a:p>
-            <a:pPr marL="0" indent="0" algn="l">
-              <a:buNone/>
-            </a:pPr>
-            <a:r>
-              <a:rPr lang="en-US" sz="1400" b="1" dirty="0">
-                <a:solidFill>
-                  <a:srgbClr val="F8FAFC"/>
-                </a:solidFill>
-                <a:latin typeface="Noto Sans KR" pitchFamily="34" charset="0"/>
-                <a:ea typeface="Noto Sans KR" pitchFamily="34" charset="-122"/>
-                <a:cs typeface="Noto Sans KR" pitchFamily="34" charset="-120"/>
-              </a:rPr>
-              <a:t>권한 및 공유 범위 실수</a:t>
-            </a:r>
-            <a:endParaRPr lang="en-US" sz="1400" dirty="0"/>
-          </a:p>
-        </p:txBody>
-      </p:sp>
-      <p:sp>
-        <p:nvSpPr>
-          <p:cNvPr id="8" name="Text 6"/>
-          <p:cNvSpPr txBox="1"/>
-          <p:nvPr/>
-        </p:nvSpPr>
-        <p:spPr>
-          <a:xfrm>
-            <a:off x="761695" y="737006"/>
-            <a:ext cx="1329538" cy="191110"/>
-          </a:xfrm>
-          <a:prstGeom prst="rect">
-            <a:avLst/>
-          </a:prstGeom>
-          <a:noFill/>
-          <a:ln/>
-        </p:spPr>
-        <p:txBody>
-          <a:bodyPr wrap="square" lIns="0" tIns="0" rIns="0" bIns="0" rtlCol="0" anchor="ctr"/>
-          <a:lstStyle/>
-          <a:p>
-            <a:pPr marL="0" indent="0" algn="l">
-              <a:buNone/>
-            </a:pPr>
-            <a:r>
-              <a:rPr lang="en-US" sz="1000" b="1" dirty="0">
-                <a:solidFill>
-                  <a:srgbClr val="F87171"/>
-                </a:solidFill>
-                <a:latin typeface="Noto Sans KR" pitchFamily="34" charset="0"/>
-                <a:ea typeface="Noto Sans KR" pitchFamily="34" charset="-122"/>
-                <a:cs typeface="Noto Sans KR" pitchFamily="34" charset="-120"/>
-              </a:rPr>
-              <a:t>CAUTION POINTS</a:t>
-            </a:r>
-            <a:endParaRPr lang="en-US" sz="1000" dirty="0"/>
-          </a:p>
-        </p:txBody>
-      </p:sp>
-      <p:sp>
-        <p:nvSpPr>
-          <p:cNvPr id="9" name="Text 7"/>
-          <p:cNvSpPr txBox="1"/>
-          <p:nvPr/>
-        </p:nvSpPr>
-        <p:spPr>
-          <a:xfrm>
-            <a:off x="761695" y="1042416"/>
-            <a:ext cx="4315054" cy="1239012"/>
-          </a:xfrm>
-          <a:prstGeom prst="rect">
-            <a:avLst/>
-          </a:prstGeom>
-          <a:noFill/>
-          <a:ln/>
-        </p:spPr>
-        <p:txBody>
-          <a:bodyPr wrap="square" lIns="0" tIns="0" rIns="0" bIns="0" rtlCol="0" anchor="ctr"/>
-          <a:lstStyle/>
-          <a:p>
-            <a:pPr marL="0" indent="0" algn="l">
-              <a:buNone/>
-            </a:pPr>
-            <a:r>
-              <a:rPr lang="en-US" sz="3600" b="1" dirty="0">
-                <a:solidFill>
-                  <a:srgbClr val="FFFFFF"/>
-                </a:solidFill>
-                <a:latin typeface="Noto Sans KR" pitchFamily="34" charset="0"/>
-                <a:ea typeface="Noto Sans KR" pitchFamily="34" charset="-122"/>
-                <a:cs typeface="Noto Sans KR" pitchFamily="34" charset="-120"/>
-              </a:rPr>
-              <a:t>자주 하는 실수와 QA 체크리스트</a:t>
-            </a:r>
-            <a:endParaRPr lang="en-US" sz="3600" dirty="0"/>
-          </a:p>
-        </p:txBody>
-      </p:sp>
-      <p:pic>
-        <p:nvPicPr>
-          <p:cNvPr id="10" name="Image 0" descr="preencoded.png"/>
-          <p:cNvPicPr>
-            <a:picLocks noChangeAspect="1"/>
-          </p:cNvPicPr>
-          <p:nvPr/>
-        </p:nvPicPr>
-        <p:blipFill>
-          <a:blip r:embed="rId3"/>
-          <a:srcRect l="-461" r="-461"/>
-          <a:stretch/>
-        </p:blipFill>
-        <p:spPr>
-          <a:xfrm>
-            <a:off x="795528" y="2697480"/>
-            <a:ext cx="237744" cy="209398"/>
-          </a:xfrm>
-          <a:prstGeom prst="rect">
-            <a:avLst/>
-          </a:prstGeom>
-        </p:spPr>
-      </p:pic>
-      <p:sp>
-        <p:nvSpPr>
-          <p:cNvPr id="11" name="Text 8"/>
-          <p:cNvSpPr txBox="1"/>
-          <p:nvPr/>
-        </p:nvSpPr>
-        <p:spPr>
-          <a:xfrm>
-            <a:off x="1238098" y="2945282"/>
-            <a:ext cx="4019702" cy="457200"/>
-          </a:xfrm>
-          <a:prstGeom prst="rect">
-            <a:avLst/>
-          </a:prstGeom>
-          <a:noFill/>
-          <a:ln/>
-        </p:spPr>
-        <p:txBody>
-          <a:bodyPr wrap="square" lIns="0" tIns="0" rIns="0" bIns="0" rtlCol="0" anchor="ctr"/>
-          <a:lstStyle/>
-          <a:p>
-            <a:pPr marL="0" indent="0" algn="l">
-              <a:buNone/>
-            </a:pPr>
-            <a:r>
-              <a:rPr lang="en-US" sz="1200" dirty="0">
-                <a:solidFill>
-                  <a:srgbClr val="94A3B8"/>
-                </a:solidFill>
-                <a:latin typeface="Noto Sans KR" pitchFamily="34" charset="0"/>
-                <a:ea typeface="Noto Sans KR" pitchFamily="34" charset="-122"/>
-                <a:cs typeface="Noto Sans KR" pitchFamily="34" charset="-120"/>
-              </a:rPr>
-              <a:t>Depth가 3단계를 넘어가면 정보 접근성이 급격히 저하됩니다. (3-Click Rule 위반)</a:t>
-            </a:r>
-            <a:endParaRPr lang="en-US" sz="1200" dirty="0"/>
-          </a:p>
-        </p:txBody>
-      </p:sp>
-      <p:pic>
-        <p:nvPicPr>
-          <p:cNvPr id="12" name="Image 1" descr="preencoded.png"/>
-          <p:cNvPicPr>
-            <a:picLocks noChangeAspect="1"/>
-          </p:cNvPicPr>
-          <p:nvPr/>
-        </p:nvPicPr>
-        <p:blipFill>
-          <a:blip r:embed="rId4"/>
-          <a:srcRect l="-1903" r="-1903"/>
-          <a:stretch/>
-        </p:blipFill>
-        <p:spPr>
-          <a:xfrm>
-            <a:off x="819302" y="3715207"/>
-            <a:ext cx="190195" cy="209398"/>
-          </a:xfrm>
-          <a:prstGeom prst="rect">
-            <a:avLst/>
-          </a:prstGeom>
-        </p:spPr>
-      </p:pic>
-      <p:sp>
-        <p:nvSpPr>
-          <p:cNvPr id="13" name="Text 9"/>
-          <p:cNvSpPr txBox="1"/>
-          <p:nvPr/>
-        </p:nvSpPr>
-        <p:spPr>
-          <a:xfrm>
-            <a:off x="1238098" y="3962095"/>
-            <a:ext cx="3038551" cy="228600"/>
-          </a:xfrm>
-          <a:prstGeom prst="rect">
-            <a:avLst/>
-          </a:prstGeom>
-          <a:noFill/>
-          <a:ln/>
-        </p:spPr>
-        <p:txBody>
-          <a:bodyPr wrap="square" lIns="0" tIns="0" rIns="0" bIns="0" rtlCol="0" anchor="ctr"/>
-          <a:lstStyle/>
-          <a:p>
-            <a:pPr marL="0" indent="0" algn="l">
-              <a:buNone/>
-            </a:pPr>
-            <a:r>
-              <a:rPr lang="en-US" sz="1200" dirty="0">
-                <a:solidFill>
-                  <a:srgbClr val="94A3B8"/>
-                </a:solidFill>
-                <a:latin typeface="Noto Sans KR" pitchFamily="34" charset="0"/>
-                <a:ea typeface="Noto Sans KR" pitchFamily="34" charset="-122"/>
-                <a:cs typeface="Noto Sans KR" pitchFamily="34" charset="-120"/>
-              </a:rPr>
-              <a:t>단순 텍스트 나열은 데이터 관리가 어렵습니다.</a:t>
-            </a:r>
-            <a:endParaRPr lang="en-US" sz="1200" dirty="0"/>
-          </a:p>
-        </p:txBody>
-      </p:sp>
-      <p:sp>
-        <p:nvSpPr>
-          <p:cNvPr id="14" name="Text 10"/>
-          <p:cNvSpPr txBox="1"/>
-          <p:nvPr/>
-        </p:nvSpPr>
-        <p:spPr>
-          <a:xfrm>
-            <a:off x="1238098" y="4190695"/>
-            <a:ext cx="3001061" cy="228600"/>
-          </a:xfrm>
-          <a:prstGeom prst="rect">
-            <a:avLst/>
-          </a:prstGeom>
-          <a:noFill/>
-          <a:ln/>
-        </p:spPr>
-        <p:txBody>
-          <a:bodyPr wrap="square" lIns="0" tIns="0" rIns="0" bIns="0" rtlCol="0" anchor="ctr"/>
-          <a:lstStyle/>
-          <a:p>
-            <a:pPr marL="0" indent="0" algn="l">
-              <a:buNone/>
-            </a:pPr>
-            <a:r>
-              <a:rPr lang="en-US" sz="1200" dirty="0">
-                <a:solidFill>
-                  <a:srgbClr val="94A3B8"/>
-                </a:solidFill>
-                <a:latin typeface="Noto Sans KR" pitchFamily="34" charset="0"/>
-                <a:ea typeface="Noto Sans KR" pitchFamily="34" charset="-122"/>
-                <a:cs typeface="Noto Sans KR" pitchFamily="34" charset="-120"/>
-              </a:rPr>
-              <a:t>속성(Date, Status)을 위해 DB를 활용하세요.</a:t>
-            </a:r>
-            <a:endParaRPr lang="en-US" sz="1200" dirty="0"/>
-          </a:p>
-        </p:txBody>
-      </p:sp>
-      <p:pic>
-        <p:nvPicPr>
-          <p:cNvPr id="15" name="Image 2" descr="preencoded.png"/>
-          <p:cNvPicPr>
-            <a:picLocks noChangeAspect="1"/>
-          </p:cNvPicPr>
-          <p:nvPr/>
-        </p:nvPicPr>
-        <p:blipFill>
-          <a:blip r:embed="rId5"/>
-          <a:srcRect l="-461" r="-461"/>
-          <a:stretch/>
-        </p:blipFill>
-        <p:spPr>
-          <a:xfrm>
-            <a:off x="795528" y="4579315"/>
-            <a:ext cx="237744" cy="209398"/>
-          </a:xfrm>
-          <a:prstGeom prst="rect">
-            <a:avLst/>
-          </a:prstGeom>
-        </p:spPr>
-      </p:pic>
-      <p:sp>
-        <p:nvSpPr>
-          <p:cNvPr id="16" name="Text 11"/>
-          <p:cNvSpPr txBox="1"/>
-          <p:nvPr/>
-        </p:nvSpPr>
-        <p:spPr>
-          <a:xfrm>
-            <a:off x="1238098" y="4827118"/>
-            <a:ext cx="3543300" cy="228600"/>
-          </a:xfrm>
-          <a:prstGeom prst="rect">
-            <a:avLst/>
-          </a:prstGeom>
-          <a:noFill/>
-          <a:ln/>
-        </p:spPr>
-        <p:txBody>
-          <a:bodyPr wrap="square" lIns="0" tIns="0" rIns="0" bIns="0" rtlCol="0" anchor="ctr"/>
-          <a:lstStyle/>
-          <a:p>
-            <a:pPr marL="0" indent="0" algn="l">
-              <a:buNone/>
-            </a:pPr>
-            <a:r>
-              <a:rPr lang="en-US" sz="1200" dirty="0">
-                <a:solidFill>
-                  <a:srgbClr val="94A3B8"/>
-                </a:solidFill>
-                <a:latin typeface="Noto Sans KR" pitchFamily="34" charset="0"/>
-                <a:ea typeface="Noto Sans KR" pitchFamily="34" charset="-122"/>
-                <a:cs typeface="Noto Sans KR" pitchFamily="34" charset="-120"/>
-              </a:rPr>
-              <a:t>완료된 할 일까지 모두 보여주면 정보 과부하가 옵니다.</a:t>
-            </a:r>
-            <a:endParaRPr lang="en-US" sz="1200" dirty="0"/>
-          </a:p>
-        </p:txBody>
-      </p:sp>
-      <p:sp>
-        <p:nvSpPr>
-          <p:cNvPr id="17" name="Text 12"/>
-          <p:cNvSpPr txBox="1"/>
-          <p:nvPr/>
-        </p:nvSpPr>
-        <p:spPr>
-          <a:xfrm>
-            <a:off x="1238098" y="5055718"/>
-            <a:ext cx="2876702" cy="228600"/>
-          </a:xfrm>
-          <a:prstGeom prst="rect">
-            <a:avLst/>
-          </a:prstGeom>
-          <a:noFill/>
-          <a:ln/>
-        </p:spPr>
-        <p:txBody>
-          <a:bodyPr wrap="square" lIns="0" tIns="0" rIns="0" bIns="0" rtlCol="0" anchor="ctr"/>
-          <a:lstStyle/>
-          <a:p>
-            <a:pPr marL="0" indent="0" algn="l">
-              <a:buNone/>
-            </a:pPr>
-            <a:r>
-              <a:rPr lang="en-US" sz="1200" dirty="0">
-                <a:solidFill>
-                  <a:srgbClr val="94A3B8"/>
-                </a:solidFill>
-                <a:latin typeface="Noto Sans KR" pitchFamily="34" charset="0"/>
-                <a:ea typeface="Noto Sans KR" pitchFamily="34" charset="-122"/>
-                <a:cs typeface="Noto Sans KR" pitchFamily="34" charset="-120"/>
-              </a:rPr>
-              <a:t>'진행 중', '이번 주' 필터를 필수 적용하세요.</a:t>
-            </a:r>
-            <a:endParaRPr lang="en-US" sz="1200" dirty="0"/>
-          </a:p>
-        </p:txBody>
-      </p:sp>
-      <p:pic>
-        <p:nvPicPr>
-          <p:cNvPr id="18" name="Image 3" descr="preencoded.png"/>
-          <p:cNvPicPr>
-            <a:picLocks noChangeAspect="1"/>
-          </p:cNvPicPr>
-          <p:nvPr/>
-        </p:nvPicPr>
-        <p:blipFill>
-          <a:blip r:embed="rId6"/>
-          <a:srcRect l="-1004" r="-1004"/>
-          <a:stretch/>
-        </p:blipFill>
-        <p:spPr>
-          <a:xfrm>
-            <a:off x="780898" y="5444338"/>
-            <a:ext cx="267005" cy="209398"/>
-          </a:xfrm>
-          <a:prstGeom prst="rect">
-            <a:avLst/>
-          </a:prstGeom>
-        </p:spPr>
-      </p:pic>
-      <p:sp>
-        <p:nvSpPr>
-          <p:cNvPr id="19" name="Text 13"/>
-          <p:cNvSpPr txBox="1"/>
-          <p:nvPr/>
-        </p:nvSpPr>
-        <p:spPr>
-          <a:xfrm>
-            <a:off x="1238098" y="5692140"/>
-            <a:ext cx="3038551" cy="228600"/>
-          </a:xfrm>
-          <a:prstGeom prst="rect">
-            <a:avLst/>
-          </a:prstGeom>
-          <a:noFill/>
-          <a:ln/>
-        </p:spPr>
-        <p:txBody>
-          <a:bodyPr wrap="square" lIns="0" tIns="0" rIns="0" bIns="0" rtlCol="0" anchor="ctr"/>
-          <a:lstStyle/>
-          <a:p>
-            <a:pPr marL="0" indent="0" algn="l">
-              <a:buNone/>
-            </a:pPr>
-            <a:r>
-              <a:rPr lang="en-US" sz="1200" dirty="0">
-                <a:solidFill>
-                  <a:srgbClr val="94A3B8"/>
-                </a:solidFill>
-                <a:latin typeface="Noto Sans KR" pitchFamily="34" charset="0"/>
-                <a:ea typeface="Noto Sans KR" pitchFamily="34" charset="-122"/>
-                <a:cs typeface="Noto Sans KR" pitchFamily="34" charset="-120"/>
-              </a:rPr>
-              <a:t>팀스페이스에 민감한 개인 정보를 넣지 마세요.</a:t>
-            </a:r>
-            <a:endParaRPr lang="en-US" sz="1200" dirty="0"/>
-          </a:p>
-        </p:txBody>
-      </p:sp>
-      <p:sp>
-        <p:nvSpPr>
-          <p:cNvPr id="20" name="Text 14"/>
-          <p:cNvSpPr txBox="1"/>
-          <p:nvPr/>
-        </p:nvSpPr>
-        <p:spPr>
-          <a:xfrm>
-            <a:off x="1238098" y="5920740"/>
-            <a:ext cx="3076956" cy="228600"/>
-          </a:xfrm>
-          <a:prstGeom prst="rect">
-            <a:avLst/>
-          </a:prstGeom>
-          <a:noFill/>
-          <a:ln/>
-        </p:spPr>
-        <p:txBody>
-          <a:bodyPr wrap="square" lIns="0" tIns="0" rIns="0" bIns="0" rtlCol="0" anchor="ctr"/>
-          <a:lstStyle/>
-          <a:p>
-            <a:pPr marL="0" indent="0" algn="l">
-              <a:buNone/>
-            </a:pPr>
-            <a:r>
-              <a:rPr lang="en-US" sz="1200" dirty="0">
-                <a:solidFill>
-                  <a:srgbClr val="94A3B8"/>
-                </a:solidFill>
-                <a:latin typeface="Noto Sans KR" pitchFamily="34" charset="0"/>
-                <a:ea typeface="Noto Sans KR" pitchFamily="34" charset="-122"/>
-                <a:cs typeface="Noto Sans KR" pitchFamily="34" charset="-120"/>
-              </a:rPr>
-              <a:t>개인적인 작업은 '개인 페이지'에서 관리하세요.</a:t>
-            </a:r>
-            <a:endParaRPr lang="en-US" sz="1200" dirty="0"/>
-          </a:p>
-        </p:txBody>
-      </p:sp>
-      <p:sp>
-        <p:nvSpPr>
-          <p:cNvPr id="21" name="Shape 15"/>
-          <p:cNvSpPr/>
-          <p:nvPr/>
-        </p:nvSpPr>
-        <p:spPr>
-          <a:xfrm>
-            <a:off x="5753405" y="761695"/>
-            <a:ext cx="5676595" cy="5794155"/>
-          </a:xfrm>
-          <a:prstGeom prst="roundRect">
-            <a:avLst>
-              <a:gd name="adj" fmla="val 612"/>
-            </a:avLst>
-          </a:prstGeom>
-          <a:solidFill>
-            <a:srgbClr val="1E293B"/>
-          </a:solidFill>
-          <a:ln w="12700">
-            <a:solidFill>
-              <a:srgbClr val="3B82F6">
-                <a:alpha val="30000"/>
-              </a:srgbClr>
-            </a:solidFill>
-            <a:prstDash val="solid"/>
-          </a:ln>
-          <a:effectLst>
-            <a:outerShdw blurRad="381000" dist="190500" dir="5400000" algn="bl" rotWithShape="0">
-              <a:srgbClr val="000000">
-                <a:alpha val="40000"/>
-              </a:srgbClr>
-            </a:outerShdw>
-          </a:effectLst>
-        </p:spPr>
-        <p:txBody>
-          <a:bodyPr/>
-          <a:lstStyle/>
-          <a:p>
-            <a:endParaRPr lang="ko-KR" altLang="en-US"/>
-          </a:p>
-        </p:txBody>
-      </p:sp>
-      <p:sp>
-        <p:nvSpPr>
-          <p:cNvPr id="22" name="Shape 16"/>
-          <p:cNvSpPr/>
-          <p:nvPr/>
-        </p:nvSpPr>
-        <p:spPr>
-          <a:xfrm>
-            <a:off x="6143854" y="1800454"/>
-            <a:ext cx="4895698" cy="9144"/>
-          </a:xfrm>
-          <a:prstGeom prst="rect">
-            <a:avLst/>
-          </a:prstGeom>
-          <a:solidFill>
-            <a:srgbClr val="FFFFFF">
-              <a:alpha val="10000"/>
-            </a:srgbClr>
-          </a:solidFill>
-          <a:ln/>
-        </p:spPr>
-        <p:txBody>
-          <a:bodyPr/>
-          <a:lstStyle/>
-          <a:p>
-            <a:endParaRPr lang="ko-KR" altLang="en-US"/>
-          </a:p>
-        </p:txBody>
-      </p:sp>
-      <p:sp>
-        <p:nvSpPr>
-          <p:cNvPr id="23" name="Text 17"/>
-          <p:cNvSpPr txBox="1"/>
-          <p:nvPr/>
-        </p:nvSpPr>
-        <p:spPr>
-          <a:xfrm>
-            <a:off x="6143854" y="1095451"/>
-            <a:ext cx="2162556" cy="333756"/>
-          </a:xfrm>
-          <a:prstGeom prst="rect">
-            <a:avLst/>
-          </a:prstGeom>
-          <a:noFill/>
-          <a:ln/>
-        </p:spPr>
-        <p:txBody>
-          <a:bodyPr wrap="square" lIns="0" tIns="0" rIns="0" bIns="0" rtlCol="0" anchor="ctr"/>
-          <a:lstStyle/>
-          <a:p>
-            <a:pPr marL="0" indent="0" algn="l">
-              <a:buNone/>
-            </a:pPr>
-            <a:r>
-              <a:rPr lang="en-US" sz="1800" b="1" dirty="0">
-                <a:solidFill>
-                  <a:srgbClr val="FFFFFF"/>
-                </a:solidFill>
-                <a:latin typeface="Noto Sans KR" pitchFamily="34" charset="0"/>
-                <a:ea typeface="Noto Sans KR" pitchFamily="34" charset="-122"/>
-                <a:cs typeface="Noto Sans KR" pitchFamily="34" charset="-120"/>
-              </a:rPr>
-              <a:t>영상 강의 가독성 QA</a:t>
-            </a:r>
-            <a:endParaRPr lang="en-US" sz="1800" dirty="0"/>
-          </a:p>
-        </p:txBody>
-      </p:sp>
-      <p:sp>
-        <p:nvSpPr>
-          <p:cNvPr id="24" name="Text 18"/>
-          <p:cNvSpPr txBox="1"/>
-          <p:nvPr/>
-        </p:nvSpPr>
-        <p:spPr>
-          <a:xfrm>
-            <a:off x="6143854" y="1457554"/>
-            <a:ext cx="1890979" cy="191110"/>
-          </a:xfrm>
-          <a:prstGeom prst="rect">
-            <a:avLst/>
-          </a:prstGeom>
-          <a:noFill/>
-          <a:ln/>
-        </p:spPr>
-        <p:txBody>
-          <a:bodyPr wrap="square" lIns="0" tIns="0" rIns="0" bIns="0" rtlCol="0" anchor="ctr"/>
-          <a:lstStyle/>
-          <a:p>
-            <a:pPr marL="0" indent="0" algn="l">
-              <a:buNone/>
-            </a:pPr>
-            <a:r>
-              <a:rPr lang="en-US" sz="1000" dirty="0">
-                <a:solidFill>
-                  <a:srgbClr val="9CA3AF"/>
-                </a:solidFill>
-                <a:latin typeface="Noto Sans KR" pitchFamily="34" charset="0"/>
-                <a:ea typeface="Noto Sans KR" pitchFamily="34" charset="-122"/>
-                <a:cs typeface="Noto Sans KR" pitchFamily="34" charset="-120"/>
-              </a:rPr>
-              <a:t>슬라이드 제작 시 필수 점검 항목</a:t>
-            </a:r>
-            <a:endParaRPr lang="en-US" sz="1000" dirty="0"/>
-          </a:p>
-        </p:txBody>
-      </p:sp>
-      <p:sp>
-        <p:nvSpPr>
-          <p:cNvPr id="25" name="Shape 19"/>
-          <p:cNvSpPr/>
-          <p:nvPr/>
-        </p:nvSpPr>
-        <p:spPr>
-          <a:xfrm>
-            <a:off x="10582351" y="1152144"/>
-            <a:ext cx="457200" cy="457200"/>
-          </a:xfrm>
-          <a:prstGeom prst="roundRect">
-            <a:avLst>
-              <a:gd name="adj" fmla="val 200000"/>
-            </a:avLst>
-          </a:prstGeom>
-          <a:solidFill>
-            <a:srgbClr val="3B82F6">
-              <a:alpha val="20000"/>
-            </a:srgbClr>
-          </a:solidFill>
-          <a:ln/>
-        </p:spPr>
-        <p:txBody>
-          <a:bodyPr/>
-          <a:lstStyle/>
-          <a:p>
-            <a:endParaRPr lang="ko-KR" altLang="en-US"/>
-          </a:p>
-        </p:txBody>
-      </p:sp>
-      <p:pic>
-        <p:nvPicPr>
-          <p:cNvPr id="26" name="Image 4" descr="preencoded.png"/>
-          <p:cNvPicPr>
-            <a:picLocks noChangeAspect="1"/>
-          </p:cNvPicPr>
-          <p:nvPr/>
-        </p:nvPicPr>
-        <p:blipFill>
-          <a:blip r:embed="rId7"/>
-          <a:srcRect l="-133" r="-133"/>
-          <a:stretch/>
-        </p:blipFill>
-        <p:spPr>
-          <a:xfrm>
-            <a:off x="10724998" y="1266444"/>
-            <a:ext cx="171907" cy="228600"/>
-          </a:xfrm>
-          <a:prstGeom prst="rect">
-            <a:avLst/>
-          </a:prstGeom>
-        </p:spPr>
-      </p:pic>
-      <p:pic>
-        <p:nvPicPr>
-          <p:cNvPr id="27" name="Image 5" descr="preencoded.png"/>
-          <p:cNvPicPr>
-            <a:picLocks noChangeAspect="1"/>
-          </p:cNvPicPr>
-          <p:nvPr/>
-        </p:nvPicPr>
-        <p:blipFill>
-          <a:blip r:embed="rId8"/>
-          <a:srcRect t="-2725" b="-2725"/>
-          <a:stretch/>
-        </p:blipFill>
-        <p:spPr>
-          <a:xfrm>
-            <a:off x="6143854" y="2078431"/>
-            <a:ext cx="142646" cy="171907"/>
-          </a:xfrm>
-          <a:prstGeom prst="rect">
-            <a:avLst/>
-          </a:prstGeom>
-        </p:spPr>
-      </p:pic>
-      <p:sp>
-        <p:nvSpPr>
-          <p:cNvPr id="28" name="Text 20"/>
-          <p:cNvSpPr txBox="1"/>
-          <p:nvPr/>
-        </p:nvSpPr>
-        <p:spPr>
-          <a:xfrm>
-            <a:off x="6381598" y="2038198"/>
-            <a:ext cx="2221992" cy="257861"/>
-          </a:xfrm>
-          <a:prstGeom prst="rect">
-            <a:avLst/>
-          </a:prstGeom>
-          <a:noFill/>
-          <a:ln/>
-        </p:spPr>
-        <p:txBody>
-          <a:bodyPr wrap="square" lIns="0" tIns="0" rIns="0" bIns="0" rtlCol="0" anchor="ctr"/>
-          <a:lstStyle/>
-          <a:p>
-            <a:pPr marL="0" indent="0" algn="l">
-              <a:buNone/>
-            </a:pPr>
-            <a:r>
-              <a:rPr lang="en-US" sz="1300" b="1" dirty="0">
-                <a:solidFill>
-                  <a:srgbClr val="60A5FA"/>
-                </a:solidFill>
-                <a:latin typeface="Noto Sans KR" pitchFamily="34" charset="0"/>
-                <a:ea typeface="Noto Sans KR" pitchFamily="34" charset="-122"/>
-                <a:cs typeface="Noto Sans KR" pitchFamily="34" charset="-120"/>
-              </a:rPr>
-              <a:t>텍스트 가독성 (Readability)</a:t>
-            </a:r>
-            <a:endParaRPr lang="en-US" sz="1300" dirty="0"/>
-          </a:p>
-        </p:txBody>
-      </p:sp>
-      <p:sp>
-        <p:nvSpPr>
-          <p:cNvPr id="29" name="Shape 21"/>
-          <p:cNvSpPr/>
-          <p:nvPr/>
-        </p:nvSpPr>
-        <p:spPr>
-          <a:xfrm>
-            <a:off x="6143854" y="2384755"/>
-            <a:ext cx="4895698" cy="1133856"/>
-          </a:xfrm>
-          <a:prstGeom prst="roundRect">
-            <a:avLst>
-              <a:gd name="adj" fmla="val 8132"/>
-            </a:avLst>
-          </a:prstGeom>
-          <a:solidFill>
-            <a:srgbClr val="0F172A">
-              <a:alpha val="60000"/>
-            </a:srgbClr>
-          </a:solidFill>
-          <a:ln w="12700">
-            <a:solidFill>
-              <a:srgbClr val="FFFFFF">
-                <a:alpha val="5000"/>
-              </a:srgbClr>
-            </a:solidFill>
-            <a:prstDash val="solid"/>
-          </a:ln>
-        </p:spPr>
-        <p:txBody>
-          <a:bodyPr/>
-          <a:lstStyle/>
-          <a:p>
-            <a:endParaRPr lang="ko-KR" altLang="en-US"/>
-          </a:p>
-        </p:txBody>
-      </p:sp>
-      <p:sp>
-        <p:nvSpPr>
-          <p:cNvPr id="30" name="Text 22"/>
-          <p:cNvSpPr txBox="1"/>
-          <p:nvPr/>
-        </p:nvSpPr>
-        <p:spPr>
-          <a:xfrm>
-            <a:off x="6539789" y="2546604"/>
-            <a:ext cx="2375611" cy="210312"/>
-          </a:xfrm>
-          <a:prstGeom prst="rect">
-            <a:avLst/>
-          </a:prstGeom>
-          <a:noFill/>
-          <a:ln/>
-        </p:spPr>
-        <p:txBody>
-          <a:bodyPr wrap="square" lIns="0" tIns="0" rIns="0" bIns="0" rtlCol="0" anchor="ctr"/>
-          <a:lstStyle/>
-          <a:p>
-            <a:pPr marL="0" indent="0" algn="l">
-              <a:buNone/>
-            </a:pPr>
-            <a:r>
-              <a:rPr lang="en-US" sz="1100" dirty="0">
-                <a:solidFill>
-                  <a:srgbClr val="E2E8F0"/>
-                </a:solidFill>
-                <a:latin typeface="Noto Sans KR" pitchFamily="34" charset="0"/>
-                <a:ea typeface="Noto Sans KR" pitchFamily="34" charset="-122"/>
-                <a:cs typeface="Noto Sans KR" pitchFamily="34" charset="-120"/>
-              </a:rPr>
-              <a:t>폰트 크기: 본문 24pt, 제목 48pt 이상</a:t>
-            </a:r>
-            <a:endParaRPr lang="en-US" sz="1100" dirty="0"/>
-          </a:p>
-        </p:txBody>
-      </p:sp>
-      <p:sp>
-        <p:nvSpPr>
-          <p:cNvPr id="31" name="Text 23"/>
-          <p:cNvSpPr txBox="1"/>
-          <p:nvPr/>
-        </p:nvSpPr>
-        <p:spPr>
-          <a:xfrm>
-            <a:off x="6539789" y="2840126"/>
-            <a:ext cx="2261311" cy="210312"/>
-          </a:xfrm>
-          <a:prstGeom prst="rect">
-            <a:avLst/>
-          </a:prstGeom>
-          <a:noFill/>
-          <a:ln/>
-        </p:spPr>
-        <p:txBody>
-          <a:bodyPr wrap="square" lIns="0" tIns="0" rIns="0" bIns="0" rtlCol="0" anchor="ctr"/>
-          <a:lstStyle/>
-          <a:p>
-            <a:pPr marL="0" indent="0" algn="l">
-              <a:buNone/>
-            </a:pPr>
-            <a:r>
-              <a:rPr lang="en-US" sz="1100" dirty="0">
-                <a:solidFill>
-                  <a:srgbClr val="E2E8F0"/>
-                </a:solidFill>
-                <a:latin typeface="Noto Sans KR" pitchFamily="34" charset="0"/>
-                <a:ea typeface="Noto Sans KR" pitchFamily="34" charset="-122"/>
-                <a:cs typeface="Noto Sans KR" pitchFamily="34" charset="-120"/>
-              </a:rPr>
-              <a:t>줄 바꿈: 한 줄에 20~30자 이내 유지</a:t>
-            </a:r>
-            <a:endParaRPr lang="en-US" sz="1100" dirty="0"/>
-          </a:p>
-        </p:txBody>
-      </p:sp>
-      <p:sp>
-        <p:nvSpPr>
-          <p:cNvPr id="32" name="Text 24"/>
-          <p:cNvSpPr txBox="1"/>
-          <p:nvPr/>
-        </p:nvSpPr>
-        <p:spPr>
-          <a:xfrm>
-            <a:off x="6539789" y="3133649"/>
-            <a:ext cx="1890065" cy="210312"/>
-          </a:xfrm>
-          <a:prstGeom prst="rect">
-            <a:avLst/>
-          </a:prstGeom>
-          <a:noFill/>
-          <a:ln/>
-        </p:spPr>
-        <p:txBody>
-          <a:bodyPr wrap="square" lIns="0" tIns="0" rIns="0" bIns="0" rtlCol="0" anchor="ctr"/>
-          <a:lstStyle/>
-          <a:p>
-            <a:pPr marL="0" indent="0" algn="l">
-              <a:buNone/>
-            </a:pPr>
-            <a:r>
-              <a:rPr lang="en-US" sz="1100" dirty="0">
-                <a:solidFill>
-                  <a:srgbClr val="E2E8F0"/>
-                </a:solidFill>
-                <a:latin typeface="Noto Sans KR" pitchFamily="34" charset="0"/>
-                <a:ea typeface="Noto Sans KR" pitchFamily="34" charset="-122"/>
-                <a:cs typeface="Noto Sans KR" pitchFamily="34" charset="-120"/>
-              </a:rPr>
-              <a:t>행간(Line-height): 1.3 ~ 1.5</a:t>
-            </a:r>
-            <a:endParaRPr lang="en-US" sz="1100" dirty="0"/>
-          </a:p>
-        </p:txBody>
-      </p:sp>
-      <p:sp>
-        <p:nvSpPr>
-          <p:cNvPr id="33" name="Shape 25"/>
-          <p:cNvSpPr/>
-          <p:nvPr/>
-        </p:nvSpPr>
-        <p:spPr>
-          <a:xfrm>
-            <a:off x="10224821" y="3137306"/>
-            <a:ext cx="657454" cy="209398"/>
-          </a:xfrm>
-          <a:prstGeom prst="roundRect">
-            <a:avLst>
-              <a:gd name="adj" fmla="val 79396"/>
-            </a:avLst>
-          </a:prstGeom>
-          <a:solidFill>
-            <a:srgbClr val="3B82F6">
-              <a:alpha val="20000"/>
-            </a:srgbClr>
-          </a:solidFill>
-          <a:ln/>
-        </p:spPr>
-        <p:txBody>
-          <a:bodyPr/>
-          <a:lstStyle/>
-          <a:p>
-            <a:endParaRPr lang="ko-KR" altLang="en-US"/>
-          </a:p>
-        </p:txBody>
-      </p:sp>
-      <p:sp>
-        <p:nvSpPr>
-          <p:cNvPr id="34" name="Text 26"/>
-          <p:cNvSpPr txBox="1"/>
-          <p:nvPr/>
-        </p:nvSpPr>
-        <p:spPr>
-          <a:xfrm>
-            <a:off x="10300716" y="3156509"/>
-            <a:ext cx="590702" cy="162763"/>
-          </a:xfrm>
-          <a:prstGeom prst="rect">
-            <a:avLst/>
-          </a:prstGeom>
-          <a:noFill/>
-          <a:ln/>
-        </p:spPr>
-        <p:txBody>
-          <a:bodyPr wrap="square" lIns="0" tIns="0" rIns="0" bIns="0" rtlCol="0" anchor="ctr"/>
-          <a:lstStyle/>
-          <a:p>
-            <a:pPr marL="0" indent="0" algn="l">
-              <a:buNone/>
-            </a:pPr>
-            <a:r>
-              <a:rPr lang="en-US" sz="900" b="1" dirty="0">
-                <a:solidFill>
-                  <a:srgbClr val="93C5FD"/>
-                </a:solidFill>
-                <a:latin typeface="Noto Sans KR" pitchFamily="34" charset="0"/>
-                <a:ea typeface="Noto Sans KR" pitchFamily="34" charset="-122"/>
-                <a:cs typeface="Noto Sans KR" pitchFamily="34" charset="-120"/>
-              </a:rPr>
-              <a:t>Essential</a:t>
-            </a:r>
-            <a:endParaRPr lang="en-US" sz="900" dirty="0"/>
-          </a:p>
-        </p:txBody>
-      </p:sp>
-      <p:pic>
-        <p:nvPicPr>
-          <p:cNvPr id="35" name="Image 6" descr="preencoded.png"/>
-          <p:cNvPicPr>
-            <a:picLocks noChangeAspect="1"/>
-          </p:cNvPicPr>
-          <p:nvPr/>
-        </p:nvPicPr>
-        <p:blipFill>
-          <a:blip r:embed="rId9"/>
-          <a:srcRect t="-2725" b="-2725"/>
-          <a:stretch/>
-        </p:blipFill>
-        <p:spPr>
-          <a:xfrm>
-            <a:off x="6143854" y="3743554"/>
-            <a:ext cx="142646" cy="171907"/>
-          </a:xfrm>
-          <a:prstGeom prst="rect">
-            <a:avLst/>
-          </a:prstGeom>
-        </p:spPr>
-      </p:pic>
-      <p:sp>
-        <p:nvSpPr>
-          <p:cNvPr id="36" name="Text 27"/>
-          <p:cNvSpPr txBox="1"/>
-          <p:nvPr/>
-        </p:nvSpPr>
-        <p:spPr>
-          <a:xfrm>
-            <a:off x="6381598" y="3703320"/>
-            <a:ext cx="1497787" cy="257861"/>
-          </a:xfrm>
-          <a:prstGeom prst="rect">
-            <a:avLst/>
-          </a:prstGeom>
-          <a:noFill/>
-          <a:ln/>
-        </p:spPr>
-        <p:txBody>
-          <a:bodyPr wrap="square" lIns="0" tIns="0" rIns="0" bIns="0" rtlCol="0" anchor="ctr"/>
-          <a:lstStyle/>
-          <a:p>
-            <a:pPr marL="0" indent="0" algn="l">
-              <a:buNone/>
-            </a:pPr>
-            <a:r>
-              <a:rPr lang="en-US" sz="1300" b="1" dirty="0">
-                <a:solidFill>
-                  <a:srgbClr val="60A5FA"/>
-                </a:solidFill>
-                <a:latin typeface="Noto Sans KR" pitchFamily="34" charset="0"/>
-                <a:ea typeface="Noto Sans KR" pitchFamily="34" charset="-122"/>
-                <a:cs typeface="Noto Sans KR" pitchFamily="34" charset="-120"/>
-              </a:rPr>
-              <a:t>레이아웃 (Layout)</a:t>
-            </a:r>
-            <a:endParaRPr lang="en-US" sz="1300" dirty="0"/>
-          </a:p>
-        </p:txBody>
-      </p:sp>
-      <p:sp>
-        <p:nvSpPr>
-          <p:cNvPr id="37" name="Shape 28"/>
-          <p:cNvSpPr/>
-          <p:nvPr/>
-        </p:nvSpPr>
-        <p:spPr>
-          <a:xfrm>
-            <a:off x="6143854" y="4049878"/>
-            <a:ext cx="4895698" cy="838505"/>
-          </a:xfrm>
-          <a:prstGeom prst="roundRect">
-            <a:avLst>
-              <a:gd name="adj" fmla="val 14871"/>
-            </a:avLst>
-          </a:prstGeom>
-          <a:solidFill>
-            <a:srgbClr val="0F172A">
-              <a:alpha val="60000"/>
-            </a:srgbClr>
-          </a:solidFill>
-          <a:ln w="12700">
-            <a:solidFill>
-              <a:srgbClr val="FFFFFF">
-                <a:alpha val="5000"/>
-              </a:srgbClr>
-            </a:solidFill>
-            <a:prstDash val="solid"/>
-          </a:ln>
-        </p:spPr>
-        <p:txBody>
-          <a:bodyPr/>
-          <a:lstStyle/>
-          <a:p>
-            <a:endParaRPr lang="ko-KR" altLang="en-US"/>
-          </a:p>
-        </p:txBody>
-      </p:sp>
-      <p:sp>
-        <p:nvSpPr>
-          <p:cNvPr id="38" name="Text 29"/>
-          <p:cNvSpPr txBox="1"/>
-          <p:nvPr/>
-        </p:nvSpPr>
-        <p:spPr>
-          <a:xfrm>
-            <a:off x="6539789" y="4211726"/>
-            <a:ext cx="2661818" cy="210312"/>
-          </a:xfrm>
-          <a:prstGeom prst="rect">
-            <a:avLst/>
-          </a:prstGeom>
-          <a:noFill/>
-          <a:ln/>
-        </p:spPr>
-        <p:txBody>
-          <a:bodyPr wrap="square" lIns="0" tIns="0" rIns="0" bIns="0" rtlCol="0" anchor="ctr"/>
-          <a:lstStyle/>
-          <a:p>
-            <a:pPr marL="0" indent="0" algn="l">
-              <a:buNone/>
-            </a:pPr>
-            <a:r>
-              <a:rPr lang="en-US" sz="1100" dirty="0">
-                <a:solidFill>
-                  <a:srgbClr val="E2E8F0"/>
-                </a:solidFill>
-                <a:latin typeface="Noto Sans KR" pitchFamily="34" charset="0"/>
-                <a:ea typeface="Noto Sans KR" pitchFamily="34" charset="-122"/>
-                <a:cs typeface="Noto Sans KR" pitchFamily="34" charset="-120"/>
-              </a:rPr>
-              <a:t>안전 여백(Safe Area) 상하좌우 48px 이상</a:t>
-            </a:r>
-            <a:endParaRPr lang="en-US" sz="1100" dirty="0"/>
-          </a:p>
-        </p:txBody>
-      </p:sp>
-      <p:sp>
-        <p:nvSpPr>
-          <p:cNvPr id="39" name="Text 30"/>
-          <p:cNvSpPr txBox="1"/>
-          <p:nvPr/>
-        </p:nvSpPr>
-        <p:spPr>
-          <a:xfrm>
-            <a:off x="6539789" y="4505249"/>
-            <a:ext cx="2489911" cy="210312"/>
-          </a:xfrm>
-          <a:prstGeom prst="rect">
-            <a:avLst/>
-          </a:prstGeom>
-          <a:noFill/>
-          <a:ln/>
-        </p:spPr>
-        <p:txBody>
-          <a:bodyPr wrap="square" lIns="0" tIns="0" rIns="0" bIns="0" rtlCol="0" anchor="ctr"/>
-          <a:lstStyle/>
-          <a:p>
-            <a:pPr marL="0" indent="0" algn="l">
-              <a:buNone/>
-            </a:pPr>
-            <a:r>
-              <a:rPr lang="en-US" sz="1100" dirty="0">
-                <a:solidFill>
-                  <a:srgbClr val="E2E8F0"/>
-                </a:solidFill>
-                <a:latin typeface="Noto Sans KR" pitchFamily="34" charset="0"/>
-                <a:ea typeface="Noto Sans KR" pitchFamily="34" charset="-122"/>
-                <a:cs typeface="Noto Sans KR" pitchFamily="34" charset="-120"/>
-              </a:rPr>
-              <a:t>정렬: 좌측 정렬 기본 (중앙 정렬 최소화)</a:t>
-            </a:r>
-            <a:endParaRPr lang="en-US" sz="1100" dirty="0"/>
-          </a:p>
-        </p:txBody>
-      </p:sp>
-      <p:pic>
-        <p:nvPicPr>
-          <p:cNvPr id="40" name="Image 7" descr="preencoded.png"/>
-          <p:cNvPicPr>
-            <a:picLocks noChangeAspect="1"/>
-          </p:cNvPicPr>
-          <p:nvPr/>
-        </p:nvPicPr>
-        <p:blipFill>
-          <a:blip r:embed="rId10"/>
-          <a:srcRect/>
-          <a:stretch/>
-        </p:blipFill>
-        <p:spPr>
-          <a:xfrm>
-            <a:off x="6143854" y="5115154"/>
-            <a:ext cx="171907" cy="171907"/>
-          </a:xfrm>
-          <a:prstGeom prst="rect">
-            <a:avLst/>
-          </a:prstGeom>
-        </p:spPr>
-      </p:pic>
-      <p:sp>
-        <p:nvSpPr>
-          <p:cNvPr id="41" name="Text 31"/>
-          <p:cNvSpPr txBox="1"/>
-          <p:nvPr/>
-        </p:nvSpPr>
-        <p:spPr>
-          <a:xfrm>
-            <a:off x="6409944" y="5074920"/>
-            <a:ext cx="1260043" cy="257861"/>
-          </a:xfrm>
-          <a:prstGeom prst="rect">
-            <a:avLst/>
-          </a:prstGeom>
-          <a:noFill/>
-          <a:ln/>
-        </p:spPr>
-        <p:txBody>
-          <a:bodyPr wrap="square" lIns="0" tIns="0" rIns="0" bIns="0" rtlCol="0" anchor="ctr"/>
-          <a:lstStyle/>
-          <a:p>
-            <a:pPr marL="0" indent="0" algn="l">
-              <a:buNone/>
-            </a:pPr>
-            <a:r>
-              <a:rPr lang="en-US" sz="1300" b="1" dirty="0">
-                <a:solidFill>
-                  <a:srgbClr val="60A5FA"/>
-                </a:solidFill>
-                <a:latin typeface="Noto Sans KR" pitchFamily="34" charset="0"/>
-                <a:ea typeface="Noto Sans KR" pitchFamily="34" charset="-122"/>
-                <a:cs typeface="Noto Sans KR" pitchFamily="34" charset="-120"/>
-              </a:rPr>
-              <a:t>비주얼 (Visual)</a:t>
-            </a:r>
-            <a:endParaRPr lang="en-US" sz="1300" dirty="0"/>
-          </a:p>
-        </p:txBody>
-      </p:sp>
-      <p:sp>
-        <p:nvSpPr>
-          <p:cNvPr id="42" name="Shape 32"/>
-          <p:cNvSpPr/>
-          <p:nvPr/>
-        </p:nvSpPr>
-        <p:spPr>
-          <a:xfrm>
-            <a:off x="6143854" y="5421478"/>
-            <a:ext cx="4895698" cy="838505"/>
-          </a:xfrm>
-          <a:prstGeom prst="roundRect">
-            <a:avLst>
-              <a:gd name="adj" fmla="val 14871"/>
-            </a:avLst>
-          </a:prstGeom>
-          <a:solidFill>
-            <a:srgbClr val="0F172A">
-              <a:alpha val="60000"/>
-            </a:srgbClr>
-          </a:solidFill>
-          <a:ln w="12700">
-            <a:solidFill>
-              <a:srgbClr val="FFFFFF">
-                <a:alpha val="5000"/>
-              </a:srgbClr>
-            </a:solidFill>
-            <a:prstDash val="solid"/>
-          </a:ln>
-        </p:spPr>
-        <p:txBody>
-          <a:bodyPr/>
-          <a:lstStyle/>
-          <a:p>
-            <a:endParaRPr lang="ko-KR" altLang="en-US"/>
-          </a:p>
-        </p:txBody>
-      </p:sp>
-      <p:sp>
-        <p:nvSpPr>
-          <p:cNvPr id="43" name="Text 33"/>
-          <p:cNvSpPr txBox="1"/>
-          <p:nvPr/>
-        </p:nvSpPr>
-        <p:spPr>
-          <a:xfrm>
-            <a:off x="6539789" y="5583326"/>
-            <a:ext cx="2271370" cy="210312"/>
-          </a:xfrm>
-          <a:prstGeom prst="rect">
-            <a:avLst/>
-          </a:prstGeom>
-          <a:noFill/>
-          <a:ln/>
-        </p:spPr>
-        <p:txBody>
-          <a:bodyPr wrap="square" lIns="0" tIns="0" rIns="0" bIns="0" rtlCol="0" anchor="ctr"/>
-          <a:lstStyle/>
-          <a:p>
-            <a:pPr marL="0" indent="0" algn="l">
-              <a:buNone/>
-            </a:pPr>
-            <a:r>
-              <a:rPr lang="en-US" sz="1100" dirty="0">
-                <a:solidFill>
-                  <a:srgbClr val="E2E8F0"/>
-                </a:solidFill>
-                <a:latin typeface="Noto Sans KR" pitchFamily="34" charset="0"/>
-                <a:ea typeface="Noto Sans KR" pitchFamily="34" charset="-122"/>
-                <a:cs typeface="Noto Sans KR" pitchFamily="34" charset="-120"/>
-              </a:rPr>
-              <a:t>명도 대비: 배경과 텍스트 4.5:1 이상</a:t>
-            </a:r>
-            <a:endParaRPr lang="en-US" sz="1100" dirty="0"/>
-          </a:p>
-        </p:txBody>
-      </p:sp>
-      <p:sp>
-        <p:nvSpPr>
-          <p:cNvPr id="44" name="Text 34"/>
-          <p:cNvSpPr txBox="1"/>
-          <p:nvPr/>
-        </p:nvSpPr>
-        <p:spPr>
-          <a:xfrm>
-            <a:off x="6539789" y="5876849"/>
-            <a:ext cx="2537460" cy="210312"/>
-          </a:xfrm>
-          <a:prstGeom prst="rect">
-            <a:avLst/>
-          </a:prstGeom>
-          <a:noFill/>
-          <a:ln/>
-        </p:spPr>
-        <p:txBody>
-          <a:bodyPr wrap="square" lIns="0" tIns="0" rIns="0" bIns="0" rtlCol="0" anchor="ctr"/>
-          <a:lstStyle/>
-          <a:p>
-            <a:pPr marL="0" indent="0" algn="l">
-              <a:buNone/>
-            </a:pPr>
-            <a:r>
-              <a:rPr lang="en-US" sz="1100" dirty="0">
-                <a:solidFill>
-                  <a:srgbClr val="E2E8F0"/>
-                </a:solidFill>
-                <a:latin typeface="Noto Sans KR" pitchFamily="34" charset="0"/>
-                <a:ea typeface="Noto Sans KR" pitchFamily="34" charset="-122"/>
-                <a:cs typeface="Noto Sans KR" pitchFamily="34" charset="-120"/>
-              </a:rPr>
-              <a:t>강조: Bold와 포인트 컬러로 핵심만 강조</a:t>
-            </a:r>
-            <a:endParaRPr lang="en-US" sz="1100" dirty="0"/>
-          </a:p>
-        </p:txBody>
-      </p:sp>
-      <p:sp>
-        <p:nvSpPr>
-          <p:cNvPr id="45" name="deckgen:wrap:footer"/>
-          <p:cNvSpPr txBox="1"/>
-          <p:nvPr/>
-        </p:nvSpPr>
-        <p:spPr>
-          <a:xfrm>
-            <a:off x="365760" y="6549390"/>
-            <a:ext cx="11460480" cy="240030"/>
-          </a:xfrm>
-          <a:prstGeom prst="rect">
-            <a:avLst/>
-          </a:prstGeom>
-          <a:noFill/>
-        </p:spPr>
-        <p:txBody>
-          <a:bodyPr wrap="square" anchor="b" lIns="0" rIns="0" tIns="0" bIns="0">
-            <a:spAutoFit/>
-          </a:bodyPr>
-          <a:lstStyle/>
-          <a:p>
-            <a:pPr algn="r">
-              <a:lnSpc>
-                <a:spcPct val="125000"/>
-              </a:lnSpc>
-            </a:pPr>
-            <a:r>
-              <a:rPr sz="900" b="0">
-                <a:solidFill>
-                  <a:srgbClr val="8A8F99"/>
-                </a:solidFill>
-                <a:latin typeface="Pretendard"/>
-              </a:rPr>
-              <a:t>© 2026 이애본(드림아이티비즈) · useful-ai.dreamitbiz.com · 교육 목적 비영리 이용 · 출처 표기</a:t>
-            </a:r>
-          </a:p>
-        </p:txBody>
-      </p:sp>
-    </p:spTree>
-  </p:cSld>
-  <p:clrMapOvr>
-    <a:masterClrMapping/>
-  </p:clrMapOvr>
-</p:sld>
-</file>
-
-<file path=ppt/slides/slide19.xml><?xml version="1.0" encoding="utf-8"?>
 <p:sld xmlns:a="http://schemas.openxmlformats.org/drawingml/2006/main" xmlns:r="http://schemas.openxmlformats.org/officeDocument/2006/relationships" xmlns:p="http://schemas.openxmlformats.org/presentationml/2006/main">
   <p:cSld name="Slide 18">
     <p:spTree>
@@ -18399,37 +16106,6 @@
       </p:pic>
       <p:sp>
         <p:nvSpPr>
-          <p:cNvPr id="25" name="Shape 17"/>
-          <p:cNvSpPr/>
-          <p:nvPr/>
-        </p:nvSpPr>
-        <p:spPr>
-          <a:xfrm>
-            <a:off x="9799625" y="4608576"/>
-            <a:ext cx="476402" cy="228600"/>
-          </a:xfrm>
-          <a:prstGeom prst="roundRect">
-            <a:avLst>
-              <a:gd name="adj" fmla="val 66667"/>
-            </a:avLst>
-          </a:prstGeom>
-          <a:solidFill>
-            <a:srgbClr val="064E3B">
-              <a:alpha val="40000"/>
-            </a:srgbClr>
-          </a:solidFill>
-          <a:ln/>
-        </p:spPr>
-        <p:txBody>
-          <a:bodyPr/>
-          <a:lstStyle/>
-          <a:p>
-            <a:endParaRPr lang="ko-KR" altLang="en-US"/>
-          </a:p>
-        </p:txBody>
-      </p:sp>
-      <p:sp>
-        <p:nvSpPr>
           <p:cNvPr id="26" name="Text 18"/>
           <p:cNvSpPr txBox="1"/>
           <p:nvPr/>
@@ -18759,84 +16435,6 @@
               <a:t>Q&amp;A Session</a:t>
             </a:r>
             <a:endParaRPr lang="en-US" sz="1300" dirty="0"/>
-          </a:p>
-        </p:txBody>
-      </p:sp>
-      <p:sp>
-        <p:nvSpPr>
-          <p:cNvPr id="34" name="Text 26"/>
-          <p:cNvSpPr txBox="1"/>
-          <p:nvPr/>
-        </p:nvSpPr>
-        <p:spPr>
-          <a:xfrm>
-            <a:off x="9875520" y="4636922"/>
-            <a:ext cx="409651" cy="162763"/>
-          </a:xfrm>
-          <a:prstGeom prst="rect">
-            <a:avLst/>
-          </a:prstGeom>
-          <a:noFill/>
-          <a:ln/>
-        </p:spPr>
-        <p:txBody>
-          <a:bodyPr wrap="square" lIns="0" tIns="0" rIns="0" bIns="0" rtlCol="0" anchor="ctr"/>
-          <a:lstStyle/>
-          <a:p>
-            <a:pPr marL="0" indent="0" algn="l">
-              <a:buNone/>
-            </a:pPr>
-            <a:r>
-              <a:rPr lang="en-US" sz="900" b="1" dirty="0">
-                <a:solidFill>
-                  <a:srgbClr val="34D399"/>
-                </a:solidFill>
-                <a:latin typeface="Noto Sans KR" pitchFamily="34" charset="0"/>
-                <a:ea typeface="Noto Sans KR" pitchFamily="34" charset="-122"/>
-                <a:cs typeface="Noto Sans KR" pitchFamily="34" charset="-120"/>
-              </a:rPr>
-              <a:t>5 MIN</a:t>
-            </a:r>
-            <a:endParaRPr lang="en-US" sz="900" dirty="0"/>
-          </a:p>
-        </p:txBody>
-      </p:sp>
-      <p:sp>
-        <p:nvSpPr>
-          <p:cNvPr id="35" name="Text 27"/>
-          <p:cNvSpPr txBox="1"/>
-          <p:nvPr/>
-        </p:nvSpPr>
-        <p:spPr>
-          <a:xfrm>
-            <a:off x="6590995" y="4920386"/>
-            <a:ext cx="2442362" cy="210312"/>
-          </a:xfrm>
-          <a:prstGeom prst="rect">
-            <a:avLst/>
-          </a:prstGeom>
-          <a:noFill/>
-          <a:ln/>
-        </p:spPr>
-        <p:txBody>
-          <a:bodyPr wrap="square" lIns="0" tIns="0" rIns="0" bIns="0" rtlCol="0" anchor="ctr"/>
-          <a:lstStyle/>
-          <a:p>
-            <a:pPr marL="0" indent="0" algn="l">
-              <a:buNone/>
-            </a:pPr>
-            <a:r>
-              <a:rPr lang="en-US" sz="1100" dirty="0">
-                <a:solidFill>
-                  <a:srgbClr val="94A3B8"/>
-                </a:solidFill>
-                <a:latin typeface="Noto Sans KR" pitchFamily="34" charset="0"/>
-                <a:ea typeface="Noto Sans KR" pitchFamily="34" charset="-122"/>
-                <a:cs typeface="Noto Sans KR" pitchFamily="34" charset="-120"/>
-              </a:rPr>
-              <a:t>궁금한 점이 있다면 지금 질문해주세요.</a:t>
-            </a:r>
-            <a:endParaRPr lang="en-US" sz="1100" dirty="0"/>
           </a:p>
         </p:txBody>
       </p:sp>
@@ -18915,7 +16513,389 @@
                 </a:solidFill>
                 <a:latin typeface="Pretendard"/>
               </a:rPr>
-              <a:t>© 2026 이애본(드림아이티비즈) · useful-ai.dreamitbiz.com · 교육 목적 비영리 이용 · 출처 표기</a:t>
+              <a:t>© 2026 이애본 · 홍문원(洪文院) 발행 · CC BY-NC-ND 4.0 · useful-ai.dreamitbiz.com</a:t>
+            </a:r>
+          </a:p>
+        </p:txBody>
+      </p:sp>
+    </p:spTree>
+  </p:cSld>
+  <p:clrMapOvr>
+    <a:masterClrMapping/>
+  </p:clrMapOvr>
+</p:sld>
+</file>
+
+<file path=ppt/slides/slide19.xml><?xml version="1.0" encoding="utf-8"?>
+<p:sld xmlns:a="http://schemas.openxmlformats.org/drawingml/2006/main" xmlns:p="http://schemas.openxmlformats.org/presentationml/2006/main" xmlns:r="http://schemas.openxmlformats.org/officeDocument/2006/relationships">
+  <p:cSld>
+    <p:spTree>
+      <p:nvGrpSpPr>
+        <p:cNvPr id="1" name=""/>
+        <p:cNvGrpSpPr/>
+        <p:nvPr/>
+      </p:nvGrpSpPr>
+      <p:grpSpPr/>
+      <p:sp>
+        <p:nvSpPr>
+          <p:cNvPr id="2" name="deckgen:wrap:bg"/>
+          <p:cNvSpPr/>
+          <p:nvPr/>
+        </p:nvSpPr>
+        <p:spPr>
+          <a:xfrm>
+            <a:off x="0" y="0"/>
+            <a:ext cx="12192000" cy="6858000"/>
+          </a:xfrm>
+          <a:prstGeom prst="rect">
+            <a:avLst/>
+          </a:prstGeom>
+          <a:solidFill>
+            <a:srgbClr val="FFFFFF"/>
+          </a:solidFill>
+          <a:ln>
+            <a:noFill/>
+          </a:ln>
+          <a:effectLst/>
+        </p:spPr>
+        <p:style>
+          <a:lnRef idx="1">
+            <a:schemeClr val="accent1"/>
+          </a:lnRef>
+          <a:fillRef idx="3">
+            <a:schemeClr val="accent1"/>
+          </a:fillRef>
+          <a:effectRef idx="2">
+            <a:schemeClr val="accent1"/>
+          </a:effectRef>
+          <a:fontRef idx="minor">
+            <a:schemeClr val="lt1"/>
+          </a:fontRef>
+        </p:style>
+        <p:txBody>
+          <a:bodyPr rtlCol="0" anchor="ctr"/>
+          <a:lstStyle/>
+          <a:p>
+            <a:pPr algn="ctr"/>
+          </a:p>
+        </p:txBody>
+      </p:sp>
+      <p:sp>
+        <p:nvSpPr>
+          <p:cNvPr id="3" name="deckgen:wrap:side"/>
+          <p:cNvSpPr/>
+          <p:nvPr/>
+        </p:nvSpPr>
+        <p:spPr>
+          <a:xfrm>
+            <a:off x="0" y="0"/>
+            <a:ext cx="146304" cy="6858000"/>
+          </a:xfrm>
+          <a:prstGeom prst="rect">
+            <a:avLst/>
+          </a:prstGeom>
+          <a:solidFill>
+            <a:srgbClr val="0072CE"/>
+          </a:solidFill>
+          <a:ln>
+            <a:noFill/>
+          </a:ln>
+          <a:effectLst/>
+        </p:spPr>
+        <p:style>
+          <a:lnRef idx="1">
+            <a:schemeClr val="accent1"/>
+          </a:lnRef>
+          <a:fillRef idx="3">
+            <a:schemeClr val="accent1"/>
+          </a:fillRef>
+          <a:effectRef idx="2">
+            <a:schemeClr val="accent1"/>
+          </a:effectRef>
+          <a:fontRef idx="minor">
+            <a:schemeClr val="lt1"/>
+          </a:fontRef>
+        </p:style>
+        <p:txBody>
+          <a:bodyPr rtlCol="0" anchor="ctr"/>
+          <a:lstStyle/>
+          <a:p>
+            <a:pPr algn="ctr"/>
+          </a:p>
+        </p:txBody>
+      </p:sp>
+      <p:sp>
+        <p:nvSpPr>
+          <p:cNvPr id="4" name="deckgen:wrap:rule"/>
+          <p:cNvSpPr/>
+          <p:nvPr/>
+        </p:nvSpPr>
+        <p:spPr>
+          <a:xfrm>
+            <a:off x="853440" y="2057400"/>
+            <a:ext cx="975360" cy="38100"/>
+          </a:xfrm>
+          <a:prstGeom prst="rect">
+            <a:avLst/>
+          </a:prstGeom>
+          <a:solidFill>
+            <a:srgbClr val="0072CE"/>
+          </a:solidFill>
+          <a:ln>
+            <a:noFill/>
+          </a:ln>
+          <a:effectLst/>
+        </p:spPr>
+        <p:style>
+          <a:lnRef idx="1">
+            <a:schemeClr val="accent1"/>
+          </a:lnRef>
+          <a:fillRef idx="3">
+            <a:schemeClr val="accent1"/>
+          </a:fillRef>
+          <a:effectRef idx="2">
+            <a:schemeClr val="accent1"/>
+          </a:effectRef>
+          <a:fontRef idx="minor">
+            <a:schemeClr val="lt1"/>
+          </a:fontRef>
+        </p:style>
+        <p:txBody>
+          <a:bodyPr rtlCol="0" anchor="ctr"/>
+          <a:lstStyle/>
+          <a:p>
+            <a:pPr algn="ctr"/>
+          </a:p>
+        </p:txBody>
+      </p:sp>
+      <p:sp>
+        <p:nvSpPr>
+          <p:cNvPr id="5" name="deckgen:wrap:eyebrow"/>
+          <p:cNvSpPr txBox="1"/>
+          <p:nvPr/>
+        </p:nvSpPr>
+        <p:spPr>
+          <a:xfrm>
+            <a:off x="853440" y="1165860"/>
+            <a:ext cx="10485120" cy="342900"/>
+          </a:xfrm>
+          <a:prstGeom prst="rect">
+            <a:avLst/>
+          </a:prstGeom>
+          <a:noFill/>
+        </p:spPr>
+        <p:txBody>
+          <a:bodyPr wrap="square" anchor="t" lIns="0" rIns="0" tIns="0" bIns="0">
+            <a:spAutoFit/>
+          </a:bodyPr>
+          <a:lstStyle/>
+          <a:p>
+            <a:pPr algn="l">
+              <a:lnSpc>
+                <a:spcPct val="125000"/>
+              </a:lnSpc>
+            </a:pPr>
+            <a:r>
+              <a:rPr sz="1200" b="1">
+                <a:solidFill>
+                  <a:srgbClr val="0072CE"/>
+                </a:solidFill>
+                <a:latin typeface="Pretendard"/>
+              </a:rPr>
+              <a:t>HOW TO USE</a:t>
+            </a:r>
+          </a:p>
+        </p:txBody>
+      </p:sp>
+      <p:sp>
+        <p:nvSpPr>
+          <p:cNvPr id="6" name="deckgen:wrap:title"/>
+          <p:cNvSpPr txBox="1"/>
+          <p:nvPr/>
+        </p:nvSpPr>
+        <p:spPr>
+          <a:xfrm>
+            <a:off x="853440" y="1440180"/>
+            <a:ext cx="10485120" cy="617220"/>
+          </a:xfrm>
+          <a:prstGeom prst="rect">
+            <a:avLst/>
+          </a:prstGeom>
+          <a:noFill/>
+        </p:spPr>
+        <p:txBody>
+          <a:bodyPr wrap="square" anchor="t" lIns="0" rIns="0" tIns="0" bIns="0">
+            <a:spAutoFit/>
+          </a:bodyPr>
+          <a:lstStyle/>
+          <a:p>
+            <a:pPr algn="l">
+              <a:lnSpc>
+                <a:spcPct val="125000"/>
+              </a:lnSpc>
+            </a:pPr>
+            <a:r>
+              <a:rPr sz="3000" b="1">
+                <a:solidFill>
+                  <a:srgbClr val="1A2A5E"/>
+                </a:solidFill>
+                <a:latin typeface="Pretendard"/>
+              </a:rPr>
+              <a:t>이 자료 사용 방법</a:t>
+            </a:r>
+          </a:p>
+        </p:txBody>
+      </p:sp>
+      <p:sp>
+        <p:nvSpPr>
+          <p:cNvPr id="7" name="deckgen:wrap:body"/>
+          <p:cNvSpPr txBox="1"/>
+          <p:nvPr/>
+        </p:nvSpPr>
+        <p:spPr>
+          <a:xfrm>
+            <a:off x="853440" y="2400300"/>
+            <a:ext cx="10485120" cy="3566160"/>
+          </a:xfrm>
+          <a:prstGeom prst="rect">
+            <a:avLst/>
+          </a:prstGeom>
+          <a:noFill/>
+        </p:spPr>
+        <p:txBody>
+          <a:bodyPr wrap="square" anchor="t" lIns="0" rIns="0" tIns="0" bIns="0">
+            <a:spAutoFit/>
+          </a:bodyPr>
+          <a:lstStyle/>
+          <a:p>
+            <a:pPr algn="l">
+              <a:lnSpc>
+                <a:spcPct val="130000"/>
+              </a:lnSpc>
+            </a:pPr>
+            <a:r>
+              <a:rPr sz="1500" b="0">
+                <a:solidFill>
+                  <a:srgbClr val="333333"/>
+                </a:solidFill>
+                <a:latin typeface="Pretendard"/>
+              </a:rPr>
+              <a:t>1.  수업·강의·자습에 그대로 쓰셔도 됩니다. 출처만 남겨 주세요.</a:t>
+            </a:r>
+          </a:p>
+          <a:p>
+            <a:pPr algn="l">
+              <a:lnSpc>
+                <a:spcPct val="130000"/>
+              </a:lnSpc>
+              <a:spcBef>
+                <a:spcPts val="900"/>
+              </a:spcBef>
+            </a:pPr>
+            <a:r>
+              <a:rPr sz="1500" b="0">
+                <a:solidFill>
+                  <a:srgbClr val="333333"/>
+                </a:solidFill>
+                <a:latin typeface="Pretendard"/>
+              </a:rPr>
+              <a:t>2.  PDF 는 화면으로 읽는 용도, PPTX 는 발표용입니다. PPTX 는 Pretendard 글꼴이 설치된 컴퓨터에서 가장 똑같이 보입니다.</a:t>
+            </a:r>
+          </a:p>
+          <a:p>
+            <a:pPr algn="l">
+              <a:lnSpc>
+                <a:spcPct val="130000"/>
+              </a:lnSpc>
+              <a:spcBef>
+                <a:spcPts val="900"/>
+              </a:spcBef>
+            </a:pPr>
+            <a:r>
+              <a:rPr sz="1500" b="0">
+                <a:solidFill>
+                  <a:srgbClr val="333333"/>
+                </a:solidFill>
+                <a:latin typeface="Pretendard"/>
+              </a:rPr>
+              <a:t>3.  출처 표기 예: 이애본(드림아이티비즈), 「자료 제목」, 홍문원, useful-ai.dreamitbiz.com, CC BY-NC-ND 4.0</a:t>
+            </a:r>
+          </a:p>
+          <a:p>
+            <a:pPr algn="l">
+              <a:lnSpc>
+                <a:spcPct val="130000"/>
+              </a:lnSpc>
+              <a:spcBef>
+                <a:spcPts val="900"/>
+              </a:spcBef>
+            </a:pPr>
+            <a:r>
+              <a:rPr sz="1500" b="0">
+                <a:solidFill>
+                  <a:srgbClr val="333333"/>
+                </a:solidFill>
+                <a:latin typeface="Pretendard"/>
+              </a:rPr>
+              <a:t>4.  자료 안의 프롬프트는 복사해 바로 쓸 수 있습니다. [대괄호]만 내 상황으로 바꾸세요.</a:t>
+            </a:r>
+          </a:p>
+          <a:p>
+            <a:pPr algn="l">
+              <a:lnSpc>
+                <a:spcPct val="130000"/>
+              </a:lnSpc>
+              <a:spcBef>
+                <a:spcPts val="900"/>
+              </a:spcBef>
+            </a:pPr>
+            <a:r>
+              <a:rPr sz="1500" b="0">
+                <a:solidFill>
+                  <a:srgbClr val="333333"/>
+                </a:solidFill>
+                <a:latin typeface="Pretendard"/>
+              </a:rPr>
+              <a:t>5.  모든 자료와 영상 강의는 useful-ai.dreamitbiz.com 에서 다시 받을 수 있습니다.</a:t>
+            </a:r>
+          </a:p>
+        </p:txBody>
+      </p:sp>
+      <p:sp>
+        <p:nvSpPr>
+          <p:cNvPr id="8" name="deckgen:wrap:footer"/>
+          <p:cNvSpPr txBox="1"/>
+          <p:nvPr/>
+        </p:nvSpPr>
+        <p:spPr>
+          <a:xfrm>
+            <a:off x="853440" y="6240780"/>
+            <a:ext cx="10485120" cy="342900"/>
+          </a:xfrm>
+          <a:prstGeom prst="rect">
+            <a:avLst/>
+          </a:prstGeom>
+          <a:noFill/>
+        </p:spPr>
+        <p:txBody>
+          <a:bodyPr wrap="square" anchor="t" lIns="0" rIns="0" tIns="0" bIns="0">
+            <a:spAutoFit/>
+          </a:bodyPr>
+          <a:lstStyle/>
+          <a:p>
+            <a:pPr algn="r">
+              <a:lnSpc>
+                <a:spcPct val="125000"/>
+              </a:lnSpc>
+            </a:pPr>
+            <a:r>
+              <a:rPr sz="900" b="0">
+                <a:solidFill>
+                  <a:srgbClr val="888888"/>
+                </a:solidFill>
+                <a:latin typeface="Pretendard"/>
+              </a:rPr>
+              <a:t>© 2026 이애본 · 홍문원(洪文院) 발행 · CC BY-NC-ND 4.0 · useful-ai.dreamitbiz.com</a:t>
             </a:r>
           </a:p>
         </p:txBody>
@@ -19220,181 +17200,9 @@
                 <a:ea typeface="Noto Sans KR" pitchFamily="34" charset="-122"/>
                 <a:cs typeface="Noto Sans KR" pitchFamily="34" charset="-120"/>
               </a:rPr>
-              <a:t>타임박스</a:t>
+              <a:t>진행 구성</a:t>
             </a:r>
             <a:endParaRPr lang="en-US" sz="3600" dirty="0"/>
-          </a:p>
-        </p:txBody>
-      </p:sp>
-      <p:sp>
-        <p:nvSpPr>
-          <p:cNvPr id="11" name="Text 8"/>
-          <p:cNvSpPr txBox="1"/>
-          <p:nvPr/>
-        </p:nvSpPr>
-        <p:spPr>
-          <a:xfrm>
-            <a:off x="761695" y="2491740"/>
-            <a:ext cx="814730" cy="247802"/>
-          </a:xfrm>
-          <a:prstGeom prst="rect">
-            <a:avLst/>
-          </a:prstGeom>
-          <a:noFill/>
-          <a:ln/>
-        </p:spPr>
-        <p:txBody>
-          <a:bodyPr wrap="square" lIns="0" tIns="0" rIns="0" bIns="0" rtlCol="0" anchor="ctr"/>
-          <a:lstStyle/>
-          <a:p>
-            <a:pPr marL="0" indent="0" algn="l">
-              <a:buNone/>
-            </a:pPr>
-            <a:r>
-              <a:rPr lang="en-US" sz="1300" dirty="0">
-                <a:solidFill>
-                  <a:srgbClr val="9CA3AF"/>
-                </a:solidFill>
-                <a:latin typeface="Noto Sans KR" pitchFamily="34" charset="0"/>
-                <a:ea typeface="Noto Sans KR" pitchFamily="34" charset="-122"/>
-                <a:cs typeface="Noto Sans KR" pitchFamily="34" charset="-120"/>
-              </a:rPr>
-              <a:t>진행 방식</a:t>
-            </a:r>
-            <a:endParaRPr lang="en-US" sz="1300" dirty="0"/>
-          </a:p>
-        </p:txBody>
-      </p:sp>
-      <p:sp>
-        <p:nvSpPr>
-          <p:cNvPr id="12" name="Text 9"/>
-          <p:cNvSpPr txBox="1"/>
-          <p:nvPr/>
-        </p:nvSpPr>
-        <p:spPr>
-          <a:xfrm>
-            <a:off x="761695" y="2820010"/>
-            <a:ext cx="3915461" cy="590702"/>
-          </a:xfrm>
-          <a:prstGeom prst="rect">
-            <a:avLst/>
-          </a:prstGeom>
-          <a:noFill/>
-          <a:ln/>
-        </p:spPr>
-        <p:txBody>
-          <a:bodyPr wrap="square" lIns="0" tIns="0" rIns="0" bIns="0" rtlCol="0" anchor="ctr"/>
-          <a:lstStyle/>
-          <a:p>
-            <a:pPr marL="0" indent="0" algn="l">
-              <a:buNone/>
-            </a:pPr>
-            <a:r>
-              <a:rPr lang="en-US" sz="1500" dirty="0">
-                <a:solidFill>
-                  <a:srgbClr val="FFFFFF"/>
-                </a:solidFill>
-                <a:latin typeface="Noto Sans KR" pitchFamily="34" charset="0"/>
-                <a:ea typeface="Noto Sans KR" pitchFamily="34" charset="-122"/>
-                <a:cs typeface="Noto Sans KR" pitchFamily="34" charset="-120"/>
-              </a:rPr>
-              <a:t>슬라이드당 3~5분 설명 후 </a:t>
-            </a:r>
-            <a:r>
-              <a:rPr lang="ko-KR" altLang="en-US" sz="1500" dirty="0">
-                <a:solidFill>
-                  <a:srgbClr val="FFFFFF"/>
-                </a:solidFill>
-                <a:latin typeface="Noto Sans KR" pitchFamily="34" charset="0"/>
-                <a:ea typeface="Noto Sans KR" pitchFamily="34" charset="-122"/>
-                <a:cs typeface="Noto Sans KR" pitchFamily="34" charset="-120"/>
-              </a:rPr>
-              <a:t>개별</a:t>
-            </a:r>
-            <a:r>
-              <a:rPr lang="en-US" sz="1500" dirty="0">
-                <a:solidFill>
-                  <a:srgbClr val="FFFFFF"/>
-                </a:solidFill>
-                <a:latin typeface="Noto Sans KR" pitchFamily="34" charset="0"/>
-                <a:ea typeface="Noto Sans KR" pitchFamily="34" charset="-122"/>
-                <a:cs typeface="Noto Sans KR" pitchFamily="34" charset="-120"/>
-              </a:rPr>
-              <a:t> </a:t>
-            </a:r>
-            <a:r>
-              <a:rPr lang="en-US" sz="1500" dirty="0" err="1">
-                <a:solidFill>
-                  <a:srgbClr val="FFFFFF"/>
-                </a:solidFill>
-                <a:latin typeface="Noto Sans KR" pitchFamily="34" charset="0"/>
-                <a:ea typeface="Noto Sans KR" pitchFamily="34" charset="-122"/>
-                <a:cs typeface="Noto Sans KR" pitchFamily="34" charset="-120"/>
-              </a:rPr>
-              <a:t>실습</a:t>
-            </a:r>
-            <a:r>
-              <a:rPr lang="en-US" sz="1500" dirty="0">
-                <a:solidFill>
-                  <a:srgbClr val="FFFFFF"/>
-                </a:solidFill>
-                <a:latin typeface="Noto Sans KR" pitchFamily="34" charset="0"/>
-                <a:ea typeface="Noto Sans KR" pitchFamily="34" charset="-122"/>
-                <a:cs typeface="Noto Sans KR" pitchFamily="34" charset="-120"/>
-              </a:rPr>
-              <a:t> </a:t>
-            </a:r>
-            <a:r>
-              <a:rPr lang="en-US" sz="1500" dirty="0" err="1">
-                <a:solidFill>
-                  <a:srgbClr val="FFFFFF"/>
-                </a:solidFill>
-                <a:latin typeface="Noto Sans KR" pitchFamily="34" charset="0"/>
-                <a:ea typeface="Noto Sans KR" pitchFamily="34" charset="-122"/>
-                <a:cs typeface="Noto Sans KR" pitchFamily="34" charset="-120"/>
-              </a:rPr>
-              <a:t>진행</a:t>
-            </a:r>
-            <a:endParaRPr lang="en-US" sz="1500" dirty="0"/>
-          </a:p>
-        </p:txBody>
-      </p:sp>
-      <p:sp>
-        <p:nvSpPr>
-          <p:cNvPr id="13" name="Text 10"/>
-          <p:cNvSpPr txBox="1"/>
-          <p:nvPr/>
-        </p:nvSpPr>
-        <p:spPr>
-          <a:xfrm>
-            <a:off x="761695" y="3920033"/>
-            <a:ext cx="2110435" cy="247802"/>
-          </a:xfrm>
-          <a:prstGeom prst="rect">
-            <a:avLst/>
-          </a:prstGeom>
-          <a:noFill/>
-          <a:ln/>
-        </p:spPr>
-        <p:txBody>
-          <a:bodyPr wrap="square" lIns="0" tIns="0" rIns="0" bIns="0" rtlCol="0" anchor="ctr"/>
-          <a:lstStyle/>
-          <a:p>
-            <a:pPr marL="0" indent="0" algn="l">
-              <a:buNone/>
-            </a:pPr>
-            <a:r>
-              <a:rPr lang="en-US" sz="1300" dirty="0">
-                <a:solidFill>
-                  <a:srgbClr val="9CA3AF"/>
-                </a:solidFill>
-                <a:latin typeface="Noto Sans KR" pitchFamily="34" charset="0"/>
-                <a:ea typeface="Noto Sans KR" pitchFamily="34" charset="-122"/>
-                <a:cs typeface="Noto Sans KR" pitchFamily="34" charset="-120"/>
-              </a:rPr>
-              <a:t>최종 성과물 (Deliverables)</a:t>
-            </a:r>
-            <a:endParaRPr lang="en-US" sz="1300" dirty="0"/>
           </a:p>
         </p:txBody>
       </p:sp>
@@ -20411,125 +18219,7 @@
       </p:sp>
       <p:sp>
         <p:nvSpPr>
-          <p:cNvPr id="46" name="Text 9">
-            <a:extLst>
-              <a:ext uri="{FF2B5EF4-FFF2-40B4-BE49-F238E27FC236}">
-                <a16:creationId xmlns:a16="http://schemas.microsoft.com/office/drawing/2014/main" id="{26AAA9B6-6A8C-E1C5-D298-F9582DFCE027}"/>
-              </a:ext>
-            </a:extLst>
-          </p:cNvPr>
-          <p:cNvSpPr txBox="1"/>
-          <p:nvPr/>
-        </p:nvSpPr>
-        <p:spPr>
-          <a:xfrm>
-            <a:off x="928689" y="4320540"/>
-            <a:ext cx="3393871" cy="406248"/>
-          </a:xfrm>
-          <a:prstGeom prst="rect">
-            <a:avLst/>
-          </a:prstGeom>
-          <a:noFill/>
-          <a:ln/>
-        </p:spPr>
-        <p:txBody>
-          <a:bodyPr wrap="square" lIns="0" tIns="0" rIns="0" bIns="0" rtlCol="0" anchor="ctr"/>
-          <a:lstStyle/>
-          <a:p>
-            <a:r>
-              <a:rPr lang="ko-KR" altLang="en-US" sz="1400" b="1" dirty="0">
-                <a:solidFill>
-                  <a:srgbClr val="D1D5DB"/>
-                </a:solidFill>
-                <a:latin typeface="Noto Sans KR" pitchFamily="34" charset="0"/>
-                <a:ea typeface="Noto Sans KR" pitchFamily="34" charset="-122"/>
-                <a:cs typeface="Noto Sans KR" pitchFamily="34" charset="-120"/>
-              </a:rPr>
-              <a:t>생성형 </a:t>
-            </a:r>
-            <a:r>
-              <a:rPr lang="en-US" altLang="ko-KR" sz="1400" b="1" dirty="0">
-                <a:solidFill>
-                  <a:srgbClr val="D1D5DB"/>
-                </a:solidFill>
-                <a:latin typeface="Noto Sans KR" pitchFamily="34" charset="0"/>
-                <a:ea typeface="Noto Sans KR" pitchFamily="34" charset="-122"/>
-                <a:cs typeface="Noto Sans KR" pitchFamily="34" charset="-120"/>
-              </a:rPr>
-              <a:t>AI</a:t>
-            </a:r>
-            <a:r>
-              <a:rPr lang="ko-KR" altLang="en-US" sz="1400" b="1" dirty="0">
-                <a:solidFill>
-                  <a:srgbClr val="D1D5DB"/>
-                </a:solidFill>
-                <a:latin typeface="Noto Sans KR" pitchFamily="34" charset="0"/>
-                <a:ea typeface="Noto Sans KR" pitchFamily="34" charset="-122"/>
-                <a:cs typeface="Noto Sans KR" pitchFamily="34" charset="-120"/>
-              </a:rPr>
-              <a:t>와 창의력</a:t>
-            </a:r>
-            <a:r>
-              <a:rPr lang="en-US" altLang="ko-KR" sz="1400" b="1" dirty="0">
-                <a:solidFill>
-                  <a:srgbClr val="D1D5DB"/>
-                </a:solidFill>
-                <a:latin typeface="Noto Sans KR" pitchFamily="34" charset="0"/>
-                <a:ea typeface="Noto Sans KR" pitchFamily="34" charset="-122"/>
-                <a:cs typeface="Noto Sans KR" pitchFamily="34" charset="-120"/>
-              </a:rPr>
-              <a:t>, </a:t>
-            </a:r>
-            <a:r>
-              <a:rPr lang="ko-KR" altLang="en-US" sz="1400" b="1" dirty="0">
-                <a:solidFill>
-                  <a:srgbClr val="D1D5DB"/>
-                </a:solidFill>
-                <a:latin typeface="Noto Sans KR" pitchFamily="34" charset="0"/>
-                <a:ea typeface="Noto Sans KR" pitchFamily="34" charset="-122"/>
-                <a:cs typeface="Noto Sans KR" pitchFamily="34" charset="-120"/>
-              </a:rPr>
-              <a:t>복합문제능력 향상 과정</a:t>
-            </a:r>
-            <a:endParaRPr lang="en-US" altLang="ko-KR" sz="1400" b="1" dirty="0">
-              <a:solidFill>
-                <a:srgbClr val="D1D5DB"/>
-              </a:solidFill>
-              <a:latin typeface="Noto Sans KR" pitchFamily="34" charset="0"/>
-              <a:ea typeface="Noto Sans KR" pitchFamily="34" charset="-122"/>
-              <a:cs typeface="Noto Sans KR" pitchFamily="34" charset="-120"/>
-            </a:endParaRPr>
-          </a:p>
-          <a:p>
-            <a:r>
-              <a:rPr lang="ko-KR" altLang="en-US" sz="1400" b="1" dirty="0">
-                <a:solidFill>
-                  <a:srgbClr val="D1D5DB"/>
-                </a:solidFill>
-                <a:latin typeface="Noto Sans KR" pitchFamily="34" charset="0"/>
-                <a:ea typeface="Noto Sans KR" pitchFamily="34" charset="-122"/>
-                <a:cs typeface="Noto Sans KR" pitchFamily="34" charset="-120"/>
-              </a:rPr>
-              <a:t> </a:t>
-            </a:r>
-            <a:r>
-              <a:rPr lang="en-US" altLang="ko-KR" sz="1400" b="1" dirty="0">
-                <a:solidFill>
-                  <a:srgbClr val="D1D5DB"/>
-                </a:solidFill>
-                <a:latin typeface="Noto Sans KR" pitchFamily="34" charset="0"/>
-                <a:ea typeface="Noto Sans KR" pitchFamily="34" charset="-122"/>
-                <a:cs typeface="Noto Sans KR" pitchFamily="34" charset="-120"/>
-              </a:rPr>
-              <a:t>- https://padlet.com/aebon/create26</a:t>
-            </a:r>
-            <a:endParaRPr lang="en-US" sz="1400" b="1" dirty="0"/>
-          </a:p>
-        </p:txBody>
-      </p:sp>
-      <p:sp>
-        <p:nvSpPr>
-          <p:cNvPr id="47" name="deckgen:wrap:footer"/>
+          <p:cNvPr id="46" name="deckgen:wrap:footer"/>
           <p:cNvSpPr txBox="1"/>
           <p:nvPr/>
         </p:nvSpPr>
@@ -20561,7 +18251,7 @@
                 </a:solidFill>
                 <a:latin typeface="Pretendard"/>
               </a:rPr>
-              <a:t>© 2026 이애본(드림아이티비즈) · useful-ai.dreamitbiz.com · 교육 목적 비영리 이용 · 출처 표기</a:t>
+              <a:t>© 2026 이애본 · 홍문원(洪文院) 발행 · CC BY-NC-ND 4.0 · useful-ai.dreamitbiz.com</a:t>
             </a:r>
           </a:p>
         </p:txBody>
@@ -20750,7 +18440,7 @@
                 </a:solidFill>
                 <a:latin typeface="Pretendard"/>
               </a:rPr>
-              <a:t>HOW TO USE</a:t>
+              <a:t>COPYRIGHT · LICENSE</a:t>
             </a:r>
           </a:p>
         </p:txBody>
@@ -20789,7 +18479,7 @@
                 </a:solidFill>
                 <a:latin typeface="Pretendard"/>
               </a:rPr>
-              <a:t>이 자료 사용 방법</a:t>
+              <a:t>저작권 · 이용 조건 (CC BY-NC-ND 4.0)</a:t>
             </a:r>
           </a:p>
         </p:txBody>
@@ -20828,7 +18518,7 @@
                 </a:solidFill>
                 <a:latin typeface="Pretendard"/>
               </a:rPr>
-              <a:t>1.  수업·강의·자습에 그대로 쓰셔도 됩니다. 출처만 남겨 주세요.</a:t>
+              <a:t>1.  저작권 © 2026 이애본(드림아이티비즈 DreamIT Biz). 발행 홍문원(洪文院, 출판사 신고번호 제2026-000026호). 2026년 1월 「생성형 AI와 창의력·복합문제능력 향상 과정」 강의안을 전자출판용으로 다시 묶은 것입니다. ISBN: 등록 후 기재.</a:t>
             </a:r>
           </a:p>
           <a:p>
@@ -20847,7 +18537,7 @@
                 </a:solidFill>
                 <a:latin typeface="Pretendard"/>
               </a:rPr>
-              <a:t>2.  PDF 는 화면으로 읽는 용도, PPTX 는 발표용입니다. PPTX 는 Pretendard 글꼴이 설치된 컴퓨터에서 가장 똑같이 보입니다.</a:t>
+              <a:t>2.  이 자료는 크리에이티브 커먼즈 저작자표시-비영리-변경금지 4.0 국제(CC BY-NC-ND 4.0) 라이선스를 따릅니다. creativecommons.org/licenses/by-nc-nd/4.0/deed.ko</a:t>
             </a:r>
           </a:p>
           <a:p>
@@ -20866,7 +18556,7 @@
                 </a:solidFill>
                 <a:latin typeface="Pretendard"/>
               </a:rPr>
-              <a:t>3.  출처 표기 예: 이애본(드림아이티비즈), 「자료 제목」, useful-ai.dreamitbiz.com</a:t>
+              <a:t>3.  저작자 표시(BY): 출처를 밝히면 그대로 복사해 수업·강의·자습에 쓸 수 있습니다. 비영리(NC): 유료 강의·판매·광고 수익 목적에는 쓸 수 없습니다. 변경금지(ND): 내용을 고치거나 잘라 재조합해 배포할 수 없습니다.</a:t>
             </a:r>
           </a:p>
           <a:p>
@@ -20885,7 +18575,7 @@
                 </a:solidFill>
                 <a:latin typeface="Pretendard"/>
               </a:rPr>
-              <a:t>4.  자료 안의 프롬프트는 복사해 바로 쓸 수 있습니다. [대괄호]만 내 상황으로 바꾸세요.</a:t>
+              <a:t>4.  자료 안의 외부 서비스 화면 캡처와 상표는 교육 목적 인용이며 각 서비스의 소유입니다. AI 생성 이미지는 생성 도구의 이용 약관을 따릅니다.</a:t>
             </a:r>
           </a:p>
           <a:p>
@@ -20904,7 +18594,7 @@
                 </a:solidFill>
                 <a:latin typeface="Pretendard"/>
               </a:rPr>
-              <a:t>5.  모든 자료와 영상 강의는 useful-ai.dreamitbiz.com 에서 다시 받을 수 있습니다.</a:t>
+              <a:t>5.  라이선스 범위 밖의 이용(영리·변형·2차 저작)은 먼저 문의해 주세요. aebon@dreamitbiz.com · 카카오톡 ID aebon</a:t>
             </a:r>
           </a:p>
         </p:txBody>
@@ -20943,7 +18633,7 @@
                 </a:solidFill>
                 <a:latin typeface="Pretendard"/>
               </a:rPr>
-              <a:t>© 2026 이애본(드림아이티비즈) · useful-ai.dreamitbiz.com · 교육 목적 비영리 이용 · 출처 표기</a:t>
+              <a:t>© 2026 이애본 · 홍문원(洪文院) 발행 · CC BY-NC-ND 4.0 · useful-ai.dreamitbiz.com</a:t>
             </a:r>
           </a:p>
         </p:txBody>
@@ -21132,7 +18822,7 @@
                 </a:solidFill>
                 <a:latin typeface="Pretendard"/>
               </a:rPr>
-              <a:t>COPYRIGHT · LICENSE</a:t>
+              <a:t>CREDITS · CONTACT</a:t>
             </a:r>
           </a:p>
         </p:txBody>
@@ -21171,7 +18861,7 @@
                 </a:solidFill>
                 <a:latin typeface="Pretendard"/>
               </a:rPr>
-              <a:t>저작권 · 이용 조건</a:t>
+              <a:t>출처 · 문의</a:t>
             </a:r>
           </a:p>
         </p:txBody>
@@ -21210,7 +18900,7 @@
                 </a:solidFill>
                 <a:latin typeface="Pretendard"/>
               </a:rPr>
-              <a:t>1.  저작권 © 2026 이애본(드림아이티비즈 DreamIT Biz). 2026년 1월 「생성형 AI와 창의력·복합문제능력 향상 과정」 강의안을 공개용으로 다시 묶은 것입니다.</a:t>
+              <a:t>이애본 (Aebon Lee, Ph.D) — 드림아이티비즈 대표 · 한신대학교 AI·SW대학 겸임교수</a:t>
             </a:r>
           </a:p>
           <a:p>
@@ -21229,7 +18919,7 @@
                 </a:solidFill>
                 <a:latin typeface="Pretendard"/>
               </a:rPr>
-              <a:t>2.  교육 목적의 비영리 이용을 허용합니다 — 출처를 표기해 주세요.</a:t>
+              <a:t>useful-ai.dreamitbiz.com — 강의안·영상 강의 라이브러리</a:t>
             </a:r>
           </a:p>
           <a:p>
@@ -21248,7 +18938,7 @@
                 </a:solidFill>
                 <a:latin typeface="Pretendard"/>
               </a:rPr>
-              <a:t>3.  재배포·판매·변형(내용 수정 후 배포)은 허용하지 않습니다. 필요하면 먼저 문의해 주세요.</a:t>
+              <a:t>aebon@dreamitbiz.com · 카카오톡 ID aebon</a:t>
             </a:r>
           </a:p>
           <a:p>
@@ -21267,26 +18957,7 @@
                 </a:solidFill>
                 <a:latin typeface="Pretendard"/>
               </a:rPr>
-              <a:t>4.  자료 안의 외부 서비스 화면 캡처와 상표는 교육 목적 인용이며 각 서비스의 소유입니다. AI 생성 이미지는 생성 도구의 이용 약관을 따릅니다.</a:t>
-            </a:r>
-          </a:p>
-          <a:p>
-            <a:pPr algn="l">
-              <a:lnSpc>
-                <a:spcPct val="130000"/>
-              </a:lnSpc>
-              <a:spcBef>
-                <a:spcPts val="900"/>
-              </a:spcBef>
-            </a:pPr>
-            <a:r>
-              <a:rPr sz="1500" b="0">
-                <a:solidFill>
-                  <a:srgbClr val="333333"/>
-                </a:solidFill>
-                <a:latin typeface="Pretendard"/>
-              </a:rPr>
-              <a:t>5.  문의 aebon@dreamitbiz.com · 카카오톡 ID aebon</a:t>
+              <a:t>© 2026 이애본 · 발행 홍문원(洪文院) · CC BY-NC-ND 4.0</a:t>
             </a:r>
           </a:p>
         </p:txBody>
@@ -21325,370 +18996,7 @@
                 </a:solidFill>
                 <a:latin typeface="Pretendard"/>
               </a:rPr>
-              <a:t>© 2026 이애본(드림아이티비즈) · useful-ai.dreamitbiz.com · 교육 목적 비영리 이용 · 출처 표기</a:t>
-            </a:r>
-          </a:p>
-        </p:txBody>
-      </p:sp>
-    </p:spTree>
-  </p:cSld>
-  <p:clrMapOvr>
-    <a:masterClrMapping/>
-  </p:clrMapOvr>
-</p:sld>
-</file>
-
-<file path=ppt/slides/slide22.xml><?xml version="1.0" encoding="utf-8"?>
-<p:sld xmlns:a="http://schemas.openxmlformats.org/drawingml/2006/main" xmlns:p="http://schemas.openxmlformats.org/presentationml/2006/main" xmlns:r="http://schemas.openxmlformats.org/officeDocument/2006/relationships">
-  <p:cSld>
-    <p:spTree>
-      <p:nvGrpSpPr>
-        <p:cNvPr id="1" name=""/>
-        <p:cNvGrpSpPr/>
-        <p:nvPr/>
-      </p:nvGrpSpPr>
-      <p:grpSpPr/>
-      <p:sp>
-        <p:nvSpPr>
-          <p:cNvPr id="2" name="deckgen:wrap:bg"/>
-          <p:cNvSpPr/>
-          <p:nvPr/>
-        </p:nvSpPr>
-        <p:spPr>
-          <a:xfrm>
-            <a:off x="0" y="0"/>
-            <a:ext cx="12192000" cy="6858000"/>
-          </a:xfrm>
-          <a:prstGeom prst="rect">
-            <a:avLst/>
-          </a:prstGeom>
-          <a:solidFill>
-            <a:srgbClr val="FFFFFF"/>
-          </a:solidFill>
-          <a:ln>
-            <a:noFill/>
-          </a:ln>
-          <a:effectLst/>
-        </p:spPr>
-        <p:style>
-          <a:lnRef idx="1">
-            <a:schemeClr val="accent1"/>
-          </a:lnRef>
-          <a:fillRef idx="3">
-            <a:schemeClr val="accent1"/>
-          </a:fillRef>
-          <a:effectRef idx="2">
-            <a:schemeClr val="accent1"/>
-          </a:effectRef>
-          <a:fontRef idx="minor">
-            <a:schemeClr val="lt1"/>
-          </a:fontRef>
-        </p:style>
-        <p:txBody>
-          <a:bodyPr rtlCol="0" anchor="ctr"/>
-          <a:lstStyle/>
-          <a:p>
-            <a:pPr algn="ctr"/>
-          </a:p>
-        </p:txBody>
-      </p:sp>
-      <p:sp>
-        <p:nvSpPr>
-          <p:cNvPr id="3" name="deckgen:wrap:side"/>
-          <p:cNvSpPr/>
-          <p:nvPr/>
-        </p:nvSpPr>
-        <p:spPr>
-          <a:xfrm>
-            <a:off x="0" y="0"/>
-            <a:ext cx="146304" cy="6858000"/>
-          </a:xfrm>
-          <a:prstGeom prst="rect">
-            <a:avLst/>
-          </a:prstGeom>
-          <a:solidFill>
-            <a:srgbClr val="0072CE"/>
-          </a:solidFill>
-          <a:ln>
-            <a:noFill/>
-          </a:ln>
-          <a:effectLst/>
-        </p:spPr>
-        <p:style>
-          <a:lnRef idx="1">
-            <a:schemeClr val="accent1"/>
-          </a:lnRef>
-          <a:fillRef idx="3">
-            <a:schemeClr val="accent1"/>
-          </a:fillRef>
-          <a:effectRef idx="2">
-            <a:schemeClr val="accent1"/>
-          </a:effectRef>
-          <a:fontRef idx="minor">
-            <a:schemeClr val="lt1"/>
-          </a:fontRef>
-        </p:style>
-        <p:txBody>
-          <a:bodyPr rtlCol="0" anchor="ctr"/>
-          <a:lstStyle/>
-          <a:p>
-            <a:pPr algn="ctr"/>
-          </a:p>
-        </p:txBody>
-      </p:sp>
-      <p:sp>
-        <p:nvSpPr>
-          <p:cNvPr id="4" name="deckgen:wrap:rule"/>
-          <p:cNvSpPr/>
-          <p:nvPr/>
-        </p:nvSpPr>
-        <p:spPr>
-          <a:xfrm>
-            <a:off x="853440" y="2057400"/>
-            <a:ext cx="975360" cy="38100"/>
-          </a:xfrm>
-          <a:prstGeom prst="rect">
-            <a:avLst/>
-          </a:prstGeom>
-          <a:solidFill>
-            <a:srgbClr val="0072CE"/>
-          </a:solidFill>
-          <a:ln>
-            <a:noFill/>
-          </a:ln>
-          <a:effectLst/>
-        </p:spPr>
-        <p:style>
-          <a:lnRef idx="1">
-            <a:schemeClr val="accent1"/>
-          </a:lnRef>
-          <a:fillRef idx="3">
-            <a:schemeClr val="accent1"/>
-          </a:fillRef>
-          <a:effectRef idx="2">
-            <a:schemeClr val="accent1"/>
-          </a:effectRef>
-          <a:fontRef idx="minor">
-            <a:schemeClr val="lt1"/>
-          </a:fontRef>
-        </p:style>
-        <p:txBody>
-          <a:bodyPr rtlCol="0" anchor="ctr"/>
-          <a:lstStyle/>
-          <a:p>
-            <a:pPr algn="ctr"/>
-          </a:p>
-        </p:txBody>
-      </p:sp>
-      <p:sp>
-        <p:nvSpPr>
-          <p:cNvPr id="5" name="deckgen:wrap:eyebrow"/>
-          <p:cNvSpPr txBox="1"/>
-          <p:nvPr/>
-        </p:nvSpPr>
-        <p:spPr>
-          <a:xfrm>
-            <a:off x="853440" y="1165860"/>
-            <a:ext cx="10485120" cy="342900"/>
-          </a:xfrm>
-          <a:prstGeom prst="rect">
-            <a:avLst/>
-          </a:prstGeom>
-          <a:noFill/>
-        </p:spPr>
-        <p:txBody>
-          <a:bodyPr wrap="square" anchor="t" lIns="0" rIns="0" tIns="0" bIns="0">
-            <a:spAutoFit/>
-          </a:bodyPr>
-          <a:lstStyle/>
-          <a:p>
-            <a:pPr algn="l">
-              <a:lnSpc>
-                <a:spcPct val="125000"/>
-              </a:lnSpc>
-            </a:pPr>
-            <a:r>
-              <a:rPr sz="1200" b="1">
-                <a:solidFill>
-                  <a:srgbClr val="0072CE"/>
-                </a:solidFill>
-                <a:latin typeface="Pretendard"/>
-              </a:rPr>
-              <a:t>CREDITS · CONTACT</a:t>
-            </a:r>
-          </a:p>
-        </p:txBody>
-      </p:sp>
-      <p:sp>
-        <p:nvSpPr>
-          <p:cNvPr id="6" name="deckgen:wrap:title"/>
-          <p:cNvSpPr txBox="1"/>
-          <p:nvPr/>
-        </p:nvSpPr>
-        <p:spPr>
-          <a:xfrm>
-            <a:off x="853440" y="1440180"/>
-            <a:ext cx="10485120" cy="617220"/>
-          </a:xfrm>
-          <a:prstGeom prst="rect">
-            <a:avLst/>
-          </a:prstGeom>
-          <a:noFill/>
-        </p:spPr>
-        <p:txBody>
-          <a:bodyPr wrap="square" anchor="t" lIns="0" rIns="0" tIns="0" bIns="0">
-            <a:spAutoFit/>
-          </a:bodyPr>
-          <a:lstStyle/>
-          <a:p>
-            <a:pPr algn="l">
-              <a:lnSpc>
-                <a:spcPct val="125000"/>
-              </a:lnSpc>
-            </a:pPr>
-            <a:r>
-              <a:rPr sz="3000" b="1">
-                <a:solidFill>
-                  <a:srgbClr val="1A2A5E"/>
-                </a:solidFill>
-                <a:latin typeface="Pretendard"/>
-              </a:rPr>
-              <a:t>출처 · 문의</a:t>
-            </a:r>
-          </a:p>
-        </p:txBody>
-      </p:sp>
-      <p:sp>
-        <p:nvSpPr>
-          <p:cNvPr id="7" name="deckgen:wrap:body"/>
-          <p:cNvSpPr txBox="1"/>
-          <p:nvPr/>
-        </p:nvSpPr>
-        <p:spPr>
-          <a:xfrm>
-            <a:off x="853440" y="2400300"/>
-            <a:ext cx="10485120" cy="3566160"/>
-          </a:xfrm>
-          <a:prstGeom prst="rect">
-            <a:avLst/>
-          </a:prstGeom>
-          <a:noFill/>
-        </p:spPr>
-        <p:txBody>
-          <a:bodyPr wrap="square" anchor="t" lIns="0" rIns="0" tIns="0" bIns="0">
-            <a:spAutoFit/>
-          </a:bodyPr>
-          <a:lstStyle/>
-          <a:p>
-            <a:pPr algn="l">
-              <a:lnSpc>
-                <a:spcPct val="130000"/>
-              </a:lnSpc>
-            </a:pPr>
-            <a:r>
-              <a:rPr sz="1500" b="0">
-                <a:solidFill>
-                  <a:srgbClr val="333333"/>
-                </a:solidFill>
-                <a:latin typeface="Pretendard"/>
-              </a:rPr>
-              <a:t>이애본 (Aebon Lee, Ph.D) — 드림아이티비즈 대표 · 한신대학교 AI·SW대학 겸임교수</a:t>
-            </a:r>
-          </a:p>
-          <a:p>
-            <a:pPr algn="l">
-              <a:lnSpc>
-                <a:spcPct val="130000"/>
-              </a:lnSpc>
-              <a:spcBef>
-                <a:spcPts val="900"/>
-              </a:spcBef>
-            </a:pPr>
-            <a:r>
-              <a:rPr sz="1500" b="0">
-                <a:solidFill>
-                  <a:srgbClr val="333333"/>
-                </a:solidFill>
-                <a:latin typeface="Pretendard"/>
-              </a:rPr>
-              <a:t>useful-ai.dreamitbiz.com — 강의안·영상 강의 라이브러리</a:t>
-            </a:r>
-          </a:p>
-          <a:p>
-            <a:pPr algn="l">
-              <a:lnSpc>
-                <a:spcPct val="130000"/>
-              </a:lnSpc>
-              <a:spcBef>
-                <a:spcPts val="900"/>
-              </a:spcBef>
-            </a:pPr>
-            <a:r>
-              <a:rPr sz="1500" b="0">
-                <a:solidFill>
-                  <a:srgbClr val="333333"/>
-                </a:solidFill>
-                <a:latin typeface="Pretendard"/>
-              </a:rPr>
-              <a:t>aebon@dreamitbiz.com · 카카오톡 ID aebon</a:t>
-            </a:r>
-          </a:p>
-          <a:p>
-            <a:pPr algn="l">
-              <a:lnSpc>
-                <a:spcPct val="130000"/>
-              </a:lnSpc>
-              <a:spcBef>
-                <a:spcPts val="900"/>
-              </a:spcBef>
-            </a:pPr>
-            <a:r>
-              <a:rPr sz="1500" b="0">
-                <a:solidFill>
-                  <a:srgbClr val="333333"/>
-                </a:solidFill>
-                <a:latin typeface="Pretendard"/>
-              </a:rPr>
-              <a:t>© 2026 이애본(드림아이티비즈). 교육 목적 비영리 이용 · 출처 표기</a:t>
-            </a:r>
-          </a:p>
-        </p:txBody>
-      </p:sp>
-      <p:sp>
-        <p:nvSpPr>
-          <p:cNvPr id="8" name="deckgen:wrap:footer"/>
-          <p:cNvSpPr txBox="1"/>
-          <p:nvPr/>
-        </p:nvSpPr>
-        <p:spPr>
-          <a:xfrm>
-            <a:off x="853440" y="6240780"/>
-            <a:ext cx="10485120" cy="342900"/>
-          </a:xfrm>
-          <a:prstGeom prst="rect">
-            <a:avLst/>
-          </a:prstGeom>
-          <a:noFill/>
-        </p:spPr>
-        <p:txBody>
-          <a:bodyPr wrap="square" anchor="t" lIns="0" rIns="0" tIns="0" bIns="0">
-            <a:spAutoFit/>
-          </a:bodyPr>
-          <a:lstStyle/>
-          <a:p>
-            <a:pPr algn="r">
-              <a:lnSpc>
-                <a:spcPct val="125000"/>
-              </a:lnSpc>
-            </a:pPr>
-            <a:r>
-              <a:rPr sz="900" b="0">
-                <a:solidFill>
-                  <a:srgbClr val="888888"/>
-                </a:solidFill>
-                <a:latin typeface="Pretendard"/>
-              </a:rPr>
-              <a:t>© 2026 이애본(드림아이티비즈) · useful-ai.dreamitbiz.com · 교육 목적 비영리 이용 · 출처 표기</a:t>
+              <a:t>© 2026 이애본 · 홍문원(洪文院) 발행 · CC BY-NC-ND 4.0 · useful-ai.dreamitbiz.com</a:t>
             </a:r>
           </a:p>
         </p:txBody>
@@ -23627,7 +20935,7 @@
                 </a:solidFill>
                 <a:latin typeface="Pretendard"/>
               </a:rPr>
-              <a:t>© 2026 이애본(드림아이티비즈) · useful-ai.dreamitbiz.com · 교육 목적 비영리 이용 · 출처 표기</a:t>
+              <a:t>© 2026 이애본 · 홍문원(洪文院) 발행 · CC BY-NC-ND 4.0 · useful-ai.dreamitbiz.com</a:t>
             </a:r>
           </a:p>
         </p:txBody>
@@ -25074,7 +22382,7 @@
                 </a:solidFill>
                 <a:latin typeface="Pretendard"/>
               </a:rPr>
-              <a:t>© 2026 이애본(드림아이티비즈) · useful-ai.dreamitbiz.com · 교육 목적 비영리 이용 · 출처 표기</a:t>
+              <a:t>© 2026 이애본 · 홍문원(洪文院) 발행 · CC BY-NC-ND 4.0 · useful-ai.dreamitbiz.com</a:t>
             </a:r>
           </a:p>
         </p:txBody>
@@ -25973,7 +23281,7 @@
                 <a:ea typeface="Noto Sans KR" pitchFamily="34" charset="-122"/>
                 <a:cs typeface="Noto Sans KR" pitchFamily="34" charset="-120"/>
               </a:rPr>
-              <a:t>🎯 추천 목표</a:t>
+              <a:t>추천 목표</a:t>
             </a:r>
             <a:endParaRPr lang="en-US" sz="900" dirty="0"/>
           </a:p>
@@ -26399,7 +23707,7 @@
                 <a:ea typeface="Noto Sans KR" pitchFamily="34" charset="-122"/>
                 <a:cs typeface="Noto Sans KR" pitchFamily="34" charset="-120"/>
               </a:rPr>
-              <a:t>🎯 추천 목표</a:t>
+              <a:t>추천 목표</a:t>
             </a:r>
             <a:endParaRPr lang="en-US" sz="900" dirty="0"/>
           </a:p>
@@ -26757,7 +24065,7 @@
                 <a:ea typeface="Noto Sans KR" pitchFamily="34" charset="-122"/>
                 <a:cs typeface="Noto Sans KR" pitchFamily="34" charset="-120"/>
               </a:rPr>
-              <a:t>🎯 추천 목표</a:t>
+              <a:t>추천 목표</a:t>
             </a:r>
             <a:endParaRPr lang="en-US" sz="900" dirty="0"/>
           </a:p>
@@ -27183,7 +24491,7 @@
                 <a:ea typeface="Noto Sans KR" pitchFamily="34" charset="-122"/>
                 <a:cs typeface="Noto Sans KR" pitchFamily="34" charset="-120"/>
               </a:rPr>
-              <a:t>🎯 추천 목표</a:t>
+              <a:t>추천 목표</a:t>
             </a:r>
             <a:endParaRPr lang="en-US" sz="900" dirty="0"/>
           </a:p>
@@ -27339,7 +24647,7 @@
                 </a:solidFill>
                 <a:latin typeface="Pretendard"/>
               </a:rPr>
-              <a:t>© 2026 이애본(드림아이티비즈) · useful-ai.dreamitbiz.com · 교육 목적 비영리 이용 · 출처 표기</a:t>
+              <a:t>© 2026 이애본 · 홍문원(洪文院) 발행 · CC BY-NC-ND 4.0 · useful-ai.dreamitbiz.com</a:t>
             </a:r>
           </a:p>
         </p:txBody>
@@ -29595,7 +26903,43 @@
       </p:sp>
       <p:sp>
         <p:nvSpPr>
-          <p:cNvPr id="70" name="deckgen:wrap:footer"/>
+          <p:cNvPr id="70" name="Stage3 Note"/>
+          <p:cNvSpPr txBox="1"/>
+          <p:nvPr/>
+        </p:nvSpPr>
+        <p:spPr>
+          <a:xfrm>
+            <a:off x="761695" y="6250000"/>
+            <a:ext cx="5300000" cy="230000"/>
+          </a:xfrm>
+          <a:prstGeom prst="rect">
+            <a:avLst/>
+          </a:prstGeom>
+          <a:noFill/>
+        </p:spPr>
+        <p:txBody>
+          <a:bodyPr wrap="square" lIns="0" rIns="0" tIns="0" bIns="0" anchor="t">
+            <a:spAutoFit/>
+          </a:bodyPr>
+          <a:lstStyle/>
+          <a:p>
+            <a:r>
+              <a:rPr sz="900">
+                <a:solidFill>
+                  <a:srgbClr val="8B95A7"/>
+                </a:solidFill>
+                <a:latin typeface="Noto Sans KR"/>
+                <a:ea typeface="Noto Sans KR"/>
+                <a:cs typeface="Noto Sans KR"/>
+              </a:rPr>
+              <a:t>메뉴 이름·위치는 업데이트로 바뀐다. 노션 도움말 「Navigate with the sidebar」 참조(2026-10 기준).</a:t>
+            </a:r>
+          </a:p>
+        </p:txBody>
+      </p:sp>
+      <p:sp>
+        <p:nvSpPr>
+          <p:cNvPr id="71" name="deckgen:wrap:footer"/>
           <p:cNvSpPr txBox="1"/>
           <p:nvPr/>
         </p:nvSpPr>
@@ -29627,7 +26971,7 @@
                 </a:solidFill>
                 <a:latin typeface="Pretendard"/>
               </a:rPr>
-              <a:t>© 2026 이애본(드림아이티비즈) · useful-ai.dreamitbiz.com · 교육 목적 비영리 이용 · 출처 표기</a:t>
+              <a:t>© 2026 이애본 · 홍문원(洪文院) 발행 · CC BY-NC-ND 4.0 · useful-ai.dreamitbiz.com</a:t>
             </a:r>
           </a:p>
         </p:txBody>
@@ -30475,7 +27819,7 @@
                 <a:ea typeface="Noto Sans KR" pitchFamily="34" charset="-122"/>
                 <a:cs typeface="Noto Sans KR" pitchFamily="34" charset="-120"/>
               </a:rPr>
-              <a:t>사이드바의 [+ 페이지 추가] 버튼 클릭</a:t>
+              <a:t>사이드바의 새 페이지 버튼 또는 Ctrl/Cmd + N</a:t>
             </a:r>
             <a:endParaRPr lang="en-US" sz="1200" dirty="0"/>
           </a:p>
@@ -32424,7 +29768,43 @@
       </p:sp>
       <p:sp>
         <p:nvSpPr>
-          <p:cNvPr id="83" name="deckgen:wrap:footer"/>
+          <p:cNvPr id="83" name="Stage3 Note"/>
+          <p:cNvSpPr txBox="1"/>
+          <p:nvPr/>
+        </p:nvSpPr>
+        <p:spPr>
+          <a:xfrm>
+            <a:off x="761695" y="6500000"/>
+            <a:ext cx="10600000" cy="230000"/>
+          </a:xfrm>
+          <a:prstGeom prst="rect">
+            <a:avLst/>
+          </a:prstGeom>
+          <a:noFill/>
+        </p:spPr>
+        <p:txBody>
+          <a:bodyPr wrap="square" lIns="0" rIns="0" tIns="0" bIns="0" anchor="t">
+            <a:spAutoFit/>
+          </a:bodyPr>
+          <a:lstStyle/>
+          <a:p>
+            <a:r>
+              <a:rPr sz="900">
+                <a:solidFill>
+                  <a:srgbClr val="8B95A7"/>
+                </a:solidFill>
+                <a:latin typeface="Noto Sans KR"/>
+                <a:ea typeface="Noto Sans KR"/>
+                <a:cs typeface="Noto Sans KR"/>
+              </a:rPr>
+              <a:t>단축키: 노션 도움말 「Keyboard shortcuts」(2026-10 기준) https://www.notion.com/help/keyboard-shortcuts</a:t>
+            </a:r>
+          </a:p>
+        </p:txBody>
+      </p:sp>
+      <p:sp>
+        <p:nvSpPr>
+          <p:cNvPr id="84" name="deckgen:wrap:footer"/>
           <p:cNvSpPr txBox="1"/>
           <p:nvPr/>
         </p:nvSpPr>
@@ -32456,7 +29836,7 @@
                 </a:solidFill>
                 <a:latin typeface="Pretendard"/>
               </a:rPr>
-              <a:t>© 2026 이애본(드림아이티비즈) · useful-ai.dreamitbiz.com · 교육 목적 비영리 이용 · 출처 표기</a:t>
+              <a:t>© 2026 이애본 · 홍문원(洪文院) 발행 · CC BY-NC-ND 4.0 · useful-ai.dreamitbiz.com</a:t>
             </a:r>
           </a:p>
         </p:txBody>
@@ -33842,7 +31222,43 @@
       </p:sp>
       <p:sp>
         <p:nvSpPr>
-          <p:cNvPr id="44" name="deckgen:wrap:footer"/>
+          <p:cNvPr id="44" name="Stage3 Note"/>
+          <p:cNvSpPr txBox="1"/>
+          <p:nvPr/>
+        </p:nvSpPr>
+        <p:spPr>
+          <a:xfrm>
+            <a:off x="571500" y="6560000"/>
+            <a:ext cx="11049000" cy="230000"/>
+          </a:xfrm>
+          <a:prstGeom prst="rect">
+            <a:avLst/>
+          </a:prstGeom>
+          <a:noFill/>
+        </p:spPr>
+        <p:txBody>
+          <a:bodyPr wrap="square" lIns="0" rIns="0" tIns="0" bIns="0" anchor="t">
+            <a:spAutoFit/>
+          </a:bodyPr>
+          <a:lstStyle/>
+          <a:p>
+            <a:r>
+              <a:rPr sz="900">
+                <a:solidFill>
+                  <a:srgbClr val="8B95A7"/>
+                </a:solidFill>
+                <a:latin typeface="Noto Sans KR"/>
+                <a:ea typeface="Noto Sans KR"/>
+                <a:cs typeface="Noto Sans KR"/>
+              </a:rPr>
+              <a:t>단축키: 노션 도움말 「Keyboard shortcuts」(2026-10 기준) https://www.notion.com/help/keyboard-shortcuts</a:t>
+            </a:r>
+          </a:p>
+        </p:txBody>
+      </p:sp>
+      <p:sp>
+        <p:nvSpPr>
+          <p:cNvPr id="45" name="deckgen:wrap:footer"/>
           <p:cNvSpPr txBox="1"/>
           <p:nvPr/>
         </p:nvSpPr>
@@ -33874,7 +31290,7 @@
                 </a:solidFill>
                 <a:latin typeface="Pretendard"/>
               </a:rPr>
-              <a:t>© 2026 이애본(드림아이티비즈) · useful-ai.dreamitbiz.com · 교육 목적 비영리 이용 · 출처 표기</a:t>
+              <a:t>© 2026 이애본 · 홍문원(洪文院) 발행 · CC BY-NC-ND 4.0 · useful-ai.dreamitbiz.com</a:t>
             </a:r>
           </a:p>
         </p:txBody>
@@ -34903,104 +32319,6 @@
                 <a:t>실습 가이드</a:t>
               </a:r>
               <a:endParaRPr lang="en-US" sz="1800" dirty="0"/>
-            </a:p>
-          </p:txBody>
-        </p:sp>
-        <p:sp>
-          <p:nvSpPr>
-            <p:cNvPr id="32" name="Shape 25"/>
-            <p:cNvSpPr/>
-            <p:nvPr/>
-          </p:nvSpPr>
-          <p:spPr>
-            <a:xfrm>
-              <a:off x="10248595" y="2085746"/>
-              <a:ext cx="886054" cy="342900"/>
-            </a:xfrm>
-            <a:prstGeom prst="roundRect">
-              <a:avLst>
-                <a:gd name="adj" fmla="val 148148"/>
-              </a:avLst>
-            </a:prstGeom>
-            <a:solidFill>
-              <a:srgbClr val="EF4444"/>
-            </a:solidFill>
-            <a:ln/>
-            <a:effectLst>
-              <a:outerShdw blurRad="38100" dist="25400" dir="5400000" algn="bl" rotWithShape="0">
-                <a:srgbClr val="EF4444">
-                  <a:alpha val="30000"/>
-                </a:srgbClr>
-              </a:outerShdw>
-            </a:effectLst>
-          </p:spPr>
-          <p:txBody>
-            <a:bodyPr/>
-            <a:lstStyle/>
-            <a:p>
-              <a:endParaRPr lang="ko-KR" altLang="en-US"/>
-            </a:p>
-          </p:txBody>
-        </p:sp>
-        <p:pic>
-          <p:nvPicPr>
-            <p:cNvPr id="33" name="Image 5" descr="preencoded.png"/>
-            <p:cNvPicPr>
-              <a:picLocks noChangeAspect="1"/>
-            </p:cNvPicPr>
-            <p:nvPr/>
-          </p:nvPicPr>
-          <p:blipFill>
-            <a:blip r:embed="rId7"/>
-            <a:srcRect t="-43" b="-43"/>
-            <a:stretch/>
-          </p:blipFill>
-          <p:spPr>
-            <a:xfrm>
-              <a:off x="10382098" y="2180844"/>
-              <a:ext cx="133502" cy="152705"/>
-            </a:xfrm>
-            <a:prstGeom prst="rect">
-              <a:avLst/>
-            </a:prstGeom>
-          </p:spPr>
-        </p:pic>
-        <p:sp>
-          <p:nvSpPr>
-            <p:cNvPr id="34" name="Text 26"/>
-            <p:cNvSpPr txBox="1"/>
-            <p:nvPr/>
-          </p:nvSpPr>
-          <p:spPr>
-            <a:xfrm>
-              <a:off x="10591495" y="2143354"/>
-              <a:ext cx="523951" cy="228600"/>
-            </a:xfrm>
-            <a:prstGeom prst="rect">
-              <a:avLst/>
-            </a:prstGeom>
-            <a:noFill/>
-            <a:ln/>
-          </p:spPr>
-          <p:txBody>
-            <a:bodyPr wrap="square" lIns="0" tIns="0" rIns="0" bIns="0" rtlCol="0" anchor="ctr"/>
-            <a:lstStyle/>
-            <a:p>
-              <a:pPr marL="0" indent="0" algn="l">
-                <a:buNone/>
-              </a:pPr>
-              <a:r>
-                <a:rPr lang="en-US" sz="1200" b="1" dirty="0">
-                  <a:solidFill>
-                    <a:srgbClr val="FFFFFF"/>
-                  </a:solidFill>
-                  <a:latin typeface="Noto Sans KR" pitchFamily="34" charset="0"/>
-                  <a:ea typeface="Noto Sans KR" pitchFamily="34" charset="-122"/>
-                  <a:cs typeface="Noto Sans KR" pitchFamily="34" charset="-120"/>
-                </a:rPr>
-                <a:t>10:00</a:t>
-              </a:r>
-              <a:endParaRPr lang="en-US" sz="1200" dirty="0"/>
             </a:p>
           </p:txBody>
         </p:sp>
@@ -35940,7 +33258,7 @@
                   <a:ea typeface="Noto Sans KR" pitchFamily="34" charset="-122"/>
                   <a:cs typeface="Noto Sans KR" pitchFamily="34" charset="-120"/>
                 </a:rPr>
-                <a:t>즐겨찾기(⭐)</a:t>
+                <a:t>즐겨찾기</a:t>
               </a:r>
               <a:endParaRPr lang="en-US" sz="1000" dirty="0"/>
             </a:p>
@@ -36020,7 +33338,7 @@
                 </a:solidFill>
                 <a:latin typeface="Pretendard"/>
               </a:rPr>
-              <a:t>© 2026 이애본(드림아이티비즈) · useful-ai.dreamitbiz.com · 교육 목적 비영리 이용 · 출처 표기</a:t>
+              <a:t>© 2026 이애본 · 홍문원(洪文院) 발행 · CC BY-NC-ND 4.0 · useful-ai.dreamitbiz.com</a:t>
             </a:r>
           </a:p>
         </p:txBody>

--- a/library/b05-notion/b05-notion.pptx
+++ b/library/b05-notion/b05-notion.pptx
@@ -31999,7 +31999,7 @@
           <p:spPr>
             <a:xfrm>
               <a:off x="1028700" y="6077102"/>
-              <a:ext cx="3605479" cy="247802"/>
+              <a:ext cx="4191000" cy="247802"/>
             </a:xfrm>
             <a:prstGeom prst="rect">
               <a:avLst/>

--- a/library/b05-notion/b05-notion.pptx
+++ b/library/b05-notion/b05-notion.pptx
@@ -18518,7 +18518,7 @@
                 </a:solidFill>
                 <a:latin typeface="Pretendard"/>
               </a:rPr>
-              <a:t>1.  저작권 © 2026 이애본(드림아이티비즈 DreamIT Biz). 발행 홍문원(洪文院, 출판사 신고번호 제2026-000026호). 2026년 1월 「생성형 AI와 창의력·복합문제능력 향상 과정」 강의안을 전자출판용으로 다시 묶은 것입니다. ISBN: 등록 후 기재.</a:t>
+              <a:t>1.  저작권 © 2026 이애본(드림아이티비즈 DreamIT Biz). 발행 홍문원(洪文院, 출판사 신고번호 제2026-000026호). 이애본이 2026년 대학·기관 강의 현장에서 쓴 강의안을 전자출판용으로 다시 묶은 것입니다. ISBN: 등록 후 기재.</a:t>
             </a:r>
           </a:p>
           <a:p>
